--- a/docs/Group8_Final_Presentation.pptx
+++ b/docs/Group8_Final_Presentation.pptx
@@ -5,34 +5,34 @@
     <p:sldMasterId id="2147483648" r:id="rId1"/>
   </p:sldMasterIdLst>
   <p:sldIdLst>
-    <p:sldId id="256" r:id="rId7"/>
-    <p:sldId id="257" r:id="rId8"/>
-    <p:sldId id="258" r:id="rId9"/>
-    <p:sldId id="259" r:id="rId10"/>
-    <p:sldId id="260" r:id="rId11"/>
-    <p:sldId id="261" r:id="rId12"/>
-    <p:sldId id="262" r:id="rId13"/>
-    <p:sldId id="263" r:id="rId14"/>
-    <p:sldId id="264" r:id="rId15"/>
-    <p:sldId id="265" r:id="rId16"/>
-    <p:sldId id="266" r:id="rId17"/>
-    <p:sldId id="267" r:id="rId18"/>
-    <p:sldId id="268" r:id="rId19"/>
-    <p:sldId id="269" r:id="rId20"/>
-    <p:sldId id="270" r:id="rId21"/>
-    <p:sldId id="271" r:id="rId22"/>
-    <p:sldId id="272" r:id="rId23"/>
-    <p:sldId id="273" r:id="rId24"/>
-    <p:sldId id="274" r:id="rId25"/>
-    <p:sldId id="275" r:id="rId26"/>
-    <p:sldId id="276" r:id="rId27"/>
-    <p:sldId id="277" r:id="rId28"/>
-    <p:sldId id="278" r:id="rId29"/>
-    <p:sldId id="279" r:id="rId30"/>
-    <p:sldId id="280" r:id="rId31"/>
-    <p:sldId id="281" r:id="rId32"/>
+    <p:sldId id="256" r:id="rId2"/>
+    <p:sldId id="257" r:id="rId3"/>
+    <p:sldId id="258" r:id="rId4"/>
+    <p:sldId id="259" r:id="rId5"/>
+    <p:sldId id="260" r:id="rId6"/>
+    <p:sldId id="261" r:id="rId7"/>
+    <p:sldId id="262" r:id="rId8"/>
+    <p:sldId id="263" r:id="rId9"/>
+    <p:sldId id="264" r:id="rId10"/>
+    <p:sldId id="265" r:id="rId11"/>
+    <p:sldId id="266" r:id="rId12"/>
+    <p:sldId id="267" r:id="rId13"/>
+    <p:sldId id="268" r:id="rId14"/>
+    <p:sldId id="269" r:id="rId15"/>
+    <p:sldId id="270" r:id="rId16"/>
+    <p:sldId id="271" r:id="rId17"/>
+    <p:sldId id="272" r:id="rId18"/>
+    <p:sldId id="273" r:id="rId19"/>
+    <p:sldId id="274" r:id="rId20"/>
+    <p:sldId id="275" r:id="rId21"/>
+    <p:sldId id="276" r:id="rId22"/>
+    <p:sldId id="277" r:id="rId23"/>
+    <p:sldId id="278" r:id="rId24"/>
+    <p:sldId id="279" r:id="rId25"/>
+    <p:sldId id="280" r:id="rId26"/>
+    <p:sldId id="281" r:id="rId27"/>
   </p:sldIdLst>
-  <p:sldSz cx="12191695" cy="6858000" type="screen4x3"/>
+  <p:sldSz cx="12192000" cy="6858000"/>
   <p:notesSz cx="6858000" cy="9144000"/>
   <p:defaultTextStyle>
     <a:defPPr>
@@ -129,6 +129,22 @@
       </a:defRPr>
     </a:lvl9pPr>
   </p:defaultTextStyle>
+  <p:extLst>
+    <p:ext uri="{EFAFB233-063F-42B5-8137-9DF3F51BA10A}">
+      <p15:sldGuideLst xmlns:p15="http://schemas.microsoft.com/office/powerpoint/2012/main">
+        <p15:guide id="1" orient="horz" pos="2160">
+          <p15:clr>
+            <a:srgbClr val="A4A3A4"/>
+          </p15:clr>
+        </p15:guide>
+        <p15:guide id="2" pos="2880">
+          <p15:clr>
+            <a:srgbClr val="A4A3A4"/>
+          </p15:clr>
+        </p15:guide>
+      </p15:sldGuideLst>
+    </p:ext>
+  </p:extLst>
 </p:presentation>
 </file>
 
@@ -170,10 +186,9 @@
           <a:lstStyle/>
           <a:p>
             <a:r>
-              <a:rPr lang="en-US" smtClean="0"/>
+              <a:rPr lang="en-US"/>
               <a:t>Click to edit Master title style</a:t>
             </a:r>
-            <a:endParaRPr lang="en-US"/>
           </a:p>
         </p:txBody>
       </p:sp>
@@ -289,10 +304,9 @@
           </a:lstStyle>
           <a:p>
             <a:r>
-              <a:rPr lang="en-US" smtClean="0"/>
+              <a:rPr lang="en-US"/>
               <a:t>Click to edit Master subtitle style</a:t>
             </a:r>
-            <a:endParaRPr lang="en-US"/>
           </a:p>
         </p:txBody>
       </p:sp>
@@ -313,7 +327,7 @@
           <a:p>
             <a:fld id="{5BCAD085-E8A6-8845-BD4E-CB4CCA059FC4}" type="datetimeFigureOut">
               <a:rPr lang="en-US" smtClean="0"/>
-              <a:t>1/27/13</a:t>
+              <a:t>5/6/2026</a:t>
             </a:fld>
             <a:endParaRPr lang="en-US"/>
           </a:p>
@@ -407,10 +421,9 @@
           <a:lstStyle/>
           <a:p>
             <a:r>
-              <a:rPr lang="en-US" smtClean="0"/>
+              <a:rPr lang="en-US"/>
               <a:t>Click to edit Master title style</a:t>
             </a:r>
-            <a:endParaRPr lang="en-US"/>
           </a:p>
         </p:txBody>
       </p:sp>
@@ -431,38 +444,37 @@
           <a:p>
             <a:pPr lvl="0"/>
             <a:r>
-              <a:rPr lang="en-US" smtClean="0"/>
+              <a:rPr lang="en-US"/>
               <a:t>Click to edit Master text styles</a:t>
             </a:r>
           </a:p>
           <a:p>
             <a:pPr lvl="1"/>
             <a:r>
-              <a:rPr lang="en-US" smtClean="0"/>
+              <a:rPr lang="en-US"/>
               <a:t>Second level</a:t>
             </a:r>
           </a:p>
           <a:p>
             <a:pPr lvl="2"/>
             <a:r>
-              <a:rPr lang="en-US" smtClean="0"/>
+              <a:rPr lang="en-US"/>
               <a:t>Third level</a:t>
             </a:r>
           </a:p>
           <a:p>
             <a:pPr lvl="3"/>
             <a:r>
-              <a:rPr lang="en-US" smtClean="0"/>
+              <a:rPr lang="en-US"/>
               <a:t>Fourth level</a:t>
             </a:r>
           </a:p>
           <a:p>
             <a:pPr lvl="4"/>
             <a:r>
-              <a:rPr lang="en-US" smtClean="0"/>
+              <a:rPr lang="en-US"/>
               <a:t>Fifth level</a:t>
             </a:r>
-            <a:endParaRPr lang="en-US"/>
           </a:p>
         </p:txBody>
       </p:sp>
@@ -483,7 +495,7 @@
           <a:p>
             <a:fld id="{5BCAD085-E8A6-8845-BD4E-CB4CCA059FC4}" type="datetimeFigureOut">
               <a:rPr lang="en-US" smtClean="0"/>
-              <a:t>1/27/13</a:t>
+              <a:t>5/6/2026</a:t>
             </a:fld>
             <a:endParaRPr lang="en-US"/>
           </a:p>
@@ -582,10 +594,9 @@
           <a:lstStyle/>
           <a:p>
             <a:r>
-              <a:rPr lang="en-US" smtClean="0"/>
+              <a:rPr lang="en-US"/>
               <a:t>Click to edit Master title style</a:t>
             </a:r>
-            <a:endParaRPr lang="en-US"/>
           </a:p>
         </p:txBody>
       </p:sp>
@@ -611,38 +622,37 @@
           <a:p>
             <a:pPr lvl="0"/>
             <a:r>
-              <a:rPr lang="en-US" smtClean="0"/>
+              <a:rPr lang="en-US"/>
               <a:t>Click to edit Master text styles</a:t>
             </a:r>
           </a:p>
           <a:p>
             <a:pPr lvl="1"/>
             <a:r>
-              <a:rPr lang="en-US" smtClean="0"/>
+              <a:rPr lang="en-US"/>
               <a:t>Second level</a:t>
             </a:r>
           </a:p>
           <a:p>
             <a:pPr lvl="2"/>
             <a:r>
-              <a:rPr lang="en-US" smtClean="0"/>
+              <a:rPr lang="en-US"/>
               <a:t>Third level</a:t>
             </a:r>
           </a:p>
           <a:p>
             <a:pPr lvl="3"/>
             <a:r>
-              <a:rPr lang="en-US" smtClean="0"/>
+              <a:rPr lang="en-US"/>
               <a:t>Fourth level</a:t>
             </a:r>
           </a:p>
           <a:p>
             <a:pPr lvl="4"/>
             <a:r>
-              <a:rPr lang="en-US" smtClean="0"/>
+              <a:rPr lang="en-US"/>
               <a:t>Fifth level</a:t>
             </a:r>
-            <a:endParaRPr lang="en-US"/>
           </a:p>
         </p:txBody>
       </p:sp>
@@ -663,7 +673,7 @@
           <a:p>
             <a:fld id="{5BCAD085-E8A6-8845-BD4E-CB4CCA059FC4}" type="datetimeFigureOut">
               <a:rPr lang="en-US" smtClean="0"/>
-              <a:t>1/27/13</a:t>
+              <a:t>5/6/2026</a:t>
             </a:fld>
             <a:endParaRPr lang="en-US"/>
           </a:p>
@@ -757,10 +767,9 @@
           <a:lstStyle/>
           <a:p>
             <a:r>
-              <a:rPr lang="en-US" smtClean="0"/>
+              <a:rPr lang="en-US"/>
               <a:t>Click to edit Master title style</a:t>
             </a:r>
-            <a:endParaRPr lang="en-US"/>
           </a:p>
         </p:txBody>
       </p:sp>
@@ -781,38 +790,37 @@
           <a:p>
             <a:pPr lvl="0"/>
             <a:r>
-              <a:rPr lang="en-US" smtClean="0"/>
+              <a:rPr lang="en-US"/>
               <a:t>Click to edit Master text styles</a:t>
             </a:r>
           </a:p>
           <a:p>
             <a:pPr lvl="1"/>
             <a:r>
-              <a:rPr lang="en-US" smtClean="0"/>
+              <a:rPr lang="en-US"/>
               <a:t>Second level</a:t>
             </a:r>
           </a:p>
           <a:p>
             <a:pPr lvl="2"/>
             <a:r>
-              <a:rPr lang="en-US" smtClean="0"/>
+              <a:rPr lang="en-US"/>
               <a:t>Third level</a:t>
             </a:r>
           </a:p>
           <a:p>
             <a:pPr lvl="3"/>
             <a:r>
-              <a:rPr lang="en-US" smtClean="0"/>
+              <a:rPr lang="en-US"/>
               <a:t>Fourth level</a:t>
             </a:r>
           </a:p>
           <a:p>
             <a:pPr lvl="4"/>
             <a:r>
-              <a:rPr lang="en-US" smtClean="0"/>
+              <a:rPr lang="en-US"/>
               <a:t>Fifth level</a:t>
             </a:r>
-            <a:endParaRPr lang="en-US"/>
           </a:p>
         </p:txBody>
       </p:sp>
@@ -833,7 +841,7 @@
           <a:p>
             <a:fld id="{5BCAD085-E8A6-8845-BD4E-CB4CCA059FC4}" type="datetimeFigureOut">
               <a:rPr lang="en-US" smtClean="0"/>
-              <a:t>1/27/13</a:t>
+              <a:t>5/6/2026</a:t>
             </a:fld>
             <a:endParaRPr lang="en-US"/>
           </a:p>
@@ -936,10 +944,9 @@
           </a:lstStyle>
           <a:p>
             <a:r>
-              <a:rPr lang="en-US" smtClean="0"/>
+              <a:rPr lang="en-US"/>
               <a:t>Click to edit Master title style</a:t>
             </a:r>
-            <a:endParaRPr lang="en-US"/>
           </a:p>
         </p:txBody>
       </p:sp>
@@ -1056,7 +1063,7 @@
           <a:p>
             <a:pPr lvl="0"/>
             <a:r>
-              <a:rPr lang="en-US" smtClean="0"/>
+              <a:rPr lang="en-US"/>
               <a:t>Click to edit Master text styles</a:t>
             </a:r>
           </a:p>
@@ -1079,7 +1086,7 @@
           <a:p>
             <a:fld id="{5BCAD085-E8A6-8845-BD4E-CB4CCA059FC4}" type="datetimeFigureOut">
               <a:rPr lang="en-US" smtClean="0"/>
-              <a:t>1/27/13</a:t>
+              <a:t>5/6/2026</a:t>
             </a:fld>
             <a:endParaRPr lang="en-US"/>
           </a:p>
@@ -1173,10 +1180,9 @@
           <a:lstStyle/>
           <a:p>
             <a:r>
-              <a:rPr lang="en-US" smtClean="0"/>
+              <a:rPr lang="en-US"/>
               <a:t>Click to edit Master title style</a:t>
             </a:r>
-            <a:endParaRPr lang="en-US"/>
           </a:p>
         </p:txBody>
       </p:sp>
@@ -1230,38 +1236,37 @@
           <a:p>
             <a:pPr lvl="0"/>
             <a:r>
-              <a:rPr lang="en-US" smtClean="0"/>
+              <a:rPr lang="en-US"/>
               <a:t>Click to edit Master text styles</a:t>
             </a:r>
           </a:p>
           <a:p>
             <a:pPr lvl="1"/>
             <a:r>
-              <a:rPr lang="en-US" smtClean="0"/>
+              <a:rPr lang="en-US"/>
               <a:t>Second level</a:t>
             </a:r>
           </a:p>
           <a:p>
             <a:pPr lvl="2"/>
             <a:r>
-              <a:rPr lang="en-US" smtClean="0"/>
+              <a:rPr lang="en-US"/>
               <a:t>Third level</a:t>
             </a:r>
           </a:p>
           <a:p>
             <a:pPr lvl="3"/>
             <a:r>
-              <a:rPr lang="en-US" smtClean="0"/>
+              <a:rPr lang="en-US"/>
               <a:t>Fourth level</a:t>
             </a:r>
           </a:p>
           <a:p>
             <a:pPr lvl="4"/>
             <a:r>
-              <a:rPr lang="en-US" smtClean="0"/>
+              <a:rPr lang="en-US"/>
               <a:t>Fifth level</a:t>
             </a:r>
-            <a:endParaRPr lang="en-US"/>
           </a:p>
         </p:txBody>
       </p:sp>
@@ -1315,38 +1320,37 @@
           <a:p>
             <a:pPr lvl="0"/>
             <a:r>
-              <a:rPr lang="en-US" smtClean="0"/>
+              <a:rPr lang="en-US"/>
               <a:t>Click to edit Master text styles</a:t>
             </a:r>
           </a:p>
           <a:p>
             <a:pPr lvl="1"/>
             <a:r>
-              <a:rPr lang="en-US" smtClean="0"/>
+              <a:rPr lang="en-US"/>
               <a:t>Second level</a:t>
             </a:r>
           </a:p>
           <a:p>
             <a:pPr lvl="2"/>
             <a:r>
-              <a:rPr lang="en-US" smtClean="0"/>
+              <a:rPr lang="en-US"/>
               <a:t>Third level</a:t>
             </a:r>
           </a:p>
           <a:p>
             <a:pPr lvl="3"/>
             <a:r>
-              <a:rPr lang="en-US" smtClean="0"/>
+              <a:rPr lang="en-US"/>
               <a:t>Fourth level</a:t>
             </a:r>
           </a:p>
           <a:p>
             <a:pPr lvl="4"/>
             <a:r>
-              <a:rPr lang="en-US" smtClean="0"/>
+              <a:rPr lang="en-US"/>
               <a:t>Fifth level</a:t>
             </a:r>
-            <a:endParaRPr lang="en-US"/>
           </a:p>
         </p:txBody>
       </p:sp>
@@ -1367,7 +1371,7 @@
           <a:p>
             <a:fld id="{5BCAD085-E8A6-8845-BD4E-CB4CCA059FC4}" type="datetimeFigureOut">
               <a:rPr lang="en-US" smtClean="0"/>
-              <a:t>1/27/13</a:t>
+              <a:t>5/6/2026</a:t>
             </a:fld>
             <a:endParaRPr lang="en-US"/>
           </a:p>
@@ -1465,10 +1469,9 @@
           </a:lstStyle>
           <a:p>
             <a:r>
-              <a:rPr lang="en-US" smtClean="0"/>
+              <a:rPr lang="en-US"/>
               <a:t>Click to edit Master title style</a:t>
             </a:r>
-            <a:endParaRPr lang="en-US"/>
           </a:p>
         </p:txBody>
       </p:sp>
@@ -1531,7 +1534,7 @@
           <a:p>
             <a:pPr lvl="0"/>
             <a:r>
-              <a:rPr lang="en-US" smtClean="0"/>
+              <a:rPr lang="en-US"/>
               <a:t>Click to edit Master text styles</a:t>
             </a:r>
           </a:p>
@@ -1587,38 +1590,37 @@
           <a:p>
             <a:pPr lvl="0"/>
             <a:r>
-              <a:rPr lang="en-US" smtClean="0"/>
+              <a:rPr lang="en-US"/>
               <a:t>Click to edit Master text styles</a:t>
             </a:r>
           </a:p>
           <a:p>
             <a:pPr lvl="1"/>
             <a:r>
-              <a:rPr lang="en-US" smtClean="0"/>
+              <a:rPr lang="en-US"/>
               <a:t>Second level</a:t>
             </a:r>
           </a:p>
           <a:p>
             <a:pPr lvl="2"/>
             <a:r>
-              <a:rPr lang="en-US" smtClean="0"/>
+              <a:rPr lang="en-US"/>
               <a:t>Third level</a:t>
             </a:r>
           </a:p>
           <a:p>
             <a:pPr lvl="3"/>
             <a:r>
-              <a:rPr lang="en-US" smtClean="0"/>
+              <a:rPr lang="en-US"/>
               <a:t>Fourth level</a:t>
             </a:r>
           </a:p>
           <a:p>
             <a:pPr lvl="4"/>
             <a:r>
-              <a:rPr lang="en-US" smtClean="0"/>
+              <a:rPr lang="en-US"/>
               <a:t>Fifth level</a:t>
             </a:r>
-            <a:endParaRPr lang="en-US"/>
           </a:p>
         </p:txBody>
       </p:sp>
@@ -1681,7 +1683,7 @@
           <a:p>
             <a:pPr lvl="0"/>
             <a:r>
-              <a:rPr lang="en-US" smtClean="0"/>
+              <a:rPr lang="en-US"/>
               <a:t>Click to edit Master text styles</a:t>
             </a:r>
           </a:p>
@@ -1737,38 +1739,37 @@
           <a:p>
             <a:pPr lvl="0"/>
             <a:r>
-              <a:rPr lang="en-US" smtClean="0"/>
+              <a:rPr lang="en-US"/>
               <a:t>Click to edit Master text styles</a:t>
             </a:r>
           </a:p>
           <a:p>
             <a:pPr lvl="1"/>
             <a:r>
-              <a:rPr lang="en-US" smtClean="0"/>
+              <a:rPr lang="en-US"/>
               <a:t>Second level</a:t>
             </a:r>
           </a:p>
           <a:p>
             <a:pPr lvl="2"/>
             <a:r>
-              <a:rPr lang="en-US" smtClean="0"/>
+              <a:rPr lang="en-US"/>
               <a:t>Third level</a:t>
             </a:r>
           </a:p>
           <a:p>
             <a:pPr lvl="3"/>
             <a:r>
-              <a:rPr lang="en-US" smtClean="0"/>
+              <a:rPr lang="en-US"/>
               <a:t>Fourth level</a:t>
             </a:r>
           </a:p>
           <a:p>
             <a:pPr lvl="4"/>
             <a:r>
-              <a:rPr lang="en-US" smtClean="0"/>
+              <a:rPr lang="en-US"/>
               <a:t>Fifth level</a:t>
             </a:r>
-            <a:endParaRPr lang="en-US"/>
           </a:p>
         </p:txBody>
       </p:sp>
@@ -1789,7 +1790,7 @@
           <a:p>
             <a:fld id="{5BCAD085-E8A6-8845-BD4E-CB4CCA059FC4}" type="datetimeFigureOut">
               <a:rPr lang="en-US" smtClean="0"/>
-              <a:t>1/27/13</a:t>
+              <a:t>5/6/2026</a:t>
             </a:fld>
             <a:endParaRPr lang="en-US"/>
           </a:p>
@@ -1883,10 +1884,9 @@
           <a:lstStyle/>
           <a:p>
             <a:r>
-              <a:rPr lang="en-US" smtClean="0"/>
+              <a:rPr lang="en-US"/>
               <a:t>Click to edit Master title style</a:t>
             </a:r>
-            <a:endParaRPr lang="en-US"/>
           </a:p>
         </p:txBody>
       </p:sp>
@@ -1907,7 +1907,7 @@
           <a:p>
             <a:fld id="{5BCAD085-E8A6-8845-BD4E-CB4CCA059FC4}" type="datetimeFigureOut">
               <a:rPr lang="en-US" smtClean="0"/>
-              <a:t>1/27/13</a:t>
+              <a:t>5/6/2026</a:t>
             </a:fld>
             <a:endParaRPr lang="en-US"/>
           </a:p>
@@ -2002,7 +2002,7 @@
           <a:p>
             <a:fld id="{5BCAD085-E8A6-8845-BD4E-CB4CCA059FC4}" type="datetimeFigureOut">
               <a:rPr lang="en-US" smtClean="0"/>
-              <a:t>1/27/13</a:t>
+              <a:t>5/6/2026</a:t>
             </a:fld>
             <a:endParaRPr lang="en-US"/>
           </a:p>
@@ -2105,10 +2105,9 @@
           </a:lstStyle>
           <a:p>
             <a:r>
-              <a:rPr lang="en-US" smtClean="0"/>
+              <a:rPr lang="en-US"/>
               <a:t>Click to edit Master title style</a:t>
             </a:r>
-            <a:endParaRPr lang="en-US"/>
           </a:p>
         </p:txBody>
       </p:sp>
@@ -2162,38 +2161,37 @@
           <a:p>
             <a:pPr lvl="0"/>
             <a:r>
-              <a:rPr lang="en-US" smtClean="0"/>
+              <a:rPr lang="en-US"/>
               <a:t>Click to edit Master text styles</a:t>
             </a:r>
           </a:p>
           <a:p>
             <a:pPr lvl="1"/>
             <a:r>
-              <a:rPr lang="en-US" smtClean="0"/>
+              <a:rPr lang="en-US"/>
               <a:t>Second level</a:t>
             </a:r>
           </a:p>
           <a:p>
             <a:pPr lvl="2"/>
             <a:r>
-              <a:rPr lang="en-US" smtClean="0"/>
+              <a:rPr lang="en-US"/>
               <a:t>Third level</a:t>
             </a:r>
           </a:p>
           <a:p>
             <a:pPr lvl="3"/>
             <a:r>
-              <a:rPr lang="en-US" smtClean="0"/>
+              <a:rPr lang="en-US"/>
               <a:t>Fourth level</a:t>
             </a:r>
           </a:p>
           <a:p>
             <a:pPr lvl="4"/>
             <a:r>
-              <a:rPr lang="en-US" smtClean="0"/>
+              <a:rPr lang="en-US"/>
               <a:t>Fifth level</a:t>
             </a:r>
-            <a:endParaRPr lang="en-US"/>
           </a:p>
         </p:txBody>
       </p:sp>
@@ -2256,7 +2254,7 @@
           <a:p>
             <a:pPr lvl="0"/>
             <a:r>
-              <a:rPr lang="en-US" smtClean="0"/>
+              <a:rPr lang="en-US"/>
               <a:t>Click to edit Master text styles</a:t>
             </a:r>
           </a:p>
@@ -2279,7 +2277,7 @@
           <a:p>
             <a:fld id="{5BCAD085-E8A6-8845-BD4E-CB4CCA059FC4}" type="datetimeFigureOut">
               <a:rPr lang="en-US" smtClean="0"/>
-              <a:t>1/27/13</a:t>
+              <a:t>5/6/2026</a:t>
             </a:fld>
             <a:endParaRPr lang="en-US"/>
           </a:p>
@@ -2382,10 +2380,9 @@
           </a:lstStyle>
           <a:p>
             <a:r>
-              <a:rPr lang="en-US" smtClean="0"/>
+              <a:rPr lang="en-US"/>
               <a:t>Click to edit Master title style</a:t>
             </a:r>
-            <a:endParaRPr lang="en-US"/>
           </a:p>
         </p:txBody>
       </p:sp>
@@ -2509,7 +2506,7 @@
           <a:p>
             <a:pPr lvl="0"/>
             <a:r>
-              <a:rPr lang="en-US" smtClean="0"/>
+              <a:rPr lang="en-US"/>
               <a:t>Click to edit Master text styles</a:t>
             </a:r>
           </a:p>
@@ -2532,7 +2529,7 @@
           <a:p>
             <a:fld id="{5BCAD085-E8A6-8845-BD4E-CB4CCA059FC4}" type="datetimeFigureOut">
               <a:rPr lang="en-US" smtClean="0"/>
-              <a:t>1/27/13</a:t>
+              <a:t>5/6/2026</a:t>
             </a:fld>
             <a:endParaRPr lang="en-US"/>
           </a:p>
@@ -2641,10 +2638,9 @@
           <a:lstStyle/>
           <a:p>
             <a:r>
-              <a:rPr lang="en-US" smtClean="0"/>
+              <a:rPr lang="en-US"/>
               <a:t>Click to edit Master title style</a:t>
             </a:r>
-            <a:endParaRPr lang="en-US"/>
           </a:p>
         </p:txBody>
       </p:sp>
@@ -2675,38 +2671,37 @@
           <a:p>
             <a:pPr lvl="0"/>
             <a:r>
-              <a:rPr lang="en-US" smtClean="0"/>
+              <a:rPr lang="en-US"/>
               <a:t>Click to edit Master text styles</a:t>
             </a:r>
           </a:p>
           <a:p>
             <a:pPr lvl="1"/>
             <a:r>
-              <a:rPr lang="en-US" smtClean="0"/>
+              <a:rPr lang="en-US"/>
               <a:t>Second level</a:t>
             </a:r>
           </a:p>
           <a:p>
             <a:pPr lvl="2"/>
             <a:r>
-              <a:rPr lang="en-US" smtClean="0"/>
+              <a:rPr lang="en-US"/>
               <a:t>Third level</a:t>
             </a:r>
           </a:p>
           <a:p>
             <a:pPr lvl="3"/>
             <a:r>
-              <a:rPr lang="en-US" smtClean="0"/>
+              <a:rPr lang="en-US"/>
               <a:t>Fourth level</a:t>
             </a:r>
           </a:p>
           <a:p>
             <a:pPr lvl="4"/>
             <a:r>
-              <a:rPr lang="en-US" smtClean="0"/>
+              <a:rPr lang="en-US"/>
               <a:t>Fifth level</a:t>
             </a:r>
-            <a:endParaRPr lang="en-US"/>
           </a:p>
         </p:txBody>
       </p:sp>
@@ -2745,7 +2740,7 @@
           <a:p>
             <a:fld id="{5BCAD085-E8A6-8845-BD4E-CB4CCA059FC4}" type="datetimeFigureOut">
               <a:rPr lang="en-US" smtClean="0"/>
-              <a:t>1/27/13</a:t>
+              <a:t>5/6/2026</a:t>
             </a:fld>
             <a:endParaRPr lang="en-US"/>
           </a:p>
@@ -3104,7 +3099,7 @@
 </file>
 
 <file path=ppt/slides/slide1.xml><?xml version="1.0" encoding="utf-8"?>
-<p:sld xmlns:a="http://schemas.openxmlformats.org/drawingml/2006/main" xmlns:p="http://schemas.openxmlformats.org/presentationml/2006/main" xmlns:r="http://schemas.openxmlformats.org/officeDocument/2006/relationships">
+<p:sld xmlns:a="http://schemas.openxmlformats.org/drawingml/2006/main" xmlns:r="http://schemas.openxmlformats.org/officeDocument/2006/relationships" xmlns:p="http://schemas.openxmlformats.org/presentationml/2006/main">
   <p:cSld>
     <p:spTree>
       <p:nvGrpSpPr>
@@ -3112,7 +3107,14 @@
         <p:cNvGrpSpPr/>
         <p:nvPr/>
       </p:nvGrpSpPr>
-      <p:grpSpPr/>
+      <p:grpSpPr>
+        <a:xfrm>
+          <a:off x="0" y="0"/>
+          <a:ext cx="0" cy="0"/>
+          <a:chOff x="0" y="0"/>
+          <a:chExt cx="0" cy="0"/>
+        </a:xfrm>
+      </p:grpSpPr>
       <p:sp>
         <p:nvSpPr>
           <p:cNvPr id="2" name="Rectangle 1"/>
@@ -3154,6 +3156,7 @@
           <a:lstStyle/>
           <a:p>
             <a:pPr algn="ctr"/>
+            <a:endParaRPr/>
           </a:p>
         </p:txBody>
       </p:sp>
@@ -3198,6 +3201,7 @@
           <a:lstStyle/>
           <a:p>
             <a:pPr algn="ctr"/>
+            <a:endParaRPr/>
           </a:p>
         </p:txBody>
       </p:sp>
@@ -3242,6 +3246,7 @@
           <a:lstStyle/>
           <a:p>
             <a:pPr algn="ctr"/>
+            <a:endParaRPr/>
           </a:p>
         </p:txBody>
       </p:sp>
@@ -3286,6 +3291,7 @@
           <a:lstStyle/>
           <a:p>
             <a:pPr algn="ctr"/>
+            <a:endParaRPr/>
           </a:p>
         </p:txBody>
       </p:sp>
@@ -3330,6 +3336,7 @@
           <a:lstStyle/>
           <a:p>
             <a:pPr algn="ctr"/>
+            <a:endParaRPr/>
           </a:p>
         </p:txBody>
       </p:sp>
@@ -3350,7 +3357,7 @@
           <a:noFill/>
         </p:spPr>
         <p:txBody>
-          <a:bodyPr wrap="square" lIns="36576" rIns="36576" tIns="18288" bIns="18288" anchor="t">
+          <a:bodyPr wrap="square" lIns="36576" tIns="18288" rIns="36576" bIns="18288" anchor="t">
             <a:spAutoFit/>
           </a:bodyPr>
           <a:lstStyle/>
@@ -3385,7 +3392,7 @@
           <a:noFill/>
         </p:spPr>
         <p:txBody>
-          <a:bodyPr wrap="square" lIns="36576" rIns="36576" tIns="18288" bIns="18288" anchor="t">
+          <a:bodyPr wrap="square" lIns="36576" tIns="18288" rIns="36576" bIns="18288" anchor="t">
             <a:spAutoFit/>
           </a:bodyPr>
           <a:lstStyle/>
@@ -3420,7 +3427,7 @@
           <a:noFill/>
         </p:spPr>
         <p:txBody>
-          <a:bodyPr wrap="square" lIns="36576" rIns="36576" tIns="18288" bIns="18288" anchor="t">
+          <a:bodyPr wrap="square" lIns="36576" tIns="18288" rIns="36576" bIns="18288" anchor="t">
             <a:spAutoFit/>
           </a:bodyPr>
           <a:lstStyle/>
@@ -3455,7 +3462,7 @@
           <a:noFill/>
         </p:spPr>
         <p:txBody>
-          <a:bodyPr wrap="square" lIns="36576" rIns="36576" tIns="18288" bIns="18288" anchor="t">
+          <a:bodyPr wrap="square" lIns="36576" tIns="18288" rIns="36576" bIns="18288" anchor="t">
             <a:spAutoFit/>
           </a:bodyPr>
           <a:lstStyle/>
@@ -3490,7 +3497,7 @@
           <a:noFill/>
         </p:spPr>
         <p:txBody>
-          <a:bodyPr wrap="square" lIns="36576" rIns="36576" tIns="18288" bIns="18288" anchor="t">
+          <a:bodyPr wrap="square" lIns="36576" tIns="18288" rIns="36576" bIns="18288" anchor="t">
             <a:spAutoFit/>
           </a:bodyPr>
           <a:lstStyle/>
@@ -3588,7 +3595,7 @@
           <a:noFill/>
         </p:spPr>
         <p:txBody>
-          <a:bodyPr wrap="square" lIns="36576" rIns="36576" tIns="18288" bIns="18288" anchor="t">
+          <a:bodyPr wrap="square" lIns="36576" tIns="18288" rIns="36576" bIns="18288" anchor="t">
             <a:spAutoFit/>
           </a:bodyPr>
           <a:lstStyle/>
@@ -3623,7 +3630,7 @@
           <a:noFill/>
         </p:spPr>
         <p:txBody>
-          <a:bodyPr wrap="square" lIns="36576" rIns="36576" tIns="18288" bIns="18288" anchor="t">
+          <a:bodyPr wrap="square" lIns="36576" tIns="18288" rIns="36576" bIns="18288" anchor="t">
             <a:spAutoFit/>
           </a:bodyPr>
           <a:lstStyle/>
@@ -3658,7 +3665,7 @@
           <a:noFill/>
         </p:spPr>
         <p:txBody>
-          <a:bodyPr wrap="square" lIns="36576" rIns="36576" tIns="18288" bIns="18288" anchor="t">
+          <a:bodyPr wrap="square" lIns="36576" tIns="18288" rIns="36576" bIns="18288" anchor="t">
             <a:spAutoFit/>
           </a:bodyPr>
           <a:lstStyle/>
@@ -3688,7 +3695,7 @@
 </file>
 
 <file path=ppt/slides/slide10.xml><?xml version="1.0" encoding="utf-8"?>
-<p:sld xmlns:a="http://schemas.openxmlformats.org/drawingml/2006/main" xmlns:p="http://schemas.openxmlformats.org/presentationml/2006/main" xmlns:r="http://schemas.openxmlformats.org/officeDocument/2006/relationships">
+<p:sld xmlns:a="http://schemas.openxmlformats.org/drawingml/2006/main" xmlns:r="http://schemas.openxmlformats.org/officeDocument/2006/relationships" xmlns:p="http://schemas.openxmlformats.org/presentationml/2006/main">
   <p:cSld>
     <p:spTree>
       <p:nvGrpSpPr>
@@ -3696,7 +3703,14 @@
         <p:cNvGrpSpPr/>
         <p:nvPr/>
       </p:nvGrpSpPr>
-      <p:grpSpPr/>
+      <p:grpSpPr>
+        <a:xfrm>
+          <a:off x="0" y="0"/>
+          <a:ext cx="0" cy="0"/>
+          <a:chOff x="0" y="0"/>
+          <a:chExt cx="0" cy="0"/>
+        </a:xfrm>
+      </p:grpSpPr>
       <p:sp>
         <p:nvSpPr>
           <p:cNvPr id="2" name="Rectangle 1"/>
@@ -3738,6 +3752,7 @@
           <a:lstStyle/>
           <a:p>
             <a:pPr algn="ctr"/>
+            <a:endParaRPr/>
           </a:p>
         </p:txBody>
       </p:sp>
@@ -3782,6 +3797,7 @@
           <a:lstStyle/>
           <a:p>
             <a:pPr algn="ctr"/>
+            <a:endParaRPr/>
           </a:p>
         </p:txBody>
       </p:sp>
@@ -3826,6 +3842,7 @@
           <a:lstStyle/>
           <a:p>
             <a:pPr algn="ctr"/>
+            <a:endParaRPr/>
           </a:p>
         </p:txBody>
       </p:sp>
@@ -3846,7 +3863,7 @@
           <a:noFill/>
         </p:spPr>
         <p:txBody>
-          <a:bodyPr wrap="square" lIns="36576" rIns="36576" tIns="18288" bIns="18288" anchor="ctr">
+          <a:bodyPr wrap="square" lIns="36576" tIns="18288" rIns="36576" bIns="18288" anchor="ctr">
             <a:spAutoFit/>
           </a:bodyPr>
           <a:lstStyle/>
@@ -3881,7 +3898,7 @@
           <a:noFill/>
         </p:spPr>
         <p:txBody>
-          <a:bodyPr wrap="square" lIns="36576" rIns="36576" tIns="18288" bIns="18288" anchor="ctr">
+          <a:bodyPr wrap="square" lIns="36576" tIns="18288" rIns="36576" bIns="18288" anchor="ctr">
             <a:spAutoFit/>
           </a:bodyPr>
           <a:lstStyle/>
@@ -3916,7 +3933,7 @@
           <a:noFill/>
         </p:spPr>
         <p:txBody>
-          <a:bodyPr wrap="square" lIns="36576" rIns="36576" tIns="18288" bIns="18288" anchor="ctr">
+          <a:bodyPr wrap="square" lIns="36576" tIns="18288" rIns="36576" bIns="18288" anchor="ctr">
             <a:spAutoFit/>
           </a:bodyPr>
           <a:lstStyle/>
@@ -3951,7 +3968,7 @@
           <a:noFill/>
         </p:spPr>
         <p:txBody>
-          <a:bodyPr wrap="square" lIns="36576" rIns="36576" tIns="18288" bIns="18288" anchor="t">
+          <a:bodyPr wrap="square" lIns="36576" tIns="18288" rIns="36576" bIns="18288" anchor="t">
             <a:spAutoFit/>
           </a:bodyPr>
           <a:lstStyle/>
@@ -4010,6 +4027,7 @@
           <a:lstStyle/>
           <a:p>
             <a:pPr algn="ctr"/>
+            <a:endParaRPr/>
           </a:p>
         </p:txBody>
       </p:sp>
@@ -4030,7 +4048,7 @@
           <a:noFill/>
         </p:spPr>
         <p:txBody>
-          <a:bodyPr wrap="square" lIns="36576" rIns="36576" tIns="18288" bIns="18288" anchor="ctr">
+          <a:bodyPr wrap="square" lIns="36576" tIns="18288" rIns="36576" bIns="18288" anchor="ctr">
             <a:spAutoFit/>
           </a:bodyPr>
           <a:lstStyle/>
@@ -4065,7 +4083,7 @@
           <a:noFill/>
         </p:spPr>
         <p:txBody>
-          <a:bodyPr wrap="square" lIns="36576" rIns="36576" tIns="18288" bIns="18288" anchor="ctr">
+          <a:bodyPr wrap="square" lIns="36576" tIns="18288" rIns="36576" bIns="18288" anchor="ctr">
             <a:spAutoFit/>
           </a:bodyPr>
           <a:lstStyle/>
@@ -4100,7 +4118,7 @@
           <a:noFill/>
         </p:spPr>
         <p:txBody>
-          <a:bodyPr wrap="square" lIns="36576" rIns="36576" tIns="18288" bIns="18288" anchor="t">
+          <a:bodyPr wrap="square" lIns="36576" tIns="18288" rIns="36576" bIns="18288" anchor="t">
             <a:spAutoFit/>
           </a:bodyPr>
           <a:lstStyle/>
@@ -4135,7 +4153,7 @@
           <a:noFill/>
         </p:spPr>
         <p:txBody>
-          <a:bodyPr wrap="square" lIns="36576" rIns="36576" tIns="18288" bIns="18288" anchor="t">
+          <a:bodyPr wrap="square" lIns="36576" tIns="18288" rIns="36576" bIns="18288" anchor="t">
             <a:spAutoFit/>
           </a:bodyPr>
           <a:lstStyle/>
@@ -4174,7 +4192,7 @@
           <a:noFill/>
         </p:spPr>
         <p:txBody>
-          <a:bodyPr wrap="square" lIns="36576" rIns="36576" tIns="18288" bIns="18288" anchor="t">
+          <a:bodyPr wrap="square" lIns="36576" tIns="18288" rIns="36576" bIns="18288" anchor="t">
             <a:spAutoFit/>
           </a:bodyPr>
           <a:lstStyle/>
@@ -4209,7 +4227,7 @@
           <a:noFill/>
         </p:spPr>
         <p:txBody>
-          <a:bodyPr wrap="square" lIns="36576" rIns="36576" tIns="18288" bIns="18288" anchor="t">
+          <a:bodyPr wrap="square" lIns="36576" tIns="18288" rIns="36576" bIns="18288" anchor="t">
             <a:spAutoFit/>
           </a:bodyPr>
           <a:lstStyle/>
@@ -4248,7 +4266,7 @@
           <a:noFill/>
         </p:spPr>
         <p:txBody>
-          <a:bodyPr wrap="square" lIns="36576" rIns="36576" tIns="18288" bIns="18288" anchor="t">
+          <a:bodyPr wrap="square" lIns="36576" tIns="18288" rIns="36576" bIns="18288" anchor="t">
             <a:spAutoFit/>
           </a:bodyPr>
           <a:lstStyle/>
@@ -4307,6 +4325,7 @@
           <a:lstStyle/>
           <a:p>
             <a:pPr algn="ctr"/>
+            <a:endParaRPr/>
           </a:p>
         </p:txBody>
       </p:sp>
@@ -4327,7 +4346,7 @@
           <a:noFill/>
         </p:spPr>
         <p:txBody>
-          <a:bodyPr wrap="square" lIns="36576" rIns="36576" tIns="18288" bIns="18288" anchor="ctr">
+          <a:bodyPr wrap="square" lIns="36576" tIns="18288" rIns="36576" bIns="18288" anchor="ctr">
             <a:spAutoFit/>
           </a:bodyPr>
           <a:lstStyle/>
@@ -4362,7 +4381,7 @@
           <a:noFill/>
         </p:spPr>
         <p:txBody>
-          <a:bodyPr wrap="square" lIns="36576" rIns="36576" tIns="18288" bIns="18288" anchor="ctr">
+          <a:bodyPr wrap="square" lIns="36576" tIns="18288" rIns="36576" bIns="18288" anchor="ctr">
             <a:spAutoFit/>
           </a:bodyPr>
           <a:lstStyle/>
@@ -4397,7 +4416,7 @@
           <a:noFill/>
         </p:spPr>
         <p:txBody>
-          <a:bodyPr wrap="square" lIns="36576" rIns="36576" tIns="18288" bIns="18288" anchor="ctr">
+          <a:bodyPr wrap="square" lIns="36576" tIns="18288" rIns="36576" bIns="18288" anchor="ctr">
             <a:spAutoFit/>
           </a:bodyPr>
           <a:lstStyle/>
@@ -4456,6 +4475,7 @@
           <a:lstStyle/>
           <a:p>
             <a:pPr algn="ctr"/>
+            <a:endParaRPr/>
           </a:p>
         </p:txBody>
       </p:sp>
@@ -4476,7 +4496,7 @@
           <a:noFill/>
         </p:spPr>
         <p:txBody>
-          <a:bodyPr wrap="square" lIns="36576" rIns="36576" tIns="18288" bIns="18288" anchor="ctr">
+          <a:bodyPr wrap="square" lIns="36576" tIns="18288" rIns="36576" bIns="18288" anchor="ctr">
             <a:spAutoFit/>
           </a:bodyPr>
           <a:lstStyle/>
@@ -4511,7 +4531,7 @@
           <a:noFill/>
         </p:spPr>
         <p:txBody>
-          <a:bodyPr wrap="square" lIns="36576" rIns="36576" tIns="18288" bIns="18288" anchor="ctr">
+          <a:bodyPr wrap="square" lIns="36576" tIns="18288" rIns="36576" bIns="18288" anchor="ctr">
             <a:spAutoFit/>
           </a:bodyPr>
           <a:lstStyle/>
@@ -4546,7 +4566,7 @@
           <a:noFill/>
         </p:spPr>
         <p:txBody>
-          <a:bodyPr wrap="square" lIns="36576" rIns="36576" tIns="18288" bIns="18288" anchor="ctr">
+          <a:bodyPr wrap="square" lIns="36576" tIns="18288" rIns="36576" bIns="18288" anchor="ctr">
             <a:spAutoFit/>
           </a:bodyPr>
           <a:lstStyle/>
@@ -4605,6 +4625,7 @@
           <a:lstStyle/>
           <a:p>
             <a:pPr algn="ctr"/>
+            <a:endParaRPr/>
           </a:p>
         </p:txBody>
       </p:sp>
@@ -4625,7 +4646,7 @@
           <a:noFill/>
         </p:spPr>
         <p:txBody>
-          <a:bodyPr wrap="square" lIns="36576" rIns="36576" tIns="18288" bIns="18288" anchor="ctr">
+          <a:bodyPr wrap="square" lIns="36576" tIns="18288" rIns="36576" bIns="18288" anchor="ctr">
             <a:spAutoFit/>
           </a:bodyPr>
           <a:lstStyle/>
@@ -4660,7 +4681,7 @@
           <a:noFill/>
         </p:spPr>
         <p:txBody>
-          <a:bodyPr wrap="square" lIns="36576" rIns="36576" tIns="18288" bIns="18288" anchor="ctr">
+          <a:bodyPr wrap="square" lIns="36576" tIns="18288" rIns="36576" bIns="18288" anchor="ctr">
             <a:spAutoFit/>
           </a:bodyPr>
           <a:lstStyle/>
@@ -4695,7 +4716,7 @@
           <a:noFill/>
         </p:spPr>
         <p:txBody>
-          <a:bodyPr wrap="square" lIns="36576" rIns="36576" tIns="18288" bIns="18288" anchor="ctr">
+          <a:bodyPr wrap="square" lIns="36576" tIns="18288" rIns="36576" bIns="18288" anchor="ctr">
             <a:spAutoFit/>
           </a:bodyPr>
           <a:lstStyle/>
@@ -4754,6 +4775,7 @@
           <a:lstStyle/>
           <a:p>
             <a:pPr algn="ctr"/>
+            <a:endParaRPr/>
           </a:p>
         </p:txBody>
       </p:sp>
@@ -4774,7 +4796,7 @@
           <a:noFill/>
         </p:spPr>
         <p:txBody>
-          <a:bodyPr wrap="square" lIns="36576" rIns="36576" tIns="18288" bIns="18288" anchor="ctr">
+          <a:bodyPr wrap="square" lIns="36576" tIns="18288" rIns="36576" bIns="18288" anchor="ctr">
             <a:spAutoFit/>
           </a:bodyPr>
           <a:lstStyle/>
@@ -4809,7 +4831,7 @@
           <a:noFill/>
         </p:spPr>
         <p:txBody>
-          <a:bodyPr wrap="square" lIns="36576" rIns="36576" tIns="18288" bIns="18288" anchor="ctr">
+          <a:bodyPr wrap="square" lIns="36576" tIns="18288" rIns="36576" bIns="18288" anchor="ctr">
             <a:spAutoFit/>
           </a:bodyPr>
           <a:lstStyle/>
@@ -4844,7 +4866,7 @@
           <a:noFill/>
         </p:spPr>
         <p:txBody>
-          <a:bodyPr wrap="square" lIns="36576" rIns="36576" tIns="18288" bIns="18288" anchor="ctr">
+          <a:bodyPr wrap="square" lIns="36576" tIns="18288" rIns="36576" bIns="18288" anchor="ctr">
             <a:spAutoFit/>
           </a:bodyPr>
           <a:lstStyle/>
@@ -4903,6 +4925,7 @@
           <a:lstStyle/>
           <a:p>
             <a:pPr algn="ctr"/>
+            <a:endParaRPr/>
           </a:p>
         </p:txBody>
       </p:sp>
@@ -4923,7 +4946,7 @@
           <a:noFill/>
         </p:spPr>
         <p:txBody>
-          <a:bodyPr wrap="square" lIns="36576" rIns="36576" tIns="18288" bIns="18288" anchor="ctr">
+          <a:bodyPr wrap="square" lIns="36576" tIns="18288" rIns="36576" bIns="18288" anchor="ctr">
             <a:spAutoFit/>
           </a:bodyPr>
           <a:lstStyle/>
@@ -4958,7 +4981,7 @@
           <a:noFill/>
         </p:spPr>
         <p:txBody>
-          <a:bodyPr wrap="square" lIns="36576" rIns="36576" tIns="18288" bIns="18288" anchor="ctr">
+          <a:bodyPr wrap="square" lIns="36576" tIns="18288" rIns="36576" bIns="18288" anchor="ctr">
             <a:spAutoFit/>
           </a:bodyPr>
           <a:lstStyle/>
@@ -4993,7 +5016,7 @@
           <a:noFill/>
         </p:spPr>
         <p:txBody>
-          <a:bodyPr wrap="square" lIns="36576" rIns="36576" tIns="18288" bIns="18288" anchor="ctr">
+          <a:bodyPr wrap="square" lIns="36576" tIns="18288" rIns="36576" bIns="18288" anchor="ctr">
             <a:spAutoFit/>
           </a:bodyPr>
           <a:lstStyle/>
@@ -5052,6 +5075,7 @@
           <a:lstStyle/>
           <a:p>
             <a:pPr algn="ctr"/>
+            <a:endParaRPr/>
           </a:p>
         </p:txBody>
       </p:sp>
@@ -5072,7 +5096,7 @@
           <a:noFill/>
         </p:spPr>
         <p:txBody>
-          <a:bodyPr wrap="square" lIns="36576" rIns="36576" tIns="18288" bIns="18288" anchor="ctr">
+          <a:bodyPr wrap="square" lIns="36576" tIns="18288" rIns="36576" bIns="18288" anchor="ctr">
             <a:spAutoFit/>
           </a:bodyPr>
           <a:lstStyle/>
@@ -5107,7 +5131,7 @@
           <a:noFill/>
         </p:spPr>
         <p:txBody>
-          <a:bodyPr wrap="square" lIns="36576" rIns="36576" tIns="18288" bIns="18288" anchor="ctr">
+          <a:bodyPr wrap="square" lIns="36576" tIns="18288" rIns="36576" bIns="18288" anchor="ctr">
             <a:spAutoFit/>
           </a:bodyPr>
           <a:lstStyle/>
@@ -5142,7 +5166,7 @@
           <a:noFill/>
         </p:spPr>
         <p:txBody>
-          <a:bodyPr wrap="square" lIns="36576" rIns="36576" tIns="18288" bIns="18288" anchor="ctr">
+          <a:bodyPr wrap="square" lIns="36576" tIns="18288" rIns="36576" bIns="18288" anchor="ctr">
             <a:spAutoFit/>
           </a:bodyPr>
           <a:lstStyle/>
@@ -5201,6 +5225,7 @@
           <a:lstStyle/>
           <a:p>
             <a:pPr algn="ctr"/>
+            <a:endParaRPr/>
           </a:p>
         </p:txBody>
       </p:sp>
@@ -5221,7 +5246,7 @@
           <a:noFill/>
         </p:spPr>
         <p:txBody>
-          <a:bodyPr wrap="square" lIns="36576" rIns="36576" tIns="18288" bIns="18288" anchor="ctr">
+          <a:bodyPr wrap="square" lIns="36576" tIns="18288" rIns="36576" bIns="18288" anchor="ctr">
             <a:spAutoFit/>
           </a:bodyPr>
           <a:lstStyle/>
@@ -5256,7 +5281,7 @@
           <a:noFill/>
         </p:spPr>
         <p:txBody>
-          <a:bodyPr wrap="square" lIns="36576" rIns="36576" tIns="18288" bIns="18288" anchor="ctr">
+          <a:bodyPr wrap="square" lIns="36576" tIns="18288" rIns="36576" bIns="18288" anchor="ctr">
             <a:spAutoFit/>
           </a:bodyPr>
           <a:lstStyle/>
@@ -5291,7 +5316,7 @@
           <a:noFill/>
         </p:spPr>
         <p:txBody>
-          <a:bodyPr wrap="square" lIns="36576" rIns="36576" tIns="18288" bIns="18288" anchor="ctr">
+          <a:bodyPr wrap="square" lIns="36576" tIns="18288" rIns="36576" bIns="18288" anchor="ctr">
             <a:spAutoFit/>
           </a:bodyPr>
           <a:lstStyle/>
@@ -5352,6 +5377,7 @@
           <a:lstStyle/>
           <a:p>
             <a:pPr algn="ctr"/>
+            <a:endParaRPr/>
           </a:p>
         </p:txBody>
       </p:sp>
@@ -5372,7 +5398,7 @@
           <a:noFill/>
         </p:spPr>
         <p:txBody>
-          <a:bodyPr wrap="square" lIns="36576" rIns="36576" tIns="18288" bIns="18288" anchor="ctr">
+          <a:bodyPr wrap="square" lIns="36576" tIns="18288" rIns="36576" bIns="18288" anchor="ctr">
             <a:spAutoFit/>
           </a:bodyPr>
           <a:lstStyle/>
@@ -5447,7 +5473,7 @@
 </file>
 
 <file path=ppt/slides/slide11.xml><?xml version="1.0" encoding="utf-8"?>
-<p:sld xmlns:a="http://schemas.openxmlformats.org/drawingml/2006/main" xmlns:p="http://schemas.openxmlformats.org/presentationml/2006/main" xmlns:r="http://schemas.openxmlformats.org/officeDocument/2006/relationships">
+<p:sld xmlns:a="http://schemas.openxmlformats.org/drawingml/2006/main" xmlns:r="http://schemas.openxmlformats.org/officeDocument/2006/relationships" xmlns:p="http://schemas.openxmlformats.org/presentationml/2006/main">
   <p:cSld>
     <p:spTree>
       <p:nvGrpSpPr>
@@ -5455,7 +5481,14 @@
         <p:cNvGrpSpPr/>
         <p:nvPr/>
       </p:nvGrpSpPr>
-      <p:grpSpPr/>
+      <p:grpSpPr>
+        <a:xfrm>
+          <a:off x="0" y="0"/>
+          <a:ext cx="0" cy="0"/>
+          <a:chOff x="0" y="0"/>
+          <a:chExt cx="0" cy="0"/>
+        </a:xfrm>
+      </p:grpSpPr>
       <p:sp>
         <p:nvSpPr>
           <p:cNvPr id="2" name="Rectangle 1"/>
@@ -5497,6 +5530,7 @@
           <a:lstStyle/>
           <a:p>
             <a:pPr algn="ctr"/>
+            <a:endParaRPr/>
           </a:p>
         </p:txBody>
       </p:sp>
@@ -5541,6 +5575,7 @@
           <a:lstStyle/>
           <a:p>
             <a:pPr algn="ctr"/>
+            <a:endParaRPr/>
           </a:p>
         </p:txBody>
       </p:sp>
@@ -5585,6 +5620,7 @@
           <a:lstStyle/>
           <a:p>
             <a:pPr algn="ctr"/>
+            <a:endParaRPr/>
           </a:p>
         </p:txBody>
       </p:sp>
@@ -5605,7 +5641,7 @@
           <a:noFill/>
         </p:spPr>
         <p:txBody>
-          <a:bodyPr wrap="square" lIns="36576" rIns="36576" tIns="18288" bIns="18288" anchor="ctr">
+          <a:bodyPr wrap="square" lIns="36576" tIns="18288" rIns="36576" bIns="18288" anchor="ctr">
             <a:spAutoFit/>
           </a:bodyPr>
           <a:lstStyle/>
@@ -5640,7 +5676,7 @@
           <a:noFill/>
         </p:spPr>
         <p:txBody>
-          <a:bodyPr wrap="square" lIns="36576" rIns="36576" tIns="18288" bIns="18288" anchor="ctr">
+          <a:bodyPr wrap="square" lIns="36576" tIns="18288" rIns="36576" bIns="18288" anchor="ctr">
             <a:spAutoFit/>
           </a:bodyPr>
           <a:lstStyle/>
@@ -5675,7 +5711,7 @@
           <a:noFill/>
         </p:spPr>
         <p:txBody>
-          <a:bodyPr wrap="square" lIns="36576" rIns="36576" tIns="18288" bIns="18288" anchor="ctr">
+          <a:bodyPr wrap="square" lIns="36576" tIns="18288" rIns="36576" bIns="18288" anchor="ctr">
             <a:spAutoFit/>
           </a:bodyPr>
           <a:lstStyle/>
@@ -5710,7 +5746,7 @@
           <a:noFill/>
         </p:spPr>
         <p:txBody>
-          <a:bodyPr wrap="square" lIns="36576" rIns="36576" tIns="18288" bIns="18288" anchor="t">
+          <a:bodyPr wrap="square" lIns="36576" tIns="18288" rIns="36576" bIns="18288" anchor="t">
             <a:spAutoFit/>
           </a:bodyPr>
           <a:lstStyle/>
@@ -5769,6 +5805,7 @@
           <a:lstStyle/>
           <a:p>
             <a:pPr algn="ctr"/>
+            <a:endParaRPr/>
           </a:p>
         </p:txBody>
       </p:sp>
@@ -5789,7 +5826,7 @@
           <a:noFill/>
         </p:spPr>
         <p:txBody>
-          <a:bodyPr wrap="square" lIns="36576" rIns="36576" tIns="18288" bIns="18288" anchor="ctr">
+          <a:bodyPr wrap="square" lIns="36576" tIns="18288" rIns="36576" bIns="18288" anchor="ctr">
             <a:spAutoFit/>
           </a:bodyPr>
           <a:lstStyle/>
@@ -5824,7 +5861,7 @@
           <a:noFill/>
         </p:spPr>
         <p:txBody>
-          <a:bodyPr wrap="square" lIns="36576" rIns="36576" tIns="18288" bIns="18288" anchor="ctr">
+          <a:bodyPr wrap="square" lIns="36576" tIns="18288" rIns="36576" bIns="18288" anchor="ctr">
             <a:spAutoFit/>
           </a:bodyPr>
           <a:lstStyle/>
@@ -5883,6 +5920,7 @@
           <a:lstStyle/>
           <a:p>
             <a:pPr algn="ctr"/>
+            <a:endParaRPr/>
           </a:p>
         </p:txBody>
       </p:sp>
@@ -5903,7 +5941,7 @@
           <a:noFill/>
         </p:spPr>
         <p:txBody>
-          <a:bodyPr wrap="square" lIns="36576" rIns="36576" tIns="18288" bIns="18288" anchor="t">
+          <a:bodyPr wrap="square" lIns="36576" tIns="18288" rIns="36576" bIns="18288" anchor="t">
             <a:spAutoFit/>
           </a:bodyPr>
           <a:lstStyle/>
@@ -5938,7 +5976,7 @@
           <a:noFill/>
         </p:spPr>
         <p:txBody>
-          <a:bodyPr wrap="square" lIns="36576" rIns="36576" tIns="18288" bIns="18288" anchor="t">
+          <a:bodyPr wrap="square" lIns="36576" tIns="18288" rIns="36576" bIns="18288" anchor="t">
             <a:spAutoFit/>
           </a:bodyPr>
           <a:lstStyle/>
@@ -5973,7 +6011,7 @@
           <a:noFill/>
         </p:spPr>
         <p:txBody>
-          <a:bodyPr wrap="square" lIns="36576" rIns="36576" tIns="18288" bIns="18288" anchor="t">
+          <a:bodyPr wrap="square" lIns="36576" tIns="18288" rIns="36576" bIns="18288" anchor="t">
             <a:spAutoFit/>
           </a:bodyPr>
           <a:lstStyle/>
@@ -6008,7 +6046,7 @@
           <a:noFill/>
         </p:spPr>
         <p:txBody>
-          <a:bodyPr wrap="square" lIns="36576" rIns="36576" tIns="18288" bIns="18288" anchor="t">
+          <a:bodyPr wrap="square" lIns="36576" tIns="18288" rIns="36576" bIns="18288" anchor="t">
             <a:spAutoFit/>
           </a:bodyPr>
           <a:lstStyle/>
@@ -6043,7 +6081,7 @@
           <a:noFill/>
         </p:spPr>
         <p:txBody>
-          <a:bodyPr wrap="square" lIns="36576" rIns="36576" tIns="18288" bIns="18288" anchor="t">
+          <a:bodyPr wrap="square" lIns="36576" tIns="18288" rIns="36576" bIns="18288" anchor="t">
             <a:spAutoFit/>
           </a:bodyPr>
           <a:lstStyle/>
@@ -6078,7 +6116,7 @@
           <a:noFill/>
         </p:spPr>
         <p:txBody>
-          <a:bodyPr wrap="square" lIns="36576" rIns="36576" tIns="18288" bIns="18288" anchor="t">
+          <a:bodyPr wrap="square" lIns="36576" tIns="18288" rIns="36576" bIns="18288" anchor="t">
             <a:spAutoFit/>
           </a:bodyPr>
           <a:lstStyle/>
@@ -6113,7 +6151,7 @@
           <a:noFill/>
         </p:spPr>
         <p:txBody>
-          <a:bodyPr wrap="square" lIns="36576" rIns="36576" tIns="18288" bIns="18288" anchor="t">
+          <a:bodyPr wrap="square" lIns="36576" tIns="18288" rIns="36576" bIns="18288" anchor="t">
             <a:spAutoFit/>
           </a:bodyPr>
           <a:lstStyle/>
@@ -6148,7 +6186,7 @@
           <a:noFill/>
         </p:spPr>
         <p:txBody>
-          <a:bodyPr wrap="square" lIns="36576" rIns="36576" tIns="18288" bIns="18288" anchor="t">
+          <a:bodyPr wrap="square" lIns="36576" tIns="18288" rIns="36576" bIns="18288" anchor="t">
             <a:spAutoFit/>
           </a:bodyPr>
           <a:lstStyle/>
@@ -6183,7 +6221,7 @@
           <a:noFill/>
         </p:spPr>
         <p:txBody>
-          <a:bodyPr wrap="square" lIns="36576" rIns="36576" tIns="18288" bIns="18288" anchor="t">
+          <a:bodyPr wrap="square" lIns="36576" tIns="18288" rIns="36576" bIns="18288" anchor="t">
             <a:spAutoFit/>
           </a:bodyPr>
           <a:lstStyle/>
@@ -6218,7 +6256,7 @@
           <a:noFill/>
         </p:spPr>
         <p:txBody>
-          <a:bodyPr wrap="square" lIns="36576" rIns="36576" tIns="18288" bIns="18288" anchor="t">
+          <a:bodyPr wrap="square" lIns="36576" tIns="18288" rIns="36576" bIns="18288" anchor="t">
             <a:spAutoFit/>
           </a:bodyPr>
           <a:lstStyle/>
@@ -6253,7 +6291,7 @@
           <a:noFill/>
         </p:spPr>
         <p:txBody>
-          <a:bodyPr wrap="square" lIns="36576" rIns="36576" tIns="18288" bIns="18288" anchor="t">
+          <a:bodyPr wrap="square" lIns="36576" tIns="18288" rIns="36576" bIns="18288" anchor="t">
             <a:spAutoFit/>
           </a:bodyPr>
           <a:lstStyle/>
@@ -6288,7 +6326,7 @@
           <a:noFill/>
         </p:spPr>
         <p:txBody>
-          <a:bodyPr wrap="square" lIns="36576" rIns="36576" tIns="18288" bIns="18288" anchor="t">
+          <a:bodyPr wrap="square" lIns="36576" tIns="18288" rIns="36576" bIns="18288" anchor="t">
             <a:spAutoFit/>
           </a:bodyPr>
           <a:lstStyle/>
@@ -6323,7 +6361,7 @@
           <a:noFill/>
         </p:spPr>
         <p:txBody>
-          <a:bodyPr wrap="square" lIns="36576" rIns="36576" tIns="18288" bIns="18288" anchor="t">
+          <a:bodyPr wrap="square" lIns="36576" tIns="18288" rIns="36576" bIns="18288" anchor="t">
             <a:spAutoFit/>
           </a:bodyPr>
           <a:lstStyle/>
@@ -6382,6 +6420,7 @@
           <a:lstStyle/>
           <a:p>
             <a:pPr algn="ctr"/>
+            <a:endParaRPr/>
           </a:p>
         </p:txBody>
       </p:sp>
@@ -6402,7 +6441,7 @@
           <a:noFill/>
         </p:spPr>
         <p:txBody>
-          <a:bodyPr wrap="square" lIns="36576" rIns="36576" tIns="18288" bIns="18288" anchor="t">
+          <a:bodyPr wrap="square" lIns="36576" tIns="18288" rIns="36576" bIns="18288" anchor="t">
             <a:spAutoFit/>
           </a:bodyPr>
           <a:lstStyle/>
@@ -6463,6 +6502,7 @@
           <a:lstStyle/>
           <a:p>
             <a:pPr algn="ctr"/>
+            <a:endParaRPr/>
           </a:p>
         </p:txBody>
       </p:sp>
@@ -6507,6 +6547,7 @@
           <a:lstStyle/>
           <a:p>
             <a:pPr algn="ctr"/>
+            <a:endParaRPr/>
           </a:p>
         </p:txBody>
       </p:sp>
@@ -6527,7 +6568,7 @@
           <a:noFill/>
         </p:spPr>
         <p:txBody>
-          <a:bodyPr wrap="square" lIns="36576" rIns="36576" tIns="18288" bIns="18288" anchor="t">
+          <a:bodyPr wrap="square" lIns="36576" tIns="18288" rIns="36576" bIns="18288" anchor="t">
             <a:spAutoFit/>
           </a:bodyPr>
           <a:lstStyle/>
@@ -6562,7 +6603,7 @@
           <a:noFill/>
         </p:spPr>
         <p:txBody>
-          <a:bodyPr wrap="square" lIns="36576" rIns="36576" tIns="18288" bIns="18288" anchor="t">
+          <a:bodyPr wrap="square" lIns="36576" tIns="18288" rIns="36576" bIns="18288" anchor="t">
             <a:spAutoFit/>
           </a:bodyPr>
           <a:lstStyle/>
@@ -6623,6 +6664,7 @@
           <a:lstStyle/>
           <a:p>
             <a:pPr algn="ctr"/>
+            <a:endParaRPr/>
           </a:p>
         </p:txBody>
       </p:sp>
@@ -6667,6 +6709,7 @@
           <a:lstStyle/>
           <a:p>
             <a:pPr algn="ctr"/>
+            <a:endParaRPr/>
           </a:p>
         </p:txBody>
       </p:sp>
@@ -6687,7 +6730,7 @@
           <a:noFill/>
         </p:spPr>
         <p:txBody>
-          <a:bodyPr wrap="square" lIns="36576" rIns="36576" tIns="18288" bIns="18288" anchor="t">
+          <a:bodyPr wrap="square" lIns="36576" tIns="18288" rIns="36576" bIns="18288" anchor="t">
             <a:spAutoFit/>
           </a:bodyPr>
           <a:lstStyle/>
@@ -6722,7 +6765,7 @@
           <a:noFill/>
         </p:spPr>
         <p:txBody>
-          <a:bodyPr wrap="square" lIns="36576" rIns="36576" tIns="18288" bIns="18288" anchor="t">
+          <a:bodyPr wrap="square" lIns="36576" tIns="18288" rIns="36576" bIns="18288" anchor="t">
             <a:spAutoFit/>
           </a:bodyPr>
           <a:lstStyle/>
@@ -6783,6 +6826,7 @@
           <a:lstStyle/>
           <a:p>
             <a:pPr algn="ctr"/>
+            <a:endParaRPr/>
           </a:p>
         </p:txBody>
       </p:sp>
@@ -6827,6 +6871,7 @@
           <a:lstStyle/>
           <a:p>
             <a:pPr algn="ctr"/>
+            <a:endParaRPr/>
           </a:p>
         </p:txBody>
       </p:sp>
@@ -6847,7 +6892,7 @@
           <a:noFill/>
         </p:spPr>
         <p:txBody>
-          <a:bodyPr wrap="square" lIns="36576" rIns="36576" tIns="18288" bIns="18288" anchor="t">
+          <a:bodyPr wrap="square" lIns="36576" tIns="18288" rIns="36576" bIns="18288" anchor="t">
             <a:spAutoFit/>
           </a:bodyPr>
           <a:lstStyle/>
@@ -6882,7 +6927,7 @@
           <a:noFill/>
         </p:spPr>
         <p:txBody>
-          <a:bodyPr wrap="square" lIns="36576" rIns="36576" tIns="18288" bIns="18288" anchor="t">
+          <a:bodyPr wrap="square" lIns="36576" tIns="18288" rIns="36576" bIns="18288" anchor="t">
             <a:spAutoFit/>
           </a:bodyPr>
           <a:lstStyle/>
@@ -6943,6 +6988,7 @@
           <a:lstStyle/>
           <a:p>
             <a:pPr algn="ctr"/>
+            <a:endParaRPr/>
           </a:p>
         </p:txBody>
       </p:sp>
@@ -6987,6 +7033,7 @@
           <a:lstStyle/>
           <a:p>
             <a:pPr algn="ctr"/>
+            <a:endParaRPr/>
           </a:p>
         </p:txBody>
       </p:sp>
@@ -7007,7 +7054,7 @@
           <a:noFill/>
         </p:spPr>
         <p:txBody>
-          <a:bodyPr wrap="square" lIns="36576" rIns="36576" tIns="18288" bIns="18288" anchor="t">
+          <a:bodyPr wrap="square" lIns="36576" tIns="18288" rIns="36576" bIns="18288" anchor="t">
             <a:spAutoFit/>
           </a:bodyPr>
           <a:lstStyle/>
@@ -7042,7 +7089,7 @@
           <a:noFill/>
         </p:spPr>
         <p:txBody>
-          <a:bodyPr wrap="square" lIns="36576" rIns="36576" tIns="18288" bIns="18288" anchor="t">
+          <a:bodyPr wrap="square" lIns="36576" tIns="18288" rIns="36576" bIns="18288" anchor="t">
             <a:spAutoFit/>
           </a:bodyPr>
           <a:lstStyle/>
@@ -7103,6 +7150,7 @@
           <a:lstStyle/>
           <a:p>
             <a:pPr algn="ctr"/>
+            <a:endParaRPr/>
           </a:p>
         </p:txBody>
       </p:sp>
@@ -7147,6 +7195,7 @@
           <a:lstStyle/>
           <a:p>
             <a:pPr algn="ctr"/>
+            <a:endParaRPr/>
           </a:p>
         </p:txBody>
       </p:sp>
@@ -7167,7 +7216,7 @@
           <a:noFill/>
         </p:spPr>
         <p:txBody>
-          <a:bodyPr wrap="square" lIns="36576" rIns="36576" tIns="18288" bIns="18288" anchor="t">
+          <a:bodyPr wrap="square" lIns="36576" tIns="18288" rIns="36576" bIns="18288" anchor="t">
             <a:spAutoFit/>
           </a:bodyPr>
           <a:lstStyle/>
@@ -7202,7 +7251,7 @@
           <a:noFill/>
         </p:spPr>
         <p:txBody>
-          <a:bodyPr wrap="square" lIns="36576" rIns="36576" tIns="18288" bIns="18288" anchor="t">
+          <a:bodyPr wrap="square" lIns="36576" tIns="18288" rIns="36576" bIns="18288" anchor="t">
             <a:spAutoFit/>
           </a:bodyPr>
           <a:lstStyle/>
@@ -7263,6 +7312,7 @@
           <a:lstStyle/>
           <a:p>
             <a:pPr algn="ctr"/>
+            <a:endParaRPr/>
           </a:p>
         </p:txBody>
       </p:sp>
@@ -7307,6 +7357,7 @@
           <a:lstStyle/>
           <a:p>
             <a:pPr algn="ctr"/>
+            <a:endParaRPr/>
           </a:p>
         </p:txBody>
       </p:sp>
@@ -7327,7 +7378,7 @@
           <a:noFill/>
         </p:spPr>
         <p:txBody>
-          <a:bodyPr wrap="square" lIns="36576" rIns="36576" tIns="18288" bIns="18288" anchor="t">
+          <a:bodyPr wrap="square" lIns="36576" tIns="18288" rIns="36576" bIns="18288" anchor="t">
             <a:spAutoFit/>
           </a:bodyPr>
           <a:lstStyle/>
@@ -7362,7 +7413,7 @@
           <a:noFill/>
         </p:spPr>
         <p:txBody>
-          <a:bodyPr wrap="square" lIns="36576" rIns="36576" tIns="18288" bIns="18288" anchor="t">
+          <a:bodyPr wrap="square" lIns="36576" tIns="18288" rIns="36576" bIns="18288" anchor="t">
             <a:spAutoFit/>
           </a:bodyPr>
           <a:lstStyle/>
@@ -7392,7 +7443,7 @@
 </file>
 
 <file path=ppt/slides/slide12.xml><?xml version="1.0" encoding="utf-8"?>
-<p:sld xmlns:a="http://schemas.openxmlformats.org/drawingml/2006/main" xmlns:p="http://schemas.openxmlformats.org/presentationml/2006/main" xmlns:r="http://schemas.openxmlformats.org/officeDocument/2006/relationships">
+<p:sld xmlns:a="http://schemas.openxmlformats.org/drawingml/2006/main" xmlns:r="http://schemas.openxmlformats.org/officeDocument/2006/relationships" xmlns:p="http://schemas.openxmlformats.org/presentationml/2006/main">
   <p:cSld>
     <p:spTree>
       <p:nvGrpSpPr>
@@ -7400,7 +7451,14 @@
         <p:cNvGrpSpPr/>
         <p:nvPr/>
       </p:nvGrpSpPr>
-      <p:grpSpPr/>
+      <p:grpSpPr>
+        <a:xfrm>
+          <a:off x="0" y="0"/>
+          <a:ext cx="0" cy="0"/>
+          <a:chOff x="0" y="0"/>
+          <a:chExt cx="0" cy="0"/>
+        </a:xfrm>
+      </p:grpSpPr>
       <p:sp>
         <p:nvSpPr>
           <p:cNvPr id="2" name="Rectangle 1"/>
@@ -7442,6 +7500,7 @@
           <a:lstStyle/>
           <a:p>
             <a:pPr algn="ctr"/>
+            <a:endParaRPr/>
           </a:p>
         </p:txBody>
       </p:sp>
@@ -7486,6 +7545,7 @@
           <a:lstStyle/>
           <a:p>
             <a:pPr algn="ctr"/>
+            <a:endParaRPr/>
           </a:p>
         </p:txBody>
       </p:sp>
@@ -7530,6 +7590,7 @@
           <a:lstStyle/>
           <a:p>
             <a:pPr algn="ctr"/>
+            <a:endParaRPr/>
           </a:p>
         </p:txBody>
       </p:sp>
@@ -7550,7 +7611,7 @@
           <a:noFill/>
         </p:spPr>
         <p:txBody>
-          <a:bodyPr wrap="square" lIns="36576" rIns="36576" tIns="18288" bIns="18288" anchor="ctr">
+          <a:bodyPr wrap="square" lIns="36576" tIns="18288" rIns="36576" bIns="18288" anchor="ctr">
             <a:spAutoFit/>
           </a:bodyPr>
           <a:lstStyle/>
@@ -7585,7 +7646,7 @@
           <a:noFill/>
         </p:spPr>
         <p:txBody>
-          <a:bodyPr wrap="square" lIns="36576" rIns="36576" tIns="18288" bIns="18288" anchor="ctr">
+          <a:bodyPr wrap="square" lIns="36576" tIns="18288" rIns="36576" bIns="18288" anchor="ctr">
             <a:spAutoFit/>
           </a:bodyPr>
           <a:lstStyle/>
@@ -7620,7 +7681,7 @@
           <a:noFill/>
         </p:spPr>
         <p:txBody>
-          <a:bodyPr wrap="square" lIns="36576" rIns="36576" tIns="18288" bIns="18288" anchor="ctr">
+          <a:bodyPr wrap="square" lIns="36576" tIns="18288" rIns="36576" bIns="18288" anchor="ctr">
             <a:spAutoFit/>
           </a:bodyPr>
           <a:lstStyle/>
@@ -7655,7 +7716,7 @@
           <a:noFill/>
         </p:spPr>
         <p:txBody>
-          <a:bodyPr wrap="square" lIns="36576" rIns="36576" tIns="18288" bIns="18288" anchor="t">
+          <a:bodyPr wrap="square" lIns="36576" tIns="18288" rIns="36576" bIns="18288" anchor="t">
             <a:spAutoFit/>
           </a:bodyPr>
           <a:lstStyle/>
@@ -7714,6 +7775,7 @@
           <a:lstStyle/>
           <a:p>
             <a:pPr algn="ctr"/>
+            <a:endParaRPr/>
           </a:p>
         </p:txBody>
       </p:sp>
@@ -7734,7 +7796,7 @@
           <a:noFill/>
         </p:spPr>
         <p:txBody>
-          <a:bodyPr wrap="square" lIns="36576" rIns="36576" tIns="18288" bIns="18288" anchor="ctr">
+          <a:bodyPr wrap="square" lIns="36576" tIns="18288" rIns="36576" bIns="18288" anchor="ctr">
             <a:spAutoFit/>
           </a:bodyPr>
           <a:lstStyle/>
@@ -7769,7 +7831,7 @@
           <a:noFill/>
         </p:spPr>
         <p:txBody>
-          <a:bodyPr wrap="square" lIns="36576" rIns="36576" tIns="18288" bIns="18288" anchor="ctr">
+          <a:bodyPr wrap="square" lIns="36576" tIns="18288" rIns="36576" bIns="18288" anchor="ctr">
             <a:spAutoFit/>
           </a:bodyPr>
           <a:lstStyle/>
@@ -7830,6 +7892,7 @@
           <a:lstStyle/>
           <a:p>
             <a:pPr algn="ctr"/>
+            <a:endParaRPr/>
           </a:p>
         </p:txBody>
       </p:sp>
@@ -7898,6 +7961,7 @@
           <a:lstStyle/>
           <a:p>
             <a:pPr algn="ctr"/>
+            <a:endParaRPr/>
           </a:p>
         </p:txBody>
       </p:sp>
@@ -7918,7 +7982,7 @@
           <a:noFill/>
         </p:spPr>
         <p:txBody>
-          <a:bodyPr wrap="square" lIns="36576" rIns="36576" tIns="18288" bIns="18288" anchor="ctr">
+          <a:bodyPr wrap="square" lIns="36576" tIns="18288" rIns="36576" bIns="18288" anchor="ctr">
             <a:spAutoFit/>
           </a:bodyPr>
           <a:lstStyle/>
@@ -7979,6 +8043,7 @@
           <a:lstStyle/>
           <a:p>
             <a:pPr algn="ctr"/>
+            <a:endParaRPr/>
           </a:p>
         </p:txBody>
       </p:sp>
@@ -8047,6 +8112,7 @@
           <a:lstStyle/>
           <a:p>
             <a:pPr algn="ctr"/>
+            <a:endParaRPr/>
           </a:p>
         </p:txBody>
       </p:sp>
@@ -8067,7 +8133,7 @@
           <a:noFill/>
         </p:spPr>
         <p:txBody>
-          <a:bodyPr wrap="square" lIns="36576" rIns="36576" tIns="18288" bIns="18288" anchor="ctr">
+          <a:bodyPr wrap="square" lIns="36576" tIns="18288" rIns="36576" bIns="18288" anchor="ctr">
             <a:spAutoFit/>
           </a:bodyPr>
           <a:lstStyle/>
@@ -8128,6 +8194,7 @@
           <a:lstStyle/>
           <a:p>
             <a:pPr algn="ctr"/>
+            <a:endParaRPr/>
           </a:p>
         </p:txBody>
       </p:sp>
@@ -8196,6 +8263,7 @@
           <a:lstStyle/>
           <a:p>
             <a:pPr algn="ctr"/>
+            <a:endParaRPr/>
           </a:p>
         </p:txBody>
       </p:sp>
@@ -8216,7 +8284,7 @@
           <a:noFill/>
         </p:spPr>
         <p:txBody>
-          <a:bodyPr wrap="square" lIns="36576" rIns="36576" tIns="18288" bIns="18288" anchor="ctr">
+          <a:bodyPr wrap="square" lIns="36576" tIns="18288" rIns="36576" bIns="18288" anchor="ctr">
             <a:spAutoFit/>
           </a:bodyPr>
           <a:lstStyle/>
@@ -8277,6 +8345,7 @@
           <a:lstStyle/>
           <a:p>
             <a:pPr algn="ctr"/>
+            <a:endParaRPr/>
           </a:p>
         </p:txBody>
       </p:sp>
@@ -8345,6 +8414,7 @@
           <a:lstStyle/>
           <a:p>
             <a:pPr algn="ctr"/>
+            <a:endParaRPr/>
           </a:p>
         </p:txBody>
       </p:sp>
@@ -8365,7 +8435,7 @@
           <a:noFill/>
         </p:spPr>
         <p:txBody>
-          <a:bodyPr wrap="square" lIns="36576" rIns="36576" tIns="18288" bIns="18288" anchor="ctr">
+          <a:bodyPr wrap="square" lIns="36576" tIns="18288" rIns="36576" bIns="18288" anchor="ctr">
             <a:spAutoFit/>
           </a:bodyPr>
           <a:lstStyle/>
@@ -8426,6 +8496,7 @@
           <a:lstStyle/>
           <a:p>
             <a:pPr algn="ctr"/>
+            <a:endParaRPr/>
           </a:p>
         </p:txBody>
       </p:sp>
@@ -8494,6 +8565,7 @@
           <a:lstStyle/>
           <a:p>
             <a:pPr algn="ctr"/>
+            <a:endParaRPr/>
           </a:p>
         </p:txBody>
       </p:sp>
@@ -8514,7 +8586,7 @@
           <a:noFill/>
         </p:spPr>
         <p:txBody>
-          <a:bodyPr wrap="square" lIns="36576" rIns="36576" tIns="18288" bIns="18288" anchor="ctr">
+          <a:bodyPr wrap="square" lIns="36576" tIns="18288" rIns="36576" bIns="18288" anchor="ctr">
             <a:spAutoFit/>
           </a:bodyPr>
           <a:lstStyle/>
@@ -8575,6 +8647,7 @@
           <a:lstStyle/>
           <a:p>
             <a:pPr algn="ctr"/>
+            <a:endParaRPr/>
           </a:p>
         </p:txBody>
       </p:sp>
@@ -8643,6 +8716,7 @@
           <a:lstStyle/>
           <a:p>
             <a:pPr algn="ctr"/>
+            <a:endParaRPr/>
           </a:p>
         </p:txBody>
       </p:sp>
@@ -8663,7 +8737,7 @@
           <a:noFill/>
         </p:spPr>
         <p:txBody>
-          <a:bodyPr wrap="square" lIns="36576" rIns="36576" tIns="18288" bIns="18288" anchor="ctr">
+          <a:bodyPr wrap="square" lIns="36576" tIns="18288" rIns="36576" bIns="18288" anchor="ctr">
             <a:spAutoFit/>
           </a:bodyPr>
           <a:lstStyle/>
@@ -8693,7 +8767,7 @@
 </file>
 
 <file path=ppt/slides/slide13.xml><?xml version="1.0" encoding="utf-8"?>
-<p:sld xmlns:a="http://schemas.openxmlformats.org/drawingml/2006/main" xmlns:p="http://schemas.openxmlformats.org/presentationml/2006/main" xmlns:r="http://schemas.openxmlformats.org/officeDocument/2006/relationships">
+<p:sld xmlns:a="http://schemas.openxmlformats.org/drawingml/2006/main" xmlns:r="http://schemas.openxmlformats.org/officeDocument/2006/relationships" xmlns:p="http://schemas.openxmlformats.org/presentationml/2006/main">
   <p:cSld>
     <p:spTree>
       <p:nvGrpSpPr>
@@ -8701,7 +8775,14 @@
         <p:cNvGrpSpPr/>
         <p:nvPr/>
       </p:nvGrpSpPr>
-      <p:grpSpPr/>
+      <p:grpSpPr>
+        <a:xfrm>
+          <a:off x="0" y="0"/>
+          <a:ext cx="0" cy="0"/>
+          <a:chOff x="0" y="0"/>
+          <a:chExt cx="0" cy="0"/>
+        </a:xfrm>
+      </p:grpSpPr>
       <p:sp>
         <p:nvSpPr>
           <p:cNvPr id="2" name="Rectangle 1"/>
@@ -8743,6 +8824,7 @@
           <a:lstStyle/>
           <a:p>
             <a:pPr algn="ctr"/>
+            <a:endParaRPr/>
           </a:p>
         </p:txBody>
       </p:sp>
@@ -8787,6 +8869,7 @@
           <a:lstStyle/>
           <a:p>
             <a:pPr algn="ctr"/>
+            <a:endParaRPr/>
           </a:p>
         </p:txBody>
       </p:sp>
@@ -8831,6 +8914,7 @@
           <a:lstStyle/>
           <a:p>
             <a:pPr algn="ctr"/>
+            <a:endParaRPr/>
           </a:p>
         </p:txBody>
       </p:sp>
@@ -8851,7 +8935,7 @@
           <a:noFill/>
         </p:spPr>
         <p:txBody>
-          <a:bodyPr wrap="square" lIns="36576" rIns="36576" tIns="18288" bIns="18288" anchor="ctr">
+          <a:bodyPr wrap="square" lIns="36576" tIns="18288" rIns="36576" bIns="18288" anchor="ctr">
             <a:spAutoFit/>
           </a:bodyPr>
           <a:lstStyle/>
@@ -8886,7 +8970,7 @@
           <a:noFill/>
         </p:spPr>
         <p:txBody>
-          <a:bodyPr wrap="square" lIns="36576" rIns="36576" tIns="18288" bIns="18288" anchor="ctr">
+          <a:bodyPr wrap="square" lIns="36576" tIns="18288" rIns="36576" bIns="18288" anchor="ctr">
             <a:spAutoFit/>
           </a:bodyPr>
           <a:lstStyle/>
@@ -8921,7 +9005,7 @@
           <a:noFill/>
         </p:spPr>
         <p:txBody>
-          <a:bodyPr wrap="square" lIns="36576" rIns="36576" tIns="18288" bIns="18288" anchor="ctr">
+          <a:bodyPr wrap="square" lIns="36576" tIns="18288" rIns="36576" bIns="18288" anchor="ctr">
             <a:spAutoFit/>
           </a:bodyPr>
           <a:lstStyle/>
@@ -8956,7 +9040,7 @@
           <a:noFill/>
         </p:spPr>
         <p:txBody>
-          <a:bodyPr wrap="square" lIns="36576" rIns="36576" tIns="18288" bIns="18288" anchor="t">
+          <a:bodyPr wrap="square" lIns="36576" tIns="18288" rIns="36576" bIns="18288" anchor="t">
             <a:spAutoFit/>
           </a:bodyPr>
           <a:lstStyle/>
@@ -9015,6 +9099,7 @@
           <a:lstStyle/>
           <a:p>
             <a:pPr algn="ctr"/>
+            <a:endParaRPr/>
           </a:p>
         </p:txBody>
       </p:sp>
@@ -9035,7 +9120,7 @@
           <a:noFill/>
         </p:spPr>
         <p:txBody>
-          <a:bodyPr wrap="square" lIns="36576" rIns="36576" tIns="18288" bIns="18288" anchor="ctr">
+          <a:bodyPr wrap="square" lIns="36576" tIns="18288" rIns="36576" bIns="18288" anchor="ctr">
             <a:spAutoFit/>
           </a:bodyPr>
           <a:lstStyle/>
@@ -9070,7 +9155,7 @@
           <a:noFill/>
         </p:spPr>
         <p:txBody>
-          <a:bodyPr wrap="square" lIns="36576" rIns="36576" tIns="18288" bIns="18288" anchor="ctr">
+          <a:bodyPr wrap="square" lIns="36576" tIns="18288" rIns="36576" bIns="18288" anchor="ctr">
             <a:spAutoFit/>
           </a:bodyPr>
           <a:lstStyle/>
@@ -9129,7 +9214,7 @@
           <a:noFill/>
         </p:spPr>
         <p:txBody>
-          <a:bodyPr wrap="square" lIns="36576" rIns="36576" tIns="18288" bIns="18288" anchor="t">
+          <a:bodyPr wrap="square" lIns="36576" tIns="18288" rIns="36576" bIns="18288" anchor="t">
             <a:spAutoFit/>
           </a:bodyPr>
           <a:lstStyle/>
@@ -9164,7 +9249,7 @@
           <a:noFill/>
         </p:spPr>
         <p:txBody>
-          <a:bodyPr wrap="square" lIns="36576" rIns="36576" tIns="18288" bIns="18288" anchor="t">
+          <a:bodyPr wrap="square" lIns="36576" tIns="18288" rIns="36576" bIns="18288" anchor="t">
             <a:spAutoFit/>
           </a:bodyPr>
           <a:lstStyle/>
@@ -9199,7 +9284,7 @@
           <a:noFill/>
         </p:spPr>
         <p:txBody>
-          <a:bodyPr wrap="square" lIns="36576" rIns="36576" tIns="18288" bIns="18288" anchor="t">
+          <a:bodyPr wrap="square" lIns="36576" tIns="18288" rIns="36576" bIns="18288" anchor="t">
             <a:spAutoFit/>
           </a:bodyPr>
           <a:lstStyle/>
@@ -9234,7 +9319,7 @@
           <a:noFill/>
         </p:spPr>
         <p:txBody>
-          <a:bodyPr wrap="square" lIns="36576" rIns="36576" tIns="18288" bIns="18288" anchor="t">
+          <a:bodyPr wrap="square" lIns="36576" tIns="18288" rIns="36576" bIns="18288" anchor="t">
             <a:spAutoFit/>
           </a:bodyPr>
           <a:lstStyle/>
@@ -9269,7 +9354,7 @@
           <a:noFill/>
         </p:spPr>
         <p:txBody>
-          <a:bodyPr wrap="square" lIns="36576" rIns="36576" tIns="18288" bIns="18288" anchor="t">
+          <a:bodyPr wrap="square" lIns="36576" tIns="18288" rIns="36576" bIns="18288" anchor="t">
             <a:spAutoFit/>
           </a:bodyPr>
           <a:lstStyle/>
@@ -9304,7 +9389,7 @@
           <a:noFill/>
         </p:spPr>
         <p:txBody>
-          <a:bodyPr wrap="square" lIns="36576" rIns="36576" tIns="18288" bIns="18288" anchor="t">
+          <a:bodyPr wrap="square" lIns="36576" tIns="18288" rIns="36576" bIns="18288" anchor="t">
             <a:spAutoFit/>
           </a:bodyPr>
           <a:lstStyle/>
@@ -9339,7 +9424,7 @@
           <a:noFill/>
         </p:spPr>
         <p:txBody>
-          <a:bodyPr wrap="square" lIns="36576" rIns="36576" tIns="18288" bIns="18288" anchor="t">
+          <a:bodyPr wrap="square" lIns="36576" tIns="18288" rIns="36576" bIns="18288" anchor="t">
             <a:spAutoFit/>
           </a:bodyPr>
           <a:lstStyle/>
@@ -9374,7 +9459,7 @@
           <a:noFill/>
         </p:spPr>
         <p:txBody>
-          <a:bodyPr wrap="square" lIns="36576" rIns="36576" tIns="18288" bIns="18288" anchor="t">
+          <a:bodyPr wrap="square" lIns="36576" tIns="18288" rIns="36576" bIns="18288" anchor="t">
             <a:spAutoFit/>
           </a:bodyPr>
           <a:lstStyle/>
@@ -9404,7 +9489,7 @@
 </file>
 
 <file path=ppt/slides/slide14.xml><?xml version="1.0" encoding="utf-8"?>
-<p:sld xmlns:a="http://schemas.openxmlformats.org/drawingml/2006/main" xmlns:p="http://schemas.openxmlformats.org/presentationml/2006/main" xmlns:r="http://schemas.openxmlformats.org/officeDocument/2006/relationships">
+<p:sld xmlns:a="http://schemas.openxmlformats.org/drawingml/2006/main" xmlns:r="http://schemas.openxmlformats.org/officeDocument/2006/relationships" xmlns:p="http://schemas.openxmlformats.org/presentationml/2006/main">
   <p:cSld>
     <p:spTree>
       <p:nvGrpSpPr>
@@ -9412,7 +9497,14 @@
         <p:cNvGrpSpPr/>
         <p:nvPr/>
       </p:nvGrpSpPr>
-      <p:grpSpPr/>
+      <p:grpSpPr>
+        <a:xfrm>
+          <a:off x="0" y="0"/>
+          <a:ext cx="0" cy="0"/>
+          <a:chOff x="0" y="0"/>
+          <a:chExt cx="0" cy="0"/>
+        </a:xfrm>
+      </p:grpSpPr>
       <p:sp>
         <p:nvSpPr>
           <p:cNvPr id="2" name="Rectangle 1"/>
@@ -9454,6 +9546,7 @@
           <a:lstStyle/>
           <a:p>
             <a:pPr algn="ctr"/>
+            <a:endParaRPr/>
           </a:p>
         </p:txBody>
       </p:sp>
@@ -9498,6 +9591,7 @@
           <a:lstStyle/>
           <a:p>
             <a:pPr algn="ctr"/>
+            <a:endParaRPr/>
           </a:p>
         </p:txBody>
       </p:sp>
@@ -9542,6 +9636,7 @@
           <a:lstStyle/>
           <a:p>
             <a:pPr algn="ctr"/>
+            <a:endParaRPr/>
           </a:p>
         </p:txBody>
       </p:sp>
@@ -9562,7 +9657,7 @@
           <a:noFill/>
         </p:spPr>
         <p:txBody>
-          <a:bodyPr wrap="square" lIns="36576" rIns="36576" tIns="18288" bIns="18288" anchor="ctr">
+          <a:bodyPr wrap="square" lIns="36576" tIns="18288" rIns="36576" bIns="18288" anchor="ctr">
             <a:spAutoFit/>
           </a:bodyPr>
           <a:lstStyle/>
@@ -9597,7 +9692,7 @@
           <a:noFill/>
         </p:spPr>
         <p:txBody>
-          <a:bodyPr wrap="square" lIns="36576" rIns="36576" tIns="18288" bIns="18288" anchor="ctr">
+          <a:bodyPr wrap="square" lIns="36576" tIns="18288" rIns="36576" bIns="18288" anchor="ctr">
             <a:spAutoFit/>
           </a:bodyPr>
           <a:lstStyle/>
@@ -9632,7 +9727,7 @@
           <a:noFill/>
         </p:spPr>
         <p:txBody>
-          <a:bodyPr wrap="square" lIns="36576" rIns="36576" tIns="18288" bIns="18288" anchor="ctr">
+          <a:bodyPr wrap="square" lIns="36576" tIns="18288" rIns="36576" bIns="18288" anchor="ctr">
             <a:spAutoFit/>
           </a:bodyPr>
           <a:lstStyle/>
@@ -9667,7 +9762,7 @@
           <a:noFill/>
         </p:spPr>
         <p:txBody>
-          <a:bodyPr wrap="square" lIns="36576" rIns="36576" tIns="18288" bIns="18288" anchor="t">
+          <a:bodyPr wrap="square" lIns="36576" tIns="18288" rIns="36576" bIns="18288" anchor="t">
             <a:spAutoFit/>
           </a:bodyPr>
           <a:lstStyle/>
@@ -9726,6 +9821,7 @@
           <a:lstStyle/>
           <a:p>
             <a:pPr algn="ctr"/>
+            <a:endParaRPr/>
           </a:p>
         </p:txBody>
       </p:sp>
@@ -9746,7 +9842,7 @@
           <a:noFill/>
         </p:spPr>
         <p:txBody>
-          <a:bodyPr wrap="square" lIns="36576" rIns="36576" tIns="18288" bIns="18288" anchor="ctr">
+          <a:bodyPr wrap="square" lIns="36576" tIns="18288" rIns="36576" bIns="18288" anchor="ctr">
             <a:spAutoFit/>
           </a:bodyPr>
           <a:lstStyle/>
@@ -9781,7 +9877,7 @@
           <a:noFill/>
         </p:spPr>
         <p:txBody>
-          <a:bodyPr wrap="square" lIns="36576" rIns="36576" tIns="18288" bIns="18288" anchor="ctr">
+          <a:bodyPr wrap="square" lIns="36576" tIns="18288" rIns="36576" bIns="18288" anchor="ctr">
             <a:spAutoFit/>
           </a:bodyPr>
           <a:lstStyle/>
@@ -9816,7 +9912,7 @@
           <a:noFill/>
         </p:spPr>
         <p:txBody>
-          <a:bodyPr wrap="square" lIns="36576" rIns="36576" tIns="18288" bIns="18288" anchor="t">
+          <a:bodyPr wrap="square" lIns="36576" tIns="18288" rIns="36576" bIns="18288" anchor="t">
             <a:spAutoFit/>
           </a:bodyPr>
           <a:lstStyle/>
@@ -9901,6 +9997,7 @@
           <a:lstStyle/>
           <a:p>
             <a:pPr algn="ctr"/>
+            <a:endParaRPr/>
           </a:p>
         </p:txBody>
       </p:sp>
@@ -9921,7 +10018,7 @@
           <a:noFill/>
         </p:spPr>
         <p:txBody>
-          <a:bodyPr wrap="square" lIns="36576" rIns="36576" tIns="18288" bIns="18288" anchor="t">
+          <a:bodyPr wrap="square" lIns="36576" tIns="18288" rIns="36576" bIns="18288" anchor="t">
             <a:spAutoFit/>
           </a:bodyPr>
           <a:lstStyle/>
@@ -9965,7 +10062,7 @@
           <a:noFill/>
         </p:spPr>
         <p:txBody>
-          <a:bodyPr wrap="square" lIns="36576" rIns="36576" tIns="18288" bIns="18288" anchor="t">
+          <a:bodyPr wrap="square" lIns="36576" tIns="18288" rIns="36576" bIns="18288" anchor="t">
             <a:spAutoFit/>
           </a:bodyPr>
           <a:lstStyle/>
@@ -10050,6 +10147,7 @@
           <a:lstStyle/>
           <a:p>
             <a:pPr algn="ctr"/>
+            <a:endParaRPr/>
           </a:p>
         </p:txBody>
       </p:sp>
@@ -10070,7 +10168,7 @@
           <a:noFill/>
         </p:spPr>
         <p:txBody>
-          <a:bodyPr wrap="square" lIns="36576" rIns="36576" tIns="18288" bIns="18288" anchor="t">
+          <a:bodyPr wrap="square" lIns="36576" tIns="18288" rIns="36576" bIns="18288" anchor="t">
             <a:spAutoFit/>
           </a:bodyPr>
           <a:lstStyle/>
@@ -10109,7 +10207,7 @@
 </file>
 
 <file path=ppt/slides/slide15.xml><?xml version="1.0" encoding="utf-8"?>
-<p:sld xmlns:a="http://schemas.openxmlformats.org/drawingml/2006/main" xmlns:p="http://schemas.openxmlformats.org/presentationml/2006/main" xmlns:r="http://schemas.openxmlformats.org/officeDocument/2006/relationships">
+<p:sld xmlns:a="http://schemas.openxmlformats.org/drawingml/2006/main" xmlns:r="http://schemas.openxmlformats.org/officeDocument/2006/relationships" xmlns:p="http://schemas.openxmlformats.org/presentationml/2006/main">
   <p:cSld>
     <p:spTree>
       <p:nvGrpSpPr>
@@ -10117,7 +10215,14 @@
         <p:cNvGrpSpPr/>
         <p:nvPr/>
       </p:nvGrpSpPr>
-      <p:grpSpPr/>
+      <p:grpSpPr>
+        <a:xfrm>
+          <a:off x="0" y="0"/>
+          <a:ext cx="0" cy="0"/>
+          <a:chOff x="0" y="0"/>
+          <a:chExt cx="0" cy="0"/>
+        </a:xfrm>
+      </p:grpSpPr>
       <p:sp>
         <p:nvSpPr>
           <p:cNvPr id="2" name="Rectangle 1"/>
@@ -10159,6 +10264,7 @@
           <a:lstStyle/>
           <a:p>
             <a:pPr algn="ctr"/>
+            <a:endParaRPr/>
           </a:p>
         </p:txBody>
       </p:sp>
@@ -10203,6 +10309,7 @@
           <a:lstStyle/>
           <a:p>
             <a:pPr algn="ctr"/>
+            <a:endParaRPr/>
           </a:p>
         </p:txBody>
       </p:sp>
@@ -10247,6 +10354,7 @@
           <a:lstStyle/>
           <a:p>
             <a:pPr algn="ctr"/>
+            <a:endParaRPr/>
           </a:p>
         </p:txBody>
       </p:sp>
@@ -10267,7 +10375,7 @@
           <a:noFill/>
         </p:spPr>
         <p:txBody>
-          <a:bodyPr wrap="square" lIns="36576" rIns="36576" tIns="18288" bIns="18288" anchor="ctr">
+          <a:bodyPr wrap="square" lIns="36576" tIns="18288" rIns="36576" bIns="18288" anchor="ctr">
             <a:spAutoFit/>
           </a:bodyPr>
           <a:lstStyle/>
@@ -10302,7 +10410,7 @@
           <a:noFill/>
         </p:spPr>
         <p:txBody>
-          <a:bodyPr wrap="square" lIns="36576" rIns="36576" tIns="18288" bIns="18288" anchor="ctr">
+          <a:bodyPr wrap="square" lIns="36576" tIns="18288" rIns="36576" bIns="18288" anchor="ctr">
             <a:spAutoFit/>
           </a:bodyPr>
           <a:lstStyle/>
@@ -10337,7 +10445,7 @@
           <a:noFill/>
         </p:spPr>
         <p:txBody>
-          <a:bodyPr wrap="square" lIns="36576" rIns="36576" tIns="18288" bIns="18288" anchor="ctr">
+          <a:bodyPr wrap="square" lIns="36576" tIns="18288" rIns="36576" bIns="18288" anchor="ctr">
             <a:spAutoFit/>
           </a:bodyPr>
           <a:lstStyle/>
@@ -10372,7 +10480,7 @@
           <a:noFill/>
         </p:spPr>
         <p:txBody>
-          <a:bodyPr wrap="square" lIns="36576" rIns="36576" tIns="18288" bIns="18288" anchor="t">
+          <a:bodyPr wrap="square" lIns="36576" tIns="18288" rIns="36576" bIns="18288" anchor="t">
             <a:spAutoFit/>
           </a:bodyPr>
           <a:lstStyle/>
@@ -10431,6 +10539,7 @@
           <a:lstStyle/>
           <a:p>
             <a:pPr algn="ctr"/>
+            <a:endParaRPr/>
           </a:p>
         </p:txBody>
       </p:sp>
@@ -10451,7 +10560,7 @@
           <a:noFill/>
         </p:spPr>
         <p:txBody>
-          <a:bodyPr wrap="square" lIns="36576" rIns="36576" tIns="18288" bIns="18288" anchor="ctr">
+          <a:bodyPr wrap="square" lIns="36576" tIns="18288" rIns="36576" bIns="18288" anchor="ctr">
             <a:spAutoFit/>
           </a:bodyPr>
           <a:lstStyle/>
@@ -10486,7 +10595,7 @@
           <a:noFill/>
         </p:spPr>
         <p:txBody>
-          <a:bodyPr wrap="square" lIns="36576" rIns="36576" tIns="18288" bIns="18288" anchor="ctr">
+          <a:bodyPr wrap="square" lIns="36576" tIns="18288" rIns="36576" bIns="18288" anchor="ctr">
             <a:spAutoFit/>
           </a:bodyPr>
           <a:lstStyle/>
@@ -10521,7 +10630,7 @@
           <a:noFill/>
         </p:spPr>
         <p:txBody>
-          <a:bodyPr wrap="square" lIns="36576" rIns="36576" tIns="18288" bIns="18288" anchor="t">
+          <a:bodyPr wrap="square" lIns="36576" tIns="18288" rIns="36576" bIns="18288" anchor="t">
             <a:spAutoFit/>
           </a:bodyPr>
           <a:lstStyle/>
@@ -10606,6 +10715,7 @@
           <a:lstStyle/>
           <a:p>
             <a:pPr algn="ctr"/>
+            <a:endParaRPr/>
           </a:p>
         </p:txBody>
       </p:sp>
@@ -10626,7 +10736,7 @@
           <a:noFill/>
         </p:spPr>
         <p:txBody>
-          <a:bodyPr wrap="square" lIns="36576" rIns="36576" tIns="18288" bIns="18288" anchor="t">
+          <a:bodyPr wrap="square" lIns="36576" tIns="18288" rIns="36576" bIns="18288" anchor="t">
             <a:spAutoFit/>
           </a:bodyPr>
           <a:lstStyle/>
@@ -10670,7 +10780,7 @@
           <a:noFill/>
         </p:spPr>
         <p:txBody>
-          <a:bodyPr wrap="square" lIns="36576" rIns="36576" tIns="18288" bIns="18288" anchor="t">
+          <a:bodyPr wrap="square" lIns="36576" tIns="18288" rIns="36576" bIns="18288" anchor="t">
             <a:spAutoFit/>
           </a:bodyPr>
           <a:lstStyle/>
@@ -10755,6 +10865,7 @@
           <a:lstStyle/>
           <a:p>
             <a:pPr algn="ctr"/>
+            <a:endParaRPr/>
           </a:p>
         </p:txBody>
       </p:sp>
@@ -10775,7 +10886,7 @@
           <a:noFill/>
         </p:spPr>
         <p:txBody>
-          <a:bodyPr wrap="square" lIns="36576" rIns="36576" tIns="18288" bIns="18288" anchor="t">
+          <a:bodyPr wrap="square" lIns="36576" tIns="18288" rIns="36576" bIns="18288" anchor="t">
             <a:spAutoFit/>
           </a:bodyPr>
           <a:lstStyle/>
@@ -10819,7 +10930,7 @@
           <a:noFill/>
         </p:spPr>
         <p:txBody>
-          <a:bodyPr wrap="square" lIns="36576" rIns="36576" tIns="18288" bIns="18288" anchor="t">
+          <a:bodyPr wrap="square" lIns="36576" tIns="18288" rIns="36576" bIns="18288" anchor="t">
             <a:spAutoFit/>
           </a:bodyPr>
           <a:lstStyle/>
@@ -10904,6 +11015,7 @@
           <a:lstStyle/>
           <a:p>
             <a:pPr algn="ctr"/>
+            <a:endParaRPr/>
           </a:p>
         </p:txBody>
       </p:sp>
@@ -10924,7 +11036,7 @@
           <a:noFill/>
         </p:spPr>
         <p:txBody>
-          <a:bodyPr wrap="square" lIns="36576" rIns="36576" tIns="18288" bIns="18288" anchor="t">
+          <a:bodyPr wrap="square" lIns="36576" tIns="18288" rIns="36576" bIns="18288" anchor="t">
             <a:spAutoFit/>
           </a:bodyPr>
           <a:lstStyle/>
@@ -10963,7 +11075,7 @@
 </file>
 
 <file path=ppt/slides/slide16.xml><?xml version="1.0" encoding="utf-8"?>
-<p:sld xmlns:a="http://schemas.openxmlformats.org/drawingml/2006/main" xmlns:p="http://schemas.openxmlformats.org/presentationml/2006/main" xmlns:r="http://schemas.openxmlformats.org/officeDocument/2006/relationships">
+<p:sld xmlns:a="http://schemas.openxmlformats.org/drawingml/2006/main" xmlns:r="http://schemas.openxmlformats.org/officeDocument/2006/relationships" xmlns:p="http://schemas.openxmlformats.org/presentationml/2006/main">
   <p:cSld>
     <p:spTree>
       <p:nvGrpSpPr>
@@ -10971,7 +11083,14 @@
         <p:cNvGrpSpPr/>
         <p:nvPr/>
       </p:nvGrpSpPr>
-      <p:grpSpPr/>
+      <p:grpSpPr>
+        <a:xfrm>
+          <a:off x="0" y="0"/>
+          <a:ext cx="0" cy="0"/>
+          <a:chOff x="0" y="0"/>
+          <a:chExt cx="0" cy="0"/>
+        </a:xfrm>
+      </p:grpSpPr>
       <p:sp>
         <p:nvSpPr>
           <p:cNvPr id="2" name="Rectangle 1"/>
@@ -11013,6 +11132,7 @@
           <a:lstStyle/>
           <a:p>
             <a:pPr algn="ctr"/>
+            <a:endParaRPr/>
           </a:p>
         </p:txBody>
       </p:sp>
@@ -11057,6 +11177,7 @@
           <a:lstStyle/>
           <a:p>
             <a:pPr algn="ctr"/>
+            <a:endParaRPr/>
           </a:p>
         </p:txBody>
       </p:sp>
@@ -11101,6 +11222,7 @@
           <a:lstStyle/>
           <a:p>
             <a:pPr algn="ctr"/>
+            <a:endParaRPr/>
           </a:p>
         </p:txBody>
       </p:sp>
@@ -11121,7 +11243,7 @@
           <a:noFill/>
         </p:spPr>
         <p:txBody>
-          <a:bodyPr wrap="square" lIns="36576" rIns="36576" tIns="18288" bIns="18288" anchor="ctr">
+          <a:bodyPr wrap="square" lIns="36576" tIns="18288" rIns="36576" bIns="18288" anchor="ctr">
             <a:spAutoFit/>
           </a:bodyPr>
           <a:lstStyle/>
@@ -11156,7 +11278,7 @@
           <a:noFill/>
         </p:spPr>
         <p:txBody>
-          <a:bodyPr wrap="square" lIns="36576" rIns="36576" tIns="18288" bIns="18288" anchor="ctr">
+          <a:bodyPr wrap="square" lIns="36576" tIns="18288" rIns="36576" bIns="18288" anchor="ctr">
             <a:spAutoFit/>
           </a:bodyPr>
           <a:lstStyle/>
@@ -11191,7 +11313,7 @@
           <a:noFill/>
         </p:spPr>
         <p:txBody>
-          <a:bodyPr wrap="square" lIns="36576" rIns="36576" tIns="18288" bIns="18288" anchor="ctr">
+          <a:bodyPr wrap="square" lIns="36576" tIns="18288" rIns="36576" bIns="18288" anchor="ctr">
             <a:spAutoFit/>
           </a:bodyPr>
           <a:lstStyle/>
@@ -11226,7 +11348,7 @@
           <a:noFill/>
         </p:spPr>
         <p:txBody>
-          <a:bodyPr wrap="square" lIns="36576" rIns="36576" tIns="18288" bIns="18288" anchor="t">
+          <a:bodyPr wrap="square" lIns="36576" tIns="18288" rIns="36576" bIns="18288" anchor="t">
             <a:spAutoFit/>
           </a:bodyPr>
           <a:lstStyle/>
@@ -11285,6 +11407,7 @@
           <a:lstStyle/>
           <a:p>
             <a:pPr algn="ctr"/>
+            <a:endParaRPr/>
           </a:p>
         </p:txBody>
       </p:sp>
@@ -11305,7 +11428,7 @@
           <a:noFill/>
         </p:spPr>
         <p:txBody>
-          <a:bodyPr wrap="square" lIns="36576" rIns="36576" tIns="18288" bIns="18288" anchor="ctr">
+          <a:bodyPr wrap="square" lIns="36576" tIns="18288" rIns="36576" bIns="18288" anchor="ctr">
             <a:spAutoFit/>
           </a:bodyPr>
           <a:lstStyle/>
@@ -11340,7 +11463,7 @@
           <a:noFill/>
         </p:spPr>
         <p:txBody>
-          <a:bodyPr wrap="square" lIns="36576" rIns="36576" tIns="18288" bIns="18288" anchor="ctr">
+          <a:bodyPr wrap="square" lIns="36576" tIns="18288" rIns="36576" bIns="18288" anchor="ctr">
             <a:spAutoFit/>
           </a:bodyPr>
           <a:lstStyle/>
@@ -11375,7 +11498,7 @@
           <a:noFill/>
         </p:spPr>
         <p:txBody>
-          <a:bodyPr wrap="square" lIns="36576" rIns="36576" tIns="18288" bIns="18288" anchor="t">
+          <a:bodyPr wrap="square" lIns="36576" tIns="18288" rIns="36576" bIns="18288" anchor="t">
             <a:spAutoFit/>
           </a:bodyPr>
           <a:lstStyle/>
@@ -11460,6 +11583,7 @@
           <a:lstStyle/>
           <a:p>
             <a:pPr algn="ctr"/>
+            <a:endParaRPr/>
           </a:p>
         </p:txBody>
       </p:sp>
@@ -11480,7 +11604,7 @@
           <a:noFill/>
         </p:spPr>
         <p:txBody>
-          <a:bodyPr wrap="square" lIns="36576" rIns="36576" tIns="18288" bIns="18288" anchor="t">
+          <a:bodyPr wrap="square" lIns="36576" tIns="18288" rIns="36576" bIns="18288" anchor="t">
             <a:spAutoFit/>
           </a:bodyPr>
           <a:lstStyle/>
@@ -11524,7 +11648,7 @@
           <a:noFill/>
         </p:spPr>
         <p:txBody>
-          <a:bodyPr wrap="square" lIns="36576" rIns="36576" tIns="18288" bIns="18288" anchor="t">
+          <a:bodyPr wrap="square" lIns="36576" tIns="18288" rIns="36576" bIns="18288" anchor="t">
             <a:spAutoFit/>
           </a:bodyPr>
           <a:lstStyle/>
@@ -11609,6 +11733,7 @@
           <a:lstStyle/>
           <a:p>
             <a:pPr algn="ctr"/>
+            <a:endParaRPr/>
           </a:p>
         </p:txBody>
       </p:sp>
@@ -11629,7 +11754,7 @@
           <a:noFill/>
         </p:spPr>
         <p:txBody>
-          <a:bodyPr wrap="square" lIns="36576" rIns="36576" tIns="18288" bIns="18288" anchor="t">
+          <a:bodyPr wrap="square" lIns="36576" tIns="18288" rIns="36576" bIns="18288" anchor="t">
             <a:spAutoFit/>
           </a:bodyPr>
           <a:lstStyle/>
@@ -11673,7 +11798,7 @@
           <a:noFill/>
         </p:spPr>
         <p:txBody>
-          <a:bodyPr wrap="square" lIns="36576" rIns="36576" tIns="18288" bIns="18288" anchor="t">
+          <a:bodyPr wrap="square" lIns="36576" tIns="18288" rIns="36576" bIns="18288" anchor="t">
             <a:spAutoFit/>
           </a:bodyPr>
           <a:lstStyle/>
@@ -11758,6 +11883,7 @@
           <a:lstStyle/>
           <a:p>
             <a:pPr algn="ctr"/>
+            <a:endParaRPr/>
           </a:p>
         </p:txBody>
       </p:sp>
@@ -11778,7 +11904,7 @@
           <a:noFill/>
         </p:spPr>
         <p:txBody>
-          <a:bodyPr wrap="square" lIns="36576" rIns="36576" tIns="18288" bIns="18288" anchor="t">
+          <a:bodyPr wrap="square" lIns="36576" tIns="18288" rIns="36576" bIns="18288" anchor="t">
             <a:spAutoFit/>
           </a:bodyPr>
           <a:lstStyle/>
@@ -11822,7 +11948,7 @@
           <a:noFill/>
         </p:spPr>
         <p:txBody>
-          <a:bodyPr wrap="square" lIns="36576" rIns="36576" tIns="18288" bIns="18288" anchor="t">
+          <a:bodyPr wrap="square" lIns="36576" tIns="18288" rIns="36576" bIns="18288" anchor="t">
             <a:spAutoFit/>
           </a:bodyPr>
           <a:lstStyle/>
@@ -11907,6 +12033,7 @@
           <a:lstStyle/>
           <a:p>
             <a:pPr algn="ctr"/>
+            <a:endParaRPr/>
           </a:p>
         </p:txBody>
       </p:sp>
@@ -11927,7 +12054,7 @@
           <a:noFill/>
         </p:spPr>
         <p:txBody>
-          <a:bodyPr wrap="square" lIns="36576" rIns="36576" tIns="18288" bIns="18288" anchor="t">
+          <a:bodyPr wrap="square" lIns="36576" tIns="18288" rIns="36576" bIns="18288" anchor="t">
             <a:spAutoFit/>
           </a:bodyPr>
           <a:lstStyle/>
@@ -11966,7 +12093,7 @@
 </file>
 
 <file path=ppt/slides/slide17.xml><?xml version="1.0" encoding="utf-8"?>
-<p:sld xmlns:a="http://schemas.openxmlformats.org/drawingml/2006/main" xmlns:p="http://schemas.openxmlformats.org/presentationml/2006/main" xmlns:r="http://schemas.openxmlformats.org/officeDocument/2006/relationships">
+<p:sld xmlns:a="http://schemas.openxmlformats.org/drawingml/2006/main" xmlns:r="http://schemas.openxmlformats.org/officeDocument/2006/relationships" xmlns:p="http://schemas.openxmlformats.org/presentationml/2006/main">
   <p:cSld>
     <p:spTree>
       <p:nvGrpSpPr>
@@ -11974,7 +12101,14 @@
         <p:cNvGrpSpPr/>
         <p:nvPr/>
       </p:nvGrpSpPr>
-      <p:grpSpPr/>
+      <p:grpSpPr>
+        <a:xfrm>
+          <a:off x="0" y="0"/>
+          <a:ext cx="0" cy="0"/>
+          <a:chOff x="0" y="0"/>
+          <a:chExt cx="0" cy="0"/>
+        </a:xfrm>
+      </p:grpSpPr>
       <p:sp>
         <p:nvSpPr>
           <p:cNvPr id="2" name="Rectangle 1"/>
@@ -12016,6 +12150,7 @@
           <a:lstStyle/>
           <a:p>
             <a:pPr algn="ctr"/>
+            <a:endParaRPr/>
           </a:p>
         </p:txBody>
       </p:sp>
@@ -12060,6 +12195,7 @@
           <a:lstStyle/>
           <a:p>
             <a:pPr algn="ctr"/>
+            <a:endParaRPr/>
           </a:p>
         </p:txBody>
       </p:sp>
@@ -12104,6 +12240,7 @@
           <a:lstStyle/>
           <a:p>
             <a:pPr algn="ctr"/>
+            <a:endParaRPr/>
           </a:p>
         </p:txBody>
       </p:sp>
@@ -12124,7 +12261,7 @@
           <a:noFill/>
         </p:spPr>
         <p:txBody>
-          <a:bodyPr wrap="square" lIns="36576" rIns="36576" tIns="18288" bIns="18288" anchor="ctr">
+          <a:bodyPr wrap="square" lIns="36576" tIns="18288" rIns="36576" bIns="18288" anchor="ctr">
             <a:spAutoFit/>
           </a:bodyPr>
           <a:lstStyle/>
@@ -12159,7 +12296,7 @@
           <a:noFill/>
         </p:spPr>
         <p:txBody>
-          <a:bodyPr wrap="square" lIns="36576" rIns="36576" tIns="18288" bIns="18288" anchor="ctr">
+          <a:bodyPr wrap="square" lIns="36576" tIns="18288" rIns="36576" bIns="18288" anchor="ctr">
             <a:spAutoFit/>
           </a:bodyPr>
           <a:lstStyle/>
@@ -12194,7 +12331,7 @@
           <a:noFill/>
         </p:spPr>
         <p:txBody>
-          <a:bodyPr wrap="square" lIns="36576" rIns="36576" tIns="18288" bIns="18288" anchor="ctr">
+          <a:bodyPr wrap="square" lIns="36576" tIns="18288" rIns="36576" bIns="18288" anchor="ctr">
             <a:spAutoFit/>
           </a:bodyPr>
           <a:lstStyle/>
@@ -12229,7 +12366,7 @@
           <a:noFill/>
         </p:spPr>
         <p:txBody>
-          <a:bodyPr wrap="square" lIns="36576" rIns="36576" tIns="18288" bIns="18288" anchor="t">
+          <a:bodyPr wrap="square" lIns="36576" tIns="18288" rIns="36576" bIns="18288" anchor="t">
             <a:spAutoFit/>
           </a:bodyPr>
           <a:lstStyle/>
@@ -12288,6 +12425,7 @@
           <a:lstStyle/>
           <a:p>
             <a:pPr algn="ctr"/>
+            <a:endParaRPr/>
           </a:p>
         </p:txBody>
       </p:sp>
@@ -12308,7 +12446,7 @@
           <a:noFill/>
         </p:spPr>
         <p:txBody>
-          <a:bodyPr wrap="square" lIns="36576" rIns="36576" tIns="18288" bIns="18288" anchor="ctr">
+          <a:bodyPr wrap="square" lIns="36576" tIns="18288" rIns="36576" bIns="18288" anchor="ctr">
             <a:spAutoFit/>
           </a:bodyPr>
           <a:lstStyle/>
@@ -12343,7 +12481,7 @@
           <a:noFill/>
         </p:spPr>
         <p:txBody>
-          <a:bodyPr wrap="square" lIns="36576" rIns="36576" tIns="18288" bIns="18288" anchor="ctr">
+          <a:bodyPr wrap="square" lIns="36576" tIns="18288" rIns="36576" bIns="18288" anchor="ctr">
             <a:spAutoFit/>
           </a:bodyPr>
           <a:lstStyle/>
@@ -12428,6 +12566,7 @@
           <a:lstStyle/>
           <a:p>
             <a:pPr algn="ctr"/>
+            <a:endParaRPr/>
           </a:p>
         </p:txBody>
       </p:sp>
@@ -12472,6 +12611,7 @@
           <a:lstStyle/>
           <a:p>
             <a:pPr algn="ctr"/>
+            <a:endParaRPr/>
           </a:p>
         </p:txBody>
       </p:sp>
@@ -12492,7 +12632,7 @@
           <a:noFill/>
         </p:spPr>
         <p:txBody>
-          <a:bodyPr wrap="square" lIns="36576" rIns="36576" tIns="18288" bIns="18288" anchor="ctr">
+          <a:bodyPr wrap="square" lIns="36576" tIns="18288" rIns="36576" bIns="18288" anchor="ctr">
             <a:spAutoFit/>
           </a:bodyPr>
           <a:lstStyle/>
@@ -12527,7 +12667,7 @@
           <a:noFill/>
         </p:spPr>
         <p:txBody>
-          <a:bodyPr wrap="square" lIns="36576" rIns="36576" tIns="18288" bIns="18288" anchor="ctr">
+          <a:bodyPr wrap="square" lIns="36576" tIns="18288" rIns="36576" bIns="18288" anchor="ctr">
             <a:spAutoFit/>
           </a:bodyPr>
           <a:lstStyle/>
@@ -12562,7 +12702,7 @@
           <a:noFill/>
         </p:spPr>
         <p:txBody>
-          <a:bodyPr wrap="square" lIns="36576" rIns="36576" tIns="18288" bIns="18288" anchor="ctr">
+          <a:bodyPr wrap="square" lIns="36576" tIns="18288" rIns="36576" bIns="18288" anchor="ctr">
             <a:spAutoFit/>
           </a:bodyPr>
           <a:lstStyle/>
@@ -12623,6 +12763,7 @@
           <a:lstStyle/>
           <a:p>
             <a:pPr algn="ctr"/>
+            <a:endParaRPr/>
           </a:p>
         </p:txBody>
       </p:sp>
@@ -12667,6 +12808,7 @@
           <a:lstStyle/>
           <a:p>
             <a:pPr algn="ctr"/>
+            <a:endParaRPr/>
           </a:p>
         </p:txBody>
       </p:sp>
@@ -12687,7 +12829,7 @@
           <a:noFill/>
         </p:spPr>
         <p:txBody>
-          <a:bodyPr wrap="square" lIns="36576" rIns="36576" tIns="18288" bIns="18288" anchor="ctr">
+          <a:bodyPr wrap="square" lIns="36576" tIns="18288" rIns="36576" bIns="18288" anchor="ctr">
             <a:spAutoFit/>
           </a:bodyPr>
           <a:lstStyle/>
@@ -12722,7 +12864,7 @@
           <a:noFill/>
         </p:spPr>
         <p:txBody>
-          <a:bodyPr wrap="square" lIns="36576" rIns="36576" tIns="18288" bIns="18288" anchor="ctr">
+          <a:bodyPr wrap="square" lIns="36576" tIns="18288" rIns="36576" bIns="18288" anchor="ctr">
             <a:spAutoFit/>
           </a:bodyPr>
           <a:lstStyle/>
@@ -12757,7 +12899,7 @@
           <a:noFill/>
         </p:spPr>
         <p:txBody>
-          <a:bodyPr wrap="square" lIns="36576" rIns="36576" tIns="18288" bIns="18288" anchor="ctr">
+          <a:bodyPr wrap="square" lIns="36576" tIns="18288" rIns="36576" bIns="18288" anchor="ctr">
             <a:spAutoFit/>
           </a:bodyPr>
           <a:lstStyle/>
@@ -12818,6 +12960,7 @@
           <a:lstStyle/>
           <a:p>
             <a:pPr algn="ctr"/>
+            <a:endParaRPr/>
           </a:p>
         </p:txBody>
       </p:sp>
@@ -12862,6 +13005,7 @@
           <a:lstStyle/>
           <a:p>
             <a:pPr algn="ctr"/>
+            <a:endParaRPr/>
           </a:p>
         </p:txBody>
       </p:sp>
@@ -12882,7 +13026,7 @@
           <a:noFill/>
         </p:spPr>
         <p:txBody>
-          <a:bodyPr wrap="square" lIns="36576" rIns="36576" tIns="18288" bIns="18288" anchor="ctr">
+          <a:bodyPr wrap="square" lIns="36576" tIns="18288" rIns="36576" bIns="18288" anchor="ctr">
             <a:spAutoFit/>
           </a:bodyPr>
           <a:lstStyle/>
@@ -12917,7 +13061,7 @@
           <a:noFill/>
         </p:spPr>
         <p:txBody>
-          <a:bodyPr wrap="square" lIns="36576" rIns="36576" tIns="18288" bIns="18288" anchor="ctr">
+          <a:bodyPr wrap="square" lIns="36576" tIns="18288" rIns="36576" bIns="18288" anchor="ctr">
             <a:spAutoFit/>
           </a:bodyPr>
           <a:lstStyle/>
@@ -12952,7 +13096,7 @@
           <a:noFill/>
         </p:spPr>
         <p:txBody>
-          <a:bodyPr wrap="square" lIns="36576" rIns="36576" tIns="18288" bIns="18288" anchor="ctr">
+          <a:bodyPr wrap="square" lIns="36576" tIns="18288" rIns="36576" bIns="18288" anchor="ctr">
             <a:spAutoFit/>
           </a:bodyPr>
           <a:lstStyle/>
@@ -13013,6 +13157,7 @@
           <a:lstStyle/>
           <a:p>
             <a:pPr algn="ctr"/>
+            <a:endParaRPr/>
           </a:p>
         </p:txBody>
       </p:sp>
@@ -13057,6 +13202,7 @@
           <a:lstStyle/>
           <a:p>
             <a:pPr algn="ctr"/>
+            <a:endParaRPr/>
           </a:p>
         </p:txBody>
       </p:sp>
@@ -13077,7 +13223,7 @@
           <a:noFill/>
         </p:spPr>
         <p:txBody>
-          <a:bodyPr wrap="square" lIns="36576" rIns="36576" tIns="18288" bIns="18288" anchor="ctr">
+          <a:bodyPr wrap="square" lIns="36576" tIns="18288" rIns="36576" bIns="18288" anchor="ctr">
             <a:spAutoFit/>
           </a:bodyPr>
           <a:lstStyle/>
@@ -13112,7 +13258,7 @@
           <a:noFill/>
         </p:spPr>
         <p:txBody>
-          <a:bodyPr wrap="square" lIns="36576" rIns="36576" tIns="18288" bIns="18288" anchor="ctr">
+          <a:bodyPr wrap="square" lIns="36576" tIns="18288" rIns="36576" bIns="18288" anchor="ctr">
             <a:spAutoFit/>
           </a:bodyPr>
           <a:lstStyle/>
@@ -13147,7 +13293,7 @@
           <a:noFill/>
         </p:spPr>
         <p:txBody>
-          <a:bodyPr wrap="square" lIns="36576" rIns="36576" tIns="18288" bIns="18288" anchor="ctr">
+          <a:bodyPr wrap="square" lIns="36576" tIns="18288" rIns="36576" bIns="18288" anchor="ctr">
             <a:spAutoFit/>
           </a:bodyPr>
           <a:lstStyle/>
@@ -13208,6 +13354,7 @@
           <a:lstStyle/>
           <a:p>
             <a:pPr algn="ctr"/>
+            <a:endParaRPr/>
           </a:p>
         </p:txBody>
       </p:sp>
@@ -13252,6 +13399,7 @@
           <a:lstStyle/>
           <a:p>
             <a:pPr algn="ctr"/>
+            <a:endParaRPr/>
           </a:p>
         </p:txBody>
       </p:sp>
@@ -13272,7 +13420,7 @@
           <a:noFill/>
         </p:spPr>
         <p:txBody>
-          <a:bodyPr wrap="square" lIns="36576" rIns="36576" tIns="18288" bIns="18288" anchor="ctr">
+          <a:bodyPr wrap="square" lIns="36576" tIns="18288" rIns="36576" bIns="18288" anchor="ctr">
             <a:spAutoFit/>
           </a:bodyPr>
           <a:lstStyle/>
@@ -13307,7 +13455,7 @@
           <a:noFill/>
         </p:spPr>
         <p:txBody>
-          <a:bodyPr wrap="square" lIns="36576" rIns="36576" tIns="18288" bIns="18288" anchor="ctr">
+          <a:bodyPr wrap="square" lIns="36576" tIns="18288" rIns="36576" bIns="18288" anchor="ctr">
             <a:spAutoFit/>
           </a:bodyPr>
           <a:lstStyle/>
@@ -13342,7 +13490,7 @@
           <a:noFill/>
         </p:spPr>
         <p:txBody>
-          <a:bodyPr wrap="square" lIns="36576" rIns="36576" tIns="18288" bIns="18288" anchor="ctr">
+          <a:bodyPr wrap="square" lIns="36576" tIns="18288" rIns="36576" bIns="18288" anchor="ctr">
             <a:spAutoFit/>
           </a:bodyPr>
           <a:lstStyle/>
@@ -13403,6 +13551,7 @@
           <a:lstStyle/>
           <a:p>
             <a:pPr algn="ctr"/>
+            <a:endParaRPr/>
           </a:p>
         </p:txBody>
       </p:sp>
@@ -13447,6 +13596,7 @@
           <a:lstStyle/>
           <a:p>
             <a:pPr algn="ctr"/>
+            <a:endParaRPr/>
           </a:p>
         </p:txBody>
       </p:sp>
@@ -13467,7 +13617,7 @@
           <a:noFill/>
         </p:spPr>
         <p:txBody>
-          <a:bodyPr wrap="square" lIns="36576" rIns="36576" tIns="18288" bIns="18288" anchor="ctr">
+          <a:bodyPr wrap="square" lIns="36576" tIns="18288" rIns="36576" bIns="18288" anchor="ctr">
             <a:spAutoFit/>
           </a:bodyPr>
           <a:lstStyle/>
@@ -13502,7 +13652,7 @@
           <a:noFill/>
         </p:spPr>
         <p:txBody>
-          <a:bodyPr wrap="square" lIns="36576" rIns="36576" tIns="18288" bIns="18288" anchor="ctr">
+          <a:bodyPr wrap="square" lIns="36576" tIns="18288" rIns="36576" bIns="18288" anchor="ctr">
             <a:spAutoFit/>
           </a:bodyPr>
           <a:lstStyle/>
@@ -13537,7 +13687,7 @@
           <a:noFill/>
         </p:spPr>
         <p:txBody>
-          <a:bodyPr wrap="square" lIns="36576" rIns="36576" tIns="18288" bIns="18288" anchor="ctr">
+          <a:bodyPr wrap="square" lIns="36576" tIns="18288" rIns="36576" bIns="18288" anchor="ctr">
             <a:spAutoFit/>
           </a:bodyPr>
           <a:lstStyle/>
@@ -13598,6 +13748,7 @@
           <a:lstStyle/>
           <a:p>
             <a:pPr algn="ctr"/>
+            <a:endParaRPr/>
           </a:p>
         </p:txBody>
       </p:sp>
@@ -13618,7 +13769,7 @@
           <a:noFill/>
         </p:spPr>
         <p:txBody>
-          <a:bodyPr wrap="square" lIns="36576" rIns="36576" tIns="18288" bIns="18288" anchor="ctr">
+          <a:bodyPr wrap="square" lIns="36576" tIns="18288" rIns="36576" bIns="18288" anchor="ctr">
             <a:spAutoFit/>
           </a:bodyPr>
           <a:lstStyle/>
@@ -13666,7 +13817,7 @@
 </file>
 
 <file path=ppt/slides/slide18.xml><?xml version="1.0" encoding="utf-8"?>
-<p:sld xmlns:a="http://schemas.openxmlformats.org/drawingml/2006/main" xmlns:p="http://schemas.openxmlformats.org/presentationml/2006/main" xmlns:r="http://schemas.openxmlformats.org/officeDocument/2006/relationships">
+<p:sld xmlns:a="http://schemas.openxmlformats.org/drawingml/2006/main" xmlns:r="http://schemas.openxmlformats.org/officeDocument/2006/relationships" xmlns:p="http://schemas.openxmlformats.org/presentationml/2006/main">
   <p:cSld>
     <p:spTree>
       <p:nvGrpSpPr>
@@ -13674,7 +13825,14 @@
         <p:cNvGrpSpPr/>
         <p:nvPr/>
       </p:nvGrpSpPr>
-      <p:grpSpPr/>
+      <p:grpSpPr>
+        <a:xfrm>
+          <a:off x="0" y="0"/>
+          <a:ext cx="0" cy="0"/>
+          <a:chOff x="0" y="0"/>
+          <a:chExt cx="0" cy="0"/>
+        </a:xfrm>
+      </p:grpSpPr>
       <p:sp>
         <p:nvSpPr>
           <p:cNvPr id="2" name="Rectangle 1"/>
@@ -13716,6 +13874,7 @@
           <a:lstStyle/>
           <a:p>
             <a:pPr algn="ctr"/>
+            <a:endParaRPr/>
           </a:p>
         </p:txBody>
       </p:sp>
@@ -13760,6 +13919,7 @@
           <a:lstStyle/>
           <a:p>
             <a:pPr algn="ctr"/>
+            <a:endParaRPr/>
           </a:p>
         </p:txBody>
       </p:sp>
@@ -13804,6 +13964,7 @@
           <a:lstStyle/>
           <a:p>
             <a:pPr algn="ctr"/>
+            <a:endParaRPr/>
           </a:p>
         </p:txBody>
       </p:sp>
@@ -13824,7 +13985,7 @@
           <a:noFill/>
         </p:spPr>
         <p:txBody>
-          <a:bodyPr wrap="square" lIns="36576" rIns="36576" tIns="18288" bIns="18288" anchor="ctr">
+          <a:bodyPr wrap="square" lIns="36576" tIns="18288" rIns="36576" bIns="18288" anchor="ctr">
             <a:spAutoFit/>
           </a:bodyPr>
           <a:lstStyle/>
@@ -13859,7 +14020,7 @@
           <a:noFill/>
         </p:spPr>
         <p:txBody>
-          <a:bodyPr wrap="square" lIns="36576" rIns="36576" tIns="18288" bIns="18288" anchor="ctr">
+          <a:bodyPr wrap="square" lIns="36576" tIns="18288" rIns="36576" bIns="18288" anchor="ctr">
             <a:spAutoFit/>
           </a:bodyPr>
           <a:lstStyle/>
@@ -13894,7 +14055,7 @@
           <a:noFill/>
         </p:spPr>
         <p:txBody>
-          <a:bodyPr wrap="square" lIns="36576" rIns="36576" tIns="18288" bIns="18288" anchor="ctr">
+          <a:bodyPr wrap="square" lIns="36576" tIns="18288" rIns="36576" bIns="18288" anchor="ctr">
             <a:spAutoFit/>
           </a:bodyPr>
           <a:lstStyle/>
@@ -13929,7 +14090,7 @@
           <a:noFill/>
         </p:spPr>
         <p:txBody>
-          <a:bodyPr wrap="square" lIns="36576" rIns="36576" tIns="18288" bIns="18288" anchor="t">
+          <a:bodyPr wrap="square" lIns="36576" tIns="18288" rIns="36576" bIns="18288" anchor="t">
             <a:spAutoFit/>
           </a:bodyPr>
           <a:lstStyle/>
@@ -13988,6 +14149,7 @@
           <a:lstStyle/>
           <a:p>
             <a:pPr algn="ctr"/>
+            <a:endParaRPr/>
           </a:p>
         </p:txBody>
       </p:sp>
@@ -14008,7 +14170,7 @@
           <a:noFill/>
         </p:spPr>
         <p:txBody>
-          <a:bodyPr wrap="square" lIns="36576" rIns="36576" tIns="18288" bIns="18288" anchor="ctr">
+          <a:bodyPr wrap="square" lIns="36576" tIns="18288" rIns="36576" bIns="18288" anchor="ctr">
             <a:spAutoFit/>
           </a:bodyPr>
           <a:lstStyle/>
@@ -14043,7 +14205,7 @@
           <a:noFill/>
         </p:spPr>
         <p:txBody>
-          <a:bodyPr wrap="square" lIns="36576" rIns="36576" tIns="18288" bIns="18288" anchor="ctr">
+          <a:bodyPr wrap="square" lIns="36576" tIns="18288" rIns="36576" bIns="18288" anchor="ctr">
             <a:spAutoFit/>
           </a:bodyPr>
           <a:lstStyle/>
@@ -14102,6 +14264,7 @@
           <a:lstStyle/>
           <a:p>
             <a:pPr algn="ctr"/>
+            <a:endParaRPr/>
           </a:p>
         </p:txBody>
       </p:sp>
@@ -14148,6 +14311,7 @@
           <a:lstStyle/>
           <a:p>
             <a:pPr algn="ctr"/>
+            <a:endParaRPr/>
           </a:p>
         </p:txBody>
       </p:sp>
@@ -14168,7 +14332,7 @@
           <a:noFill/>
         </p:spPr>
         <p:txBody>
-          <a:bodyPr wrap="square" lIns="36576" rIns="36576" tIns="18288" bIns="18288" anchor="ctr">
+          <a:bodyPr wrap="square" lIns="36576" tIns="18288" rIns="36576" bIns="18288" anchor="ctr">
             <a:spAutoFit/>
           </a:bodyPr>
           <a:lstStyle/>
@@ -14203,7 +14367,7 @@
           <a:noFill/>
         </p:spPr>
         <p:txBody>
-          <a:bodyPr wrap="square" lIns="36576" rIns="36576" tIns="18288" bIns="18288" anchor="t">
+          <a:bodyPr wrap="square" lIns="36576" tIns="18288" rIns="36576" bIns="18288" anchor="t">
             <a:spAutoFit/>
           </a:bodyPr>
           <a:lstStyle/>
@@ -14238,7 +14402,7 @@
           <a:noFill/>
         </p:spPr>
         <p:txBody>
-          <a:bodyPr wrap="square" lIns="36576" rIns="36576" tIns="18288" bIns="18288" anchor="t">
+          <a:bodyPr wrap="square" lIns="36576" tIns="18288" rIns="36576" bIns="18288" anchor="t">
             <a:spAutoFit/>
           </a:bodyPr>
           <a:lstStyle/>
@@ -14273,7 +14437,7 @@
           <a:noFill/>
         </p:spPr>
         <p:txBody>
-          <a:bodyPr wrap="square" lIns="36576" rIns="36576" tIns="18288" bIns="18288" anchor="t">
+          <a:bodyPr wrap="square" lIns="36576" tIns="18288" rIns="36576" bIns="18288" anchor="t">
             <a:spAutoFit/>
           </a:bodyPr>
           <a:lstStyle/>
@@ -14308,7 +14472,7 @@
           <a:noFill/>
         </p:spPr>
         <p:txBody>
-          <a:bodyPr wrap="square" lIns="36576" rIns="36576" tIns="18288" bIns="18288" anchor="t">
+          <a:bodyPr wrap="square" lIns="36576" tIns="18288" rIns="36576" bIns="18288" anchor="t">
             <a:spAutoFit/>
           </a:bodyPr>
           <a:lstStyle/>
@@ -14367,6 +14531,7 @@
           <a:lstStyle/>
           <a:p>
             <a:pPr algn="ctr"/>
+            <a:endParaRPr/>
           </a:p>
         </p:txBody>
       </p:sp>
@@ -14413,6 +14578,7 @@
           <a:lstStyle/>
           <a:p>
             <a:pPr algn="ctr"/>
+            <a:endParaRPr/>
           </a:p>
         </p:txBody>
       </p:sp>
@@ -14433,7 +14599,7 @@
           <a:noFill/>
         </p:spPr>
         <p:txBody>
-          <a:bodyPr wrap="square" lIns="36576" rIns="36576" tIns="18288" bIns="18288" anchor="ctr">
+          <a:bodyPr wrap="square" lIns="36576" tIns="18288" rIns="36576" bIns="18288" anchor="ctr">
             <a:spAutoFit/>
           </a:bodyPr>
           <a:lstStyle/>
@@ -14468,7 +14634,7 @@
           <a:noFill/>
         </p:spPr>
         <p:txBody>
-          <a:bodyPr wrap="square" lIns="36576" rIns="36576" tIns="18288" bIns="18288" anchor="t">
+          <a:bodyPr wrap="square" lIns="36576" tIns="18288" rIns="36576" bIns="18288" anchor="t">
             <a:spAutoFit/>
           </a:bodyPr>
           <a:lstStyle/>
@@ -14503,7 +14669,7 @@
           <a:noFill/>
         </p:spPr>
         <p:txBody>
-          <a:bodyPr wrap="square" lIns="36576" rIns="36576" tIns="18288" bIns="18288" anchor="t">
+          <a:bodyPr wrap="square" lIns="36576" tIns="18288" rIns="36576" bIns="18288" anchor="t">
             <a:spAutoFit/>
           </a:bodyPr>
           <a:lstStyle/>
@@ -14538,7 +14704,7 @@
           <a:noFill/>
         </p:spPr>
         <p:txBody>
-          <a:bodyPr wrap="square" lIns="36576" rIns="36576" tIns="18288" bIns="18288" anchor="t">
+          <a:bodyPr wrap="square" lIns="36576" tIns="18288" rIns="36576" bIns="18288" anchor="t">
             <a:spAutoFit/>
           </a:bodyPr>
           <a:lstStyle/>
@@ -14573,7 +14739,7 @@
           <a:noFill/>
         </p:spPr>
         <p:txBody>
-          <a:bodyPr wrap="square" lIns="36576" rIns="36576" tIns="18288" bIns="18288" anchor="t">
+          <a:bodyPr wrap="square" lIns="36576" tIns="18288" rIns="36576" bIns="18288" anchor="t">
             <a:spAutoFit/>
           </a:bodyPr>
           <a:lstStyle/>
@@ -14632,6 +14798,7 @@
           <a:lstStyle/>
           <a:p>
             <a:pPr algn="ctr"/>
+            <a:endParaRPr/>
           </a:p>
         </p:txBody>
       </p:sp>
@@ -14678,6 +14845,7 @@
           <a:lstStyle/>
           <a:p>
             <a:pPr algn="ctr"/>
+            <a:endParaRPr/>
           </a:p>
         </p:txBody>
       </p:sp>
@@ -14698,7 +14866,7 @@
           <a:noFill/>
         </p:spPr>
         <p:txBody>
-          <a:bodyPr wrap="square" lIns="36576" rIns="36576" tIns="18288" bIns="18288" anchor="ctr">
+          <a:bodyPr wrap="square" lIns="36576" tIns="18288" rIns="36576" bIns="18288" anchor="ctr">
             <a:spAutoFit/>
           </a:bodyPr>
           <a:lstStyle/>
@@ -14733,7 +14901,7 @@
           <a:noFill/>
         </p:spPr>
         <p:txBody>
-          <a:bodyPr wrap="square" lIns="36576" rIns="36576" tIns="18288" bIns="18288" anchor="t">
+          <a:bodyPr wrap="square" lIns="36576" tIns="18288" rIns="36576" bIns="18288" anchor="t">
             <a:spAutoFit/>
           </a:bodyPr>
           <a:lstStyle/>
@@ -14768,7 +14936,7 @@
           <a:noFill/>
         </p:spPr>
         <p:txBody>
-          <a:bodyPr wrap="square" lIns="36576" rIns="36576" tIns="18288" bIns="18288" anchor="t">
+          <a:bodyPr wrap="square" lIns="36576" tIns="18288" rIns="36576" bIns="18288" anchor="t">
             <a:spAutoFit/>
           </a:bodyPr>
           <a:lstStyle/>
@@ -14803,7 +14971,7 @@
           <a:noFill/>
         </p:spPr>
         <p:txBody>
-          <a:bodyPr wrap="square" lIns="36576" rIns="36576" tIns="18288" bIns="18288" anchor="t">
+          <a:bodyPr wrap="square" lIns="36576" tIns="18288" rIns="36576" bIns="18288" anchor="t">
             <a:spAutoFit/>
           </a:bodyPr>
           <a:lstStyle/>
@@ -14838,7 +15006,7 @@
           <a:noFill/>
         </p:spPr>
         <p:txBody>
-          <a:bodyPr wrap="square" lIns="36576" rIns="36576" tIns="18288" bIns="18288" anchor="t">
+          <a:bodyPr wrap="square" lIns="36576" tIns="18288" rIns="36576" bIns="18288" anchor="t">
             <a:spAutoFit/>
           </a:bodyPr>
           <a:lstStyle/>
@@ -14897,6 +15065,7 @@
           <a:lstStyle/>
           <a:p>
             <a:pPr algn="ctr"/>
+            <a:endParaRPr/>
           </a:p>
         </p:txBody>
       </p:sp>
@@ -14943,6 +15112,7 @@
           <a:lstStyle/>
           <a:p>
             <a:pPr algn="ctr"/>
+            <a:endParaRPr/>
           </a:p>
         </p:txBody>
       </p:sp>
@@ -14963,7 +15133,7 @@
           <a:noFill/>
         </p:spPr>
         <p:txBody>
-          <a:bodyPr wrap="square" lIns="36576" rIns="36576" tIns="18288" bIns="18288" anchor="ctr">
+          <a:bodyPr wrap="square" lIns="36576" tIns="18288" rIns="36576" bIns="18288" anchor="ctr">
             <a:spAutoFit/>
           </a:bodyPr>
           <a:lstStyle/>
@@ -14998,7 +15168,7 @@
           <a:noFill/>
         </p:spPr>
         <p:txBody>
-          <a:bodyPr wrap="square" lIns="36576" rIns="36576" tIns="18288" bIns="18288" anchor="t">
+          <a:bodyPr wrap="square" lIns="36576" tIns="18288" rIns="36576" bIns="18288" anchor="t">
             <a:spAutoFit/>
           </a:bodyPr>
           <a:lstStyle/>
@@ -15033,7 +15203,7 @@
           <a:noFill/>
         </p:spPr>
         <p:txBody>
-          <a:bodyPr wrap="square" lIns="36576" rIns="36576" tIns="18288" bIns="18288" anchor="t">
+          <a:bodyPr wrap="square" lIns="36576" tIns="18288" rIns="36576" bIns="18288" anchor="t">
             <a:spAutoFit/>
           </a:bodyPr>
           <a:lstStyle/>
@@ -15068,7 +15238,7 @@
           <a:noFill/>
         </p:spPr>
         <p:txBody>
-          <a:bodyPr wrap="square" lIns="36576" rIns="36576" tIns="18288" bIns="18288" anchor="t">
+          <a:bodyPr wrap="square" lIns="36576" tIns="18288" rIns="36576" bIns="18288" anchor="t">
             <a:spAutoFit/>
           </a:bodyPr>
           <a:lstStyle/>
@@ -15103,7 +15273,7 @@
           <a:noFill/>
         </p:spPr>
         <p:txBody>
-          <a:bodyPr wrap="square" lIns="36576" rIns="36576" tIns="18288" bIns="18288" anchor="t">
+          <a:bodyPr wrap="square" lIns="36576" tIns="18288" rIns="36576" bIns="18288" anchor="t">
             <a:spAutoFit/>
           </a:bodyPr>
           <a:lstStyle/>
@@ -15138,7 +15308,7 @@
           <a:noFill/>
         </p:spPr>
         <p:txBody>
-          <a:bodyPr wrap="square" lIns="36576" rIns="36576" tIns="18288" bIns="18288" anchor="t">
+          <a:bodyPr wrap="square" lIns="36576" tIns="18288" rIns="36576" bIns="18288" anchor="t">
             <a:spAutoFit/>
           </a:bodyPr>
           <a:lstStyle/>
@@ -15168,7 +15338,7 @@
 </file>
 
 <file path=ppt/slides/slide19.xml><?xml version="1.0" encoding="utf-8"?>
-<p:sld xmlns:a="http://schemas.openxmlformats.org/drawingml/2006/main" xmlns:p="http://schemas.openxmlformats.org/presentationml/2006/main" xmlns:r="http://schemas.openxmlformats.org/officeDocument/2006/relationships">
+<p:sld xmlns:a="http://schemas.openxmlformats.org/drawingml/2006/main" xmlns:r="http://schemas.openxmlformats.org/officeDocument/2006/relationships" xmlns:p="http://schemas.openxmlformats.org/presentationml/2006/main">
   <p:cSld>
     <p:spTree>
       <p:nvGrpSpPr>
@@ -15176,7 +15346,14 @@
         <p:cNvGrpSpPr/>
         <p:nvPr/>
       </p:nvGrpSpPr>
-      <p:grpSpPr/>
+      <p:grpSpPr>
+        <a:xfrm>
+          <a:off x="0" y="0"/>
+          <a:ext cx="0" cy="0"/>
+          <a:chOff x="0" y="0"/>
+          <a:chExt cx="0" cy="0"/>
+        </a:xfrm>
+      </p:grpSpPr>
       <p:sp>
         <p:nvSpPr>
           <p:cNvPr id="2" name="Rectangle 1"/>
@@ -15218,6 +15395,7 @@
           <a:lstStyle/>
           <a:p>
             <a:pPr algn="ctr"/>
+            <a:endParaRPr/>
           </a:p>
         </p:txBody>
       </p:sp>
@@ -15262,6 +15440,7 @@
           <a:lstStyle/>
           <a:p>
             <a:pPr algn="ctr"/>
+            <a:endParaRPr/>
           </a:p>
         </p:txBody>
       </p:sp>
@@ -15306,6 +15485,7 @@
           <a:lstStyle/>
           <a:p>
             <a:pPr algn="ctr"/>
+            <a:endParaRPr/>
           </a:p>
         </p:txBody>
       </p:sp>
@@ -15326,7 +15506,7 @@
           <a:noFill/>
         </p:spPr>
         <p:txBody>
-          <a:bodyPr wrap="square" lIns="36576" rIns="36576" tIns="18288" bIns="18288" anchor="ctr">
+          <a:bodyPr wrap="square" lIns="36576" tIns="18288" rIns="36576" bIns="18288" anchor="ctr">
             <a:spAutoFit/>
           </a:bodyPr>
           <a:lstStyle/>
@@ -15361,7 +15541,7 @@
           <a:noFill/>
         </p:spPr>
         <p:txBody>
-          <a:bodyPr wrap="square" lIns="36576" rIns="36576" tIns="18288" bIns="18288" anchor="ctr">
+          <a:bodyPr wrap="square" lIns="36576" tIns="18288" rIns="36576" bIns="18288" anchor="ctr">
             <a:spAutoFit/>
           </a:bodyPr>
           <a:lstStyle/>
@@ -15396,7 +15576,7 @@
           <a:noFill/>
         </p:spPr>
         <p:txBody>
-          <a:bodyPr wrap="square" lIns="36576" rIns="36576" tIns="18288" bIns="18288" anchor="ctr">
+          <a:bodyPr wrap="square" lIns="36576" tIns="18288" rIns="36576" bIns="18288" anchor="ctr">
             <a:spAutoFit/>
           </a:bodyPr>
           <a:lstStyle/>
@@ -15431,7 +15611,7 @@
           <a:noFill/>
         </p:spPr>
         <p:txBody>
-          <a:bodyPr wrap="square" lIns="36576" rIns="36576" tIns="18288" bIns="18288" anchor="t">
+          <a:bodyPr wrap="square" lIns="36576" tIns="18288" rIns="36576" bIns="18288" anchor="t">
             <a:spAutoFit/>
           </a:bodyPr>
           <a:lstStyle/>
@@ -15490,6 +15670,7 @@
           <a:lstStyle/>
           <a:p>
             <a:pPr algn="ctr"/>
+            <a:endParaRPr/>
           </a:p>
         </p:txBody>
       </p:sp>
@@ -15510,7 +15691,7 @@
           <a:noFill/>
         </p:spPr>
         <p:txBody>
-          <a:bodyPr wrap="square" lIns="36576" rIns="36576" tIns="18288" bIns="18288" anchor="ctr">
+          <a:bodyPr wrap="square" lIns="36576" tIns="18288" rIns="36576" bIns="18288" anchor="ctr">
             <a:spAutoFit/>
           </a:bodyPr>
           <a:lstStyle/>
@@ -15545,7 +15726,7 @@
           <a:noFill/>
         </p:spPr>
         <p:txBody>
-          <a:bodyPr wrap="square" lIns="36576" rIns="36576" tIns="18288" bIns="18288" anchor="ctr">
+          <a:bodyPr wrap="square" lIns="36576" tIns="18288" rIns="36576" bIns="18288" anchor="ctr">
             <a:spAutoFit/>
           </a:bodyPr>
           <a:lstStyle/>
@@ -15606,6 +15787,7 @@
           <a:lstStyle/>
           <a:p>
             <a:pPr algn="ctr"/>
+            <a:endParaRPr/>
           </a:p>
         </p:txBody>
       </p:sp>
@@ -15650,6 +15832,7 @@
           <a:lstStyle/>
           <a:p>
             <a:pPr algn="ctr"/>
+            <a:endParaRPr/>
           </a:p>
         </p:txBody>
       </p:sp>
@@ -15670,7 +15853,7 @@
           <a:noFill/>
         </p:spPr>
         <p:txBody>
-          <a:bodyPr wrap="square" lIns="36576" rIns="36576" tIns="18288" bIns="18288" anchor="ctr">
+          <a:bodyPr wrap="square" lIns="36576" tIns="18288" rIns="36576" bIns="18288" anchor="ctr">
             <a:spAutoFit/>
           </a:bodyPr>
           <a:lstStyle/>
@@ -15705,7 +15888,7 @@
           <a:noFill/>
         </p:spPr>
         <p:txBody>
-          <a:bodyPr wrap="square" lIns="36576" rIns="36576" tIns="18288" bIns="18288" anchor="t">
+          <a:bodyPr wrap="square" lIns="36576" tIns="18288" rIns="36576" bIns="18288" anchor="t">
             <a:spAutoFit/>
           </a:bodyPr>
           <a:lstStyle/>
@@ -15740,7 +15923,7 @@
           <a:noFill/>
         </p:spPr>
         <p:txBody>
-          <a:bodyPr wrap="square" lIns="36576" rIns="36576" tIns="18288" bIns="18288" anchor="t">
+          <a:bodyPr wrap="square" lIns="36576" tIns="18288" rIns="36576" bIns="18288" anchor="t">
             <a:spAutoFit/>
           </a:bodyPr>
           <a:lstStyle/>
@@ -15805,6 +15988,7 @@
           <a:lstStyle/>
           <a:p>
             <a:pPr algn="ctr"/>
+            <a:endParaRPr/>
           </a:p>
         </p:txBody>
       </p:sp>
@@ -15849,6 +16033,7 @@
           <a:lstStyle/>
           <a:p>
             <a:pPr algn="ctr"/>
+            <a:endParaRPr/>
           </a:p>
         </p:txBody>
       </p:sp>
@@ -15869,7 +16054,7 @@
           <a:noFill/>
         </p:spPr>
         <p:txBody>
-          <a:bodyPr wrap="square" lIns="36576" rIns="36576" tIns="18288" bIns="18288" anchor="ctr">
+          <a:bodyPr wrap="square" lIns="36576" tIns="18288" rIns="36576" bIns="18288" anchor="ctr">
             <a:spAutoFit/>
           </a:bodyPr>
           <a:lstStyle/>
@@ -15904,7 +16089,7 @@
           <a:noFill/>
         </p:spPr>
         <p:txBody>
-          <a:bodyPr wrap="square" lIns="36576" rIns="36576" tIns="18288" bIns="18288" anchor="t">
+          <a:bodyPr wrap="square" lIns="36576" tIns="18288" rIns="36576" bIns="18288" anchor="t">
             <a:spAutoFit/>
           </a:bodyPr>
           <a:lstStyle/>
@@ -15939,7 +16124,7 @@
           <a:noFill/>
         </p:spPr>
         <p:txBody>
-          <a:bodyPr wrap="square" lIns="36576" rIns="36576" tIns="18288" bIns="18288" anchor="t">
+          <a:bodyPr wrap="square" lIns="36576" tIns="18288" rIns="36576" bIns="18288" anchor="t">
             <a:spAutoFit/>
           </a:bodyPr>
           <a:lstStyle/>
@@ -16004,6 +16189,7 @@
           <a:lstStyle/>
           <a:p>
             <a:pPr algn="ctr"/>
+            <a:endParaRPr/>
           </a:p>
         </p:txBody>
       </p:sp>
@@ -16048,6 +16234,7 @@
           <a:lstStyle/>
           <a:p>
             <a:pPr algn="ctr"/>
+            <a:endParaRPr/>
           </a:p>
         </p:txBody>
       </p:sp>
@@ -16068,7 +16255,7 @@
           <a:noFill/>
         </p:spPr>
         <p:txBody>
-          <a:bodyPr wrap="square" lIns="36576" rIns="36576" tIns="18288" bIns="18288" anchor="ctr">
+          <a:bodyPr wrap="square" lIns="36576" tIns="18288" rIns="36576" bIns="18288" anchor="ctr">
             <a:spAutoFit/>
           </a:bodyPr>
           <a:lstStyle/>
@@ -16103,7 +16290,7 @@
           <a:noFill/>
         </p:spPr>
         <p:txBody>
-          <a:bodyPr wrap="square" lIns="36576" rIns="36576" tIns="18288" bIns="18288" anchor="t">
+          <a:bodyPr wrap="square" lIns="36576" tIns="18288" rIns="36576" bIns="18288" anchor="t">
             <a:spAutoFit/>
           </a:bodyPr>
           <a:lstStyle/>
@@ -16138,7 +16325,7 @@
           <a:noFill/>
         </p:spPr>
         <p:txBody>
-          <a:bodyPr wrap="square" lIns="36576" rIns="36576" tIns="18288" bIns="18288" anchor="t">
+          <a:bodyPr wrap="square" lIns="36576" tIns="18288" rIns="36576" bIns="18288" anchor="t">
             <a:spAutoFit/>
           </a:bodyPr>
           <a:lstStyle/>
@@ -16203,6 +16390,7 @@
           <a:lstStyle/>
           <a:p>
             <a:pPr algn="ctr"/>
+            <a:endParaRPr/>
           </a:p>
         </p:txBody>
       </p:sp>
@@ -16247,6 +16435,7 @@
           <a:lstStyle/>
           <a:p>
             <a:pPr algn="ctr"/>
+            <a:endParaRPr/>
           </a:p>
         </p:txBody>
       </p:sp>
@@ -16267,7 +16456,7 @@
           <a:noFill/>
         </p:spPr>
         <p:txBody>
-          <a:bodyPr wrap="square" lIns="36576" rIns="36576" tIns="18288" bIns="18288" anchor="ctr">
+          <a:bodyPr wrap="square" lIns="36576" tIns="18288" rIns="36576" bIns="18288" anchor="ctr">
             <a:spAutoFit/>
           </a:bodyPr>
           <a:lstStyle/>
@@ -16302,7 +16491,7 @@
           <a:noFill/>
         </p:spPr>
         <p:txBody>
-          <a:bodyPr wrap="square" lIns="36576" rIns="36576" tIns="18288" bIns="18288" anchor="t">
+          <a:bodyPr wrap="square" lIns="36576" tIns="18288" rIns="36576" bIns="18288" anchor="t">
             <a:spAutoFit/>
           </a:bodyPr>
           <a:lstStyle/>
@@ -16337,7 +16526,7 @@
           <a:noFill/>
         </p:spPr>
         <p:txBody>
-          <a:bodyPr wrap="square" lIns="36576" rIns="36576" tIns="18288" bIns="18288" anchor="t">
+          <a:bodyPr wrap="square" lIns="36576" tIns="18288" rIns="36576" bIns="18288" anchor="t">
             <a:spAutoFit/>
           </a:bodyPr>
           <a:lstStyle/>
@@ -16371,7 +16560,7 @@
 </file>
 
 <file path=ppt/slides/slide2.xml><?xml version="1.0" encoding="utf-8"?>
-<p:sld xmlns:a="http://schemas.openxmlformats.org/drawingml/2006/main" xmlns:p="http://schemas.openxmlformats.org/presentationml/2006/main" xmlns:r="http://schemas.openxmlformats.org/officeDocument/2006/relationships">
+<p:sld xmlns:a="http://schemas.openxmlformats.org/drawingml/2006/main" xmlns:r="http://schemas.openxmlformats.org/officeDocument/2006/relationships" xmlns:p="http://schemas.openxmlformats.org/presentationml/2006/main">
   <p:cSld>
     <p:spTree>
       <p:nvGrpSpPr>
@@ -16379,7 +16568,14 @@
         <p:cNvGrpSpPr/>
         <p:nvPr/>
       </p:nvGrpSpPr>
-      <p:grpSpPr/>
+      <p:grpSpPr>
+        <a:xfrm>
+          <a:off x="0" y="0"/>
+          <a:ext cx="0" cy="0"/>
+          <a:chOff x="0" y="0"/>
+          <a:chExt cx="0" cy="0"/>
+        </a:xfrm>
+      </p:grpSpPr>
       <p:sp>
         <p:nvSpPr>
           <p:cNvPr id="2" name="Rectangle 1"/>
@@ -16421,6 +16617,7 @@
           <a:lstStyle/>
           <a:p>
             <a:pPr algn="ctr"/>
+            <a:endParaRPr/>
           </a:p>
         </p:txBody>
       </p:sp>
@@ -16465,6 +16662,7 @@
           <a:lstStyle/>
           <a:p>
             <a:pPr algn="ctr"/>
+            <a:endParaRPr/>
           </a:p>
         </p:txBody>
       </p:sp>
@@ -16509,6 +16707,7 @@
           <a:lstStyle/>
           <a:p>
             <a:pPr algn="ctr"/>
+            <a:endParaRPr/>
           </a:p>
         </p:txBody>
       </p:sp>
@@ -16529,7 +16728,7 @@
           <a:noFill/>
         </p:spPr>
         <p:txBody>
-          <a:bodyPr wrap="square" lIns="36576" rIns="36576" tIns="18288" bIns="18288" anchor="ctr">
+          <a:bodyPr wrap="square" lIns="36576" tIns="18288" rIns="36576" bIns="18288" anchor="ctr">
             <a:spAutoFit/>
           </a:bodyPr>
           <a:lstStyle/>
@@ -16564,7 +16763,7 @@
           <a:noFill/>
         </p:spPr>
         <p:txBody>
-          <a:bodyPr wrap="square" lIns="36576" rIns="36576" tIns="18288" bIns="18288" anchor="ctr">
+          <a:bodyPr wrap="square" lIns="36576" tIns="18288" rIns="36576" bIns="18288" anchor="ctr">
             <a:spAutoFit/>
           </a:bodyPr>
           <a:lstStyle/>
@@ -16599,7 +16798,7 @@
           <a:noFill/>
         </p:spPr>
         <p:txBody>
-          <a:bodyPr wrap="square" lIns="36576" rIns="36576" tIns="18288" bIns="18288" anchor="ctr">
+          <a:bodyPr wrap="square" lIns="36576" tIns="18288" rIns="36576" bIns="18288" anchor="ctr">
             <a:spAutoFit/>
           </a:bodyPr>
           <a:lstStyle/>
@@ -16634,7 +16833,7 @@
           <a:noFill/>
         </p:spPr>
         <p:txBody>
-          <a:bodyPr wrap="square" lIns="36576" rIns="36576" tIns="18288" bIns="18288" anchor="t">
+          <a:bodyPr wrap="square" lIns="36576" tIns="18288" rIns="36576" bIns="18288" anchor="t">
             <a:spAutoFit/>
           </a:bodyPr>
           <a:lstStyle/>
@@ -16693,6 +16892,7 @@
           <a:lstStyle/>
           <a:p>
             <a:pPr algn="ctr"/>
+            <a:endParaRPr/>
           </a:p>
         </p:txBody>
       </p:sp>
@@ -16713,7 +16913,7 @@
           <a:noFill/>
         </p:spPr>
         <p:txBody>
-          <a:bodyPr wrap="square" lIns="36576" rIns="36576" tIns="18288" bIns="18288" anchor="ctr">
+          <a:bodyPr wrap="square" lIns="36576" tIns="18288" rIns="36576" bIns="18288" anchor="ctr">
             <a:spAutoFit/>
           </a:bodyPr>
           <a:lstStyle/>
@@ -16748,7 +16948,7 @@
           <a:noFill/>
         </p:spPr>
         <p:txBody>
-          <a:bodyPr wrap="square" lIns="36576" rIns="36576" tIns="18288" bIns="18288" anchor="ctr">
+          <a:bodyPr wrap="square" lIns="36576" tIns="18288" rIns="36576" bIns="18288" anchor="ctr">
             <a:spAutoFit/>
           </a:bodyPr>
           <a:lstStyle/>
@@ -16809,6 +17009,7 @@
           <a:lstStyle/>
           <a:p>
             <a:pPr algn="ctr"/>
+            <a:endParaRPr/>
           </a:p>
         </p:txBody>
       </p:sp>
@@ -16829,7 +17030,7 @@
           <a:noFill/>
         </p:spPr>
         <p:txBody>
-          <a:bodyPr wrap="square" lIns="36576" rIns="36576" tIns="18288" bIns="18288" anchor="ctr">
+          <a:bodyPr wrap="square" lIns="36576" tIns="18288" rIns="36576" bIns="18288" anchor="ctr">
             <a:spAutoFit/>
           </a:bodyPr>
           <a:lstStyle/>
@@ -16864,7 +17065,7 @@
           <a:noFill/>
         </p:spPr>
         <p:txBody>
-          <a:bodyPr wrap="square" lIns="36576" rIns="36576" tIns="18288" bIns="18288" anchor="t">
+          <a:bodyPr wrap="square" lIns="36576" tIns="18288" rIns="36576" bIns="18288" anchor="t">
             <a:spAutoFit/>
           </a:bodyPr>
           <a:lstStyle/>
@@ -16899,7 +17100,7 @@
           <a:noFill/>
         </p:spPr>
         <p:txBody>
-          <a:bodyPr wrap="square" lIns="36576" rIns="36576" tIns="18288" bIns="18288" anchor="t">
+          <a:bodyPr wrap="square" lIns="36576" tIns="18288" rIns="36576" bIns="18288" anchor="t">
             <a:spAutoFit/>
           </a:bodyPr>
           <a:lstStyle/>
@@ -16960,6 +17161,7 @@
           <a:lstStyle/>
           <a:p>
             <a:pPr algn="ctr"/>
+            <a:endParaRPr/>
           </a:p>
         </p:txBody>
       </p:sp>
@@ -16980,7 +17182,7 @@
           <a:noFill/>
         </p:spPr>
         <p:txBody>
-          <a:bodyPr wrap="square" lIns="36576" rIns="36576" tIns="18288" bIns="18288" anchor="ctr">
+          <a:bodyPr wrap="square" lIns="36576" tIns="18288" rIns="36576" bIns="18288" anchor="ctr">
             <a:spAutoFit/>
           </a:bodyPr>
           <a:lstStyle/>
@@ -17015,7 +17217,7 @@
           <a:noFill/>
         </p:spPr>
         <p:txBody>
-          <a:bodyPr wrap="square" lIns="36576" rIns="36576" tIns="18288" bIns="18288" anchor="t">
+          <a:bodyPr wrap="square" lIns="36576" tIns="18288" rIns="36576" bIns="18288" anchor="t">
             <a:spAutoFit/>
           </a:bodyPr>
           <a:lstStyle/>
@@ -17050,7 +17252,7 @@
           <a:noFill/>
         </p:spPr>
         <p:txBody>
-          <a:bodyPr wrap="square" lIns="36576" rIns="36576" tIns="18288" bIns="18288" anchor="t">
+          <a:bodyPr wrap="square" lIns="36576" tIns="18288" rIns="36576" bIns="18288" anchor="t">
             <a:spAutoFit/>
           </a:bodyPr>
           <a:lstStyle/>
@@ -17111,6 +17313,7 @@
           <a:lstStyle/>
           <a:p>
             <a:pPr algn="ctr"/>
+            <a:endParaRPr/>
           </a:p>
         </p:txBody>
       </p:sp>
@@ -17131,7 +17334,7 @@
           <a:noFill/>
         </p:spPr>
         <p:txBody>
-          <a:bodyPr wrap="square" lIns="36576" rIns="36576" tIns="18288" bIns="18288" anchor="ctr">
+          <a:bodyPr wrap="square" lIns="36576" tIns="18288" rIns="36576" bIns="18288" anchor="ctr">
             <a:spAutoFit/>
           </a:bodyPr>
           <a:lstStyle/>
@@ -17166,7 +17369,7 @@
           <a:noFill/>
         </p:spPr>
         <p:txBody>
-          <a:bodyPr wrap="square" lIns="36576" rIns="36576" tIns="18288" bIns="18288" anchor="t">
+          <a:bodyPr wrap="square" lIns="36576" tIns="18288" rIns="36576" bIns="18288" anchor="t">
             <a:spAutoFit/>
           </a:bodyPr>
           <a:lstStyle/>
@@ -17201,7 +17404,7 @@
           <a:noFill/>
         </p:spPr>
         <p:txBody>
-          <a:bodyPr wrap="square" lIns="36576" rIns="36576" tIns="18288" bIns="18288" anchor="t">
+          <a:bodyPr wrap="square" lIns="36576" tIns="18288" rIns="36576" bIns="18288" anchor="t">
             <a:spAutoFit/>
           </a:bodyPr>
           <a:lstStyle/>
@@ -17262,6 +17465,7 @@
           <a:lstStyle/>
           <a:p>
             <a:pPr algn="ctr"/>
+            <a:endParaRPr/>
           </a:p>
         </p:txBody>
       </p:sp>
@@ -17282,7 +17486,7 @@
           <a:noFill/>
         </p:spPr>
         <p:txBody>
-          <a:bodyPr wrap="square" lIns="36576" rIns="36576" tIns="18288" bIns="18288" anchor="ctr">
+          <a:bodyPr wrap="square" lIns="36576" tIns="18288" rIns="36576" bIns="18288" anchor="ctr">
             <a:spAutoFit/>
           </a:bodyPr>
           <a:lstStyle/>
@@ -17317,7 +17521,7 @@
           <a:noFill/>
         </p:spPr>
         <p:txBody>
-          <a:bodyPr wrap="square" lIns="36576" rIns="36576" tIns="18288" bIns="18288" anchor="t">
+          <a:bodyPr wrap="square" lIns="36576" tIns="18288" rIns="36576" bIns="18288" anchor="t">
             <a:spAutoFit/>
           </a:bodyPr>
           <a:lstStyle/>
@@ -17352,7 +17556,7 @@
           <a:noFill/>
         </p:spPr>
         <p:txBody>
-          <a:bodyPr wrap="square" lIns="36576" rIns="36576" tIns="18288" bIns="18288" anchor="t">
+          <a:bodyPr wrap="square" lIns="36576" tIns="18288" rIns="36576" bIns="18288" anchor="t">
             <a:spAutoFit/>
           </a:bodyPr>
           <a:lstStyle/>
@@ -17413,6 +17617,7 @@
           <a:lstStyle/>
           <a:p>
             <a:pPr algn="ctr"/>
+            <a:endParaRPr/>
           </a:p>
         </p:txBody>
       </p:sp>
@@ -17433,7 +17638,7 @@
           <a:noFill/>
         </p:spPr>
         <p:txBody>
-          <a:bodyPr wrap="square" lIns="36576" rIns="36576" tIns="18288" bIns="18288" anchor="ctr">
+          <a:bodyPr wrap="square" lIns="36576" tIns="18288" rIns="36576" bIns="18288" anchor="ctr">
             <a:spAutoFit/>
           </a:bodyPr>
           <a:lstStyle/>
@@ -17468,7 +17673,7 @@
           <a:noFill/>
         </p:spPr>
         <p:txBody>
-          <a:bodyPr wrap="square" lIns="36576" rIns="36576" tIns="18288" bIns="18288" anchor="t">
+          <a:bodyPr wrap="square" lIns="36576" tIns="18288" rIns="36576" bIns="18288" anchor="t">
             <a:spAutoFit/>
           </a:bodyPr>
           <a:lstStyle/>
@@ -17503,7 +17708,7 @@
           <a:noFill/>
         </p:spPr>
         <p:txBody>
-          <a:bodyPr wrap="square" lIns="36576" rIns="36576" tIns="18288" bIns="18288" anchor="t">
+          <a:bodyPr wrap="square" lIns="36576" tIns="18288" rIns="36576" bIns="18288" anchor="t">
             <a:spAutoFit/>
           </a:bodyPr>
           <a:lstStyle/>
@@ -17564,6 +17769,7 @@
           <a:lstStyle/>
           <a:p>
             <a:pPr algn="ctr"/>
+            <a:endParaRPr/>
           </a:p>
         </p:txBody>
       </p:sp>
@@ -17584,7 +17790,7 @@
           <a:noFill/>
         </p:spPr>
         <p:txBody>
-          <a:bodyPr wrap="square" lIns="36576" rIns="36576" tIns="18288" bIns="18288" anchor="ctr">
+          <a:bodyPr wrap="square" lIns="36576" tIns="18288" rIns="36576" bIns="18288" anchor="ctr">
             <a:spAutoFit/>
           </a:bodyPr>
           <a:lstStyle/>
@@ -17619,7 +17825,7 @@
           <a:noFill/>
         </p:spPr>
         <p:txBody>
-          <a:bodyPr wrap="square" lIns="36576" rIns="36576" tIns="18288" bIns="18288" anchor="t">
+          <a:bodyPr wrap="square" lIns="36576" tIns="18288" rIns="36576" bIns="18288" anchor="t">
             <a:spAutoFit/>
           </a:bodyPr>
           <a:lstStyle/>
@@ -17654,7 +17860,7 @@
           <a:noFill/>
         </p:spPr>
         <p:txBody>
-          <a:bodyPr wrap="square" lIns="36576" rIns="36576" tIns="18288" bIns="18288" anchor="t">
+          <a:bodyPr wrap="square" lIns="36576" tIns="18288" rIns="36576" bIns="18288" anchor="t">
             <a:spAutoFit/>
           </a:bodyPr>
           <a:lstStyle/>
@@ -17715,6 +17921,7 @@
           <a:lstStyle/>
           <a:p>
             <a:pPr algn="ctr"/>
+            <a:endParaRPr/>
           </a:p>
         </p:txBody>
       </p:sp>
@@ -17735,7 +17942,7 @@
           <a:noFill/>
         </p:spPr>
         <p:txBody>
-          <a:bodyPr wrap="square" lIns="36576" rIns="36576" tIns="18288" bIns="18288" anchor="ctr">
+          <a:bodyPr wrap="square" lIns="36576" tIns="18288" rIns="36576" bIns="18288" anchor="ctr">
             <a:spAutoFit/>
           </a:bodyPr>
           <a:lstStyle/>
@@ -17770,7 +17977,7 @@
           <a:noFill/>
         </p:spPr>
         <p:txBody>
-          <a:bodyPr wrap="square" lIns="36576" rIns="36576" tIns="18288" bIns="18288" anchor="t">
+          <a:bodyPr wrap="square" lIns="36576" tIns="18288" rIns="36576" bIns="18288" anchor="t">
             <a:spAutoFit/>
           </a:bodyPr>
           <a:lstStyle/>
@@ -17805,7 +18012,7 @@
           <a:noFill/>
         </p:spPr>
         <p:txBody>
-          <a:bodyPr wrap="square" lIns="36576" rIns="36576" tIns="18288" bIns="18288" anchor="t">
+          <a:bodyPr wrap="square" lIns="36576" tIns="18288" rIns="36576" bIns="18288" anchor="t">
             <a:spAutoFit/>
           </a:bodyPr>
           <a:lstStyle/>
@@ -17866,6 +18073,7 @@
           <a:lstStyle/>
           <a:p>
             <a:pPr algn="ctr"/>
+            <a:endParaRPr/>
           </a:p>
         </p:txBody>
       </p:sp>
@@ -17886,7 +18094,7 @@
           <a:noFill/>
         </p:spPr>
         <p:txBody>
-          <a:bodyPr wrap="square" lIns="36576" rIns="36576" tIns="18288" bIns="18288" anchor="ctr">
+          <a:bodyPr wrap="square" lIns="36576" tIns="18288" rIns="36576" bIns="18288" anchor="ctr">
             <a:spAutoFit/>
           </a:bodyPr>
           <a:lstStyle/>
@@ -17921,7 +18129,7 @@
           <a:noFill/>
         </p:spPr>
         <p:txBody>
-          <a:bodyPr wrap="square" lIns="36576" rIns="36576" tIns="18288" bIns="18288" anchor="t">
+          <a:bodyPr wrap="square" lIns="36576" tIns="18288" rIns="36576" bIns="18288" anchor="t">
             <a:spAutoFit/>
           </a:bodyPr>
           <a:lstStyle/>
@@ -17956,7 +18164,7 @@
           <a:noFill/>
         </p:spPr>
         <p:txBody>
-          <a:bodyPr wrap="square" lIns="36576" rIns="36576" tIns="18288" bIns="18288" anchor="t">
+          <a:bodyPr wrap="square" lIns="36576" tIns="18288" rIns="36576" bIns="18288" anchor="t">
             <a:spAutoFit/>
           </a:bodyPr>
           <a:lstStyle/>
@@ -18017,6 +18225,7 @@
           <a:lstStyle/>
           <a:p>
             <a:pPr algn="ctr"/>
+            <a:endParaRPr/>
           </a:p>
         </p:txBody>
       </p:sp>
@@ -18037,7 +18246,7 @@
           <a:noFill/>
         </p:spPr>
         <p:txBody>
-          <a:bodyPr wrap="square" lIns="36576" rIns="36576" tIns="18288" bIns="18288" anchor="ctr">
+          <a:bodyPr wrap="square" lIns="36576" tIns="18288" rIns="36576" bIns="18288" anchor="ctr">
             <a:spAutoFit/>
           </a:bodyPr>
           <a:lstStyle/>
@@ -18072,7 +18281,7 @@
           <a:noFill/>
         </p:spPr>
         <p:txBody>
-          <a:bodyPr wrap="square" lIns="36576" rIns="36576" tIns="18288" bIns="18288" anchor="t">
+          <a:bodyPr wrap="square" lIns="36576" tIns="18288" rIns="36576" bIns="18288" anchor="t">
             <a:spAutoFit/>
           </a:bodyPr>
           <a:lstStyle/>
@@ -18107,7 +18316,7 @@
           <a:noFill/>
         </p:spPr>
         <p:txBody>
-          <a:bodyPr wrap="square" lIns="36576" rIns="36576" tIns="18288" bIns="18288" anchor="t">
+          <a:bodyPr wrap="square" lIns="36576" tIns="18288" rIns="36576" bIns="18288" anchor="t">
             <a:spAutoFit/>
           </a:bodyPr>
           <a:lstStyle/>
@@ -18168,6 +18377,7 @@
           <a:lstStyle/>
           <a:p>
             <a:pPr algn="ctr"/>
+            <a:endParaRPr/>
           </a:p>
         </p:txBody>
       </p:sp>
@@ -18188,7 +18398,7 @@
           <a:noFill/>
         </p:spPr>
         <p:txBody>
-          <a:bodyPr wrap="square" lIns="36576" rIns="36576" tIns="18288" bIns="18288" anchor="ctr">
+          <a:bodyPr wrap="square" lIns="36576" tIns="18288" rIns="36576" bIns="18288" anchor="ctr">
             <a:spAutoFit/>
           </a:bodyPr>
           <a:lstStyle/>
@@ -18223,7 +18433,7 @@
           <a:noFill/>
         </p:spPr>
         <p:txBody>
-          <a:bodyPr wrap="square" lIns="36576" rIns="36576" tIns="18288" bIns="18288" anchor="t">
+          <a:bodyPr wrap="square" lIns="36576" tIns="18288" rIns="36576" bIns="18288" anchor="t">
             <a:spAutoFit/>
           </a:bodyPr>
           <a:lstStyle/>
@@ -18258,7 +18468,7 @@
           <a:noFill/>
         </p:spPr>
         <p:txBody>
-          <a:bodyPr wrap="square" lIns="36576" rIns="36576" tIns="18288" bIns="18288" anchor="t">
+          <a:bodyPr wrap="square" lIns="36576" tIns="18288" rIns="36576" bIns="18288" anchor="t">
             <a:spAutoFit/>
           </a:bodyPr>
           <a:lstStyle/>
@@ -18288,7 +18498,7 @@
 </file>
 
 <file path=ppt/slides/slide20.xml><?xml version="1.0" encoding="utf-8"?>
-<p:sld xmlns:a="http://schemas.openxmlformats.org/drawingml/2006/main" xmlns:p="http://schemas.openxmlformats.org/presentationml/2006/main" xmlns:r="http://schemas.openxmlformats.org/officeDocument/2006/relationships">
+<p:sld xmlns:a="http://schemas.openxmlformats.org/drawingml/2006/main" xmlns:r="http://schemas.openxmlformats.org/officeDocument/2006/relationships" xmlns:p="http://schemas.openxmlformats.org/presentationml/2006/main">
   <p:cSld>
     <p:spTree>
       <p:nvGrpSpPr>
@@ -18296,7 +18506,14 @@
         <p:cNvGrpSpPr/>
         <p:nvPr/>
       </p:nvGrpSpPr>
-      <p:grpSpPr/>
+      <p:grpSpPr>
+        <a:xfrm>
+          <a:off x="0" y="0"/>
+          <a:ext cx="0" cy="0"/>
+          <a:chOff x="0" y="0"/>
+          <a:chExt cx="0" cy="0"/>
+        </a:xfrm>
+      </p:grpSpPr>
       <p:sp>
         <p:nvSpPr>
           <p:cNvPr id="2" name="Rectangle 1"/>
@@ -18338,6 +18555,7 @@
           <a:lstStyle/>
           <a:p>
             <a:pPr algn="ctr"/>
+            <a:endParaRPr/>
           </a:p>
         </p:txBody>
       </p:sp>
@@ -18382,6 +18600,7 @@
           <a:lstStyle/>
           <a:p>
             <a:pPr algn="ctr"/>
+            <a:endParaRPr/>
           </a:p>
         </p:txBody>
       </p:sp>
@@ -18426,6 +18645,7 @@
           <a:lstStyle/>
           <a:p>
             <a:pPr algn="ctr"/>
+            <a:endParaRPr/>
           </a:p>
         </p:txBody>
       </p:sp>
@@ -18446,7 +18666,7 @@
           <a:noFill/>
         </p:spPr>
         <p:txBody>
-          <a:bodyPr wrap="square" lIns="36576" rIns="36576" tIns="18288" bIns="18288" anchor="ctr">
+          <a:bodyPr wrap="square" lIns="36576" tIns="18288" rIns="36576" bIns="18288" anchor="ctr">
             <a:spAutoFit/>
           </a:bodyPr>
           <a:lstStyle/>
@@ -18481,7 +18701,7 @@
           <a:noFill/>
         </p:spPr>
         <p:txBody>
-          <a:bodyPr wrap="square" lIns="36576" rIns="36576" tIns="18288" bIns="18288" anchor="ctr">
+          <a:bodyPr wrap="square" lIns="36576" tIns="18288" rIns="36576" bIns="18288" anchor="ctr">
             <a:spAutoFit/>
           </a:bodyPr>
           <a:lstStyle/>
@@ -18516,7 +18736,7 @@
           <a:noFill/>
         </p:spPr>
         <p:txBody>
-          <a:bodyPr wrap="square" lIns="36576" rIns="36576" tIns="18288" bIns="18288" anchor="ctr">
+          <a:bodyPr wrap="square" lIns="36576" tIns="18288" rIns="36576" bIns="18288" anchor="ctr">
             <a:spAutoFit/>
           </a:bodyPr>
           <a:lstStyle/>
@@ -18551,7 +18771,7 @@
           <a:noFill/>
         </p:spPr>
         <p:txBody>
-          <a:bodyPr wrap="square" lIns="36576" rIns="36576" tIns="18288" bIns="18288" anchor="t">
+          <a:bodyPr wrap="square" lIns="36576" tIns="18288" rIns="36576" bIns="18288" anchor="t">
             <a:spAutoFit/>
           </a:bodyPr>
           <a:lstStyle/>
@@ -18610,6 +18830,7 @@
           <a:lstStyle/>
           <a:p>
             <a:pPr algn="ctr"/>
+            <a:endParaRPr/>
           </a:p>
         </p:txBody>
       </p:sp>
@@ -18630,7 +18851,7 @@
           <a:noFill/>
         </p:spPr>
         <p:txBody>
-          <a:bodyPr wrap="square" lIns="36576" rIns="36576" tIns="18288" bIns="18288" anchor="ctr">
+          <a:bodyPr wrap="square" lIns="36576" tIns="18288" rIns="36576" bIns="18288" anchor="ctr">
             <a:spAutoFit/>
           </a:bodyPr>
           <a:lstStyle/>
@@ -18665,7 +18886,7 @@
           <a:noFill/>
         </p:spPr>
         <p:txBody>
-          <a:bodyPr wrap="square" lIns="36576" rIns="36576" tIns="18288" bIns="18288" anchor="ctr">
+          <a:bodyPr wrap="square" lIns="36576" tIns="18288" rIns="36576" bIns="18288" anchor="ctr">
             <a:spAutoFit/>
           </a:bodyPr>
           <a:lstStyle/>
@@ -18726,6 +18947,7 @@
           <a:lstStyle/>
           <a:p>
             <a:pPr algn="ctr"/>
+            <a:endParaRPr/>
           </a:p>
         </p:txBody>
       </p:sp>
@@ -18770,6 +18992,7 @@
           <a:lstStyle/>
           <a:p>
             <a:pPr algn="ctr"/>
+            <a:endParaRPr/>
           </a:p>
         </p:txBody>
       </p:sp>
@@ -18790,7 +19013,7 @@
           <a:noFill/>
         </p:spPr>
         <p:txBody>
-          <a:bodyPr wrap="square" lIns="36576" rIns="36576" tIns="18288" bIns="18288" anchor="ctr">
+          <a:bodyPr wrap="square" lIns="36576" tIns="18288" rIns="36576" bIns="18288" anchor="ctr">
             <a:spAutoFit/>
           </a:bodyPr>
           <a:lstStyle/>
@@ -18825,7 +19048,7 @@
           <a:noFill/>
         </p:spPr>
         <p:txBody>
-          <a:bodyPr wrap="square" lIns="36576" rIns="36576" tIns="18288" bIns="18288" anchor="t">
+          <a:bodyPr wrap="square" lIns="36576" tIns="18288" rIns="36576" bIns="18288" anchor="t">
             <a:spAutoFit/>
           </a:bodyPr>
           <a:lstStyle/>
@@ -18860,7 +19083,7 @@
           <a:noFill/>
         </p:spPr>
         <p:txBody>
-          <a:bodyPr wrap="square" lIns="36576" rIns="36576" tIns="18288" bIns="18288" anchor="t">
+          <a:bodyPr wrap="square" lIns="36576" tIns="18288" rIns="36576" bIns="18288" anchor="t">
             <a:spAutoFit/>
           </a:bodyPr>
           <a:lstStyle/>
@@ -18925,6 +19148,7 @@
           <a:lstStyle/>
           <a:p>
             <a:pPr algn="ctr"/>
+            <a:endParaRPr/>
           </a:p>
         </p:txBody>
       </p:sp>
@@ -18969,6 +19193,7 @@
           <a:lstStyle/>
           <a:p>
             <a:pPr algn="ctr"/>
+            <a:endParaRPr/>
           </a:p>
         </p:txBody>
       </p:sp>
@@ -18989,7 +19214,7 @@
           <a:noFill/>
         </p:spPr>
         <p:txBody>
-          <a:bodyPr wrap="square" lIns="36576" rIns="36576" tIns="18288" bIns="18288" anchor="ctr">
+          <a:bodyPr wrap="square" lIns="36576" tIns="18288" rIns="36576" bIns="18288" anchor="ctr">
             <a:spAutoFit/>
           </a:bodyPr>
           <a:lstStyle/>
@@ -19024,7 +19249,7 @@
           <a:noFill/>
         </p:spPr>
         <p:txBody>
-          <a:bodyPr wrap="square" lIns="36576" rIns="36576" tIns="18288" bIns="18288" anchor="t">
+          <a:bodyPr wrap="square" lIns="36576" tIns="18288" rIns="36576" bIns="18288" anchor="t">
             <a:spAutoFit/>
           </a:bodyPr>
           <a:lstStyle/>
@@ -19059,7 +19284,7 @@
           <a:noFill/>
         </p:spPr>
         <p:txBody>
-          <a:bodyPr wrap="square" lIns="36576" rIns="36576" tIns="18288" bIns="18288" anchor="t">
+          <a:bodyPr wrap="square" lIns="36576" tIns="18288" rIns="36576" bIns="18288" anchor="t">
             <a:spAutoFit/>
           </a:bodyPr>
           <a:lstStyle/>
@@ -19124,6 +19349,7 @@
           <a:lstStyle/>
           <a:p>
             <a:pPr algn="ctr"/>
+            <a:endParaRPr/>
           </a:p>
         </p:txBody>
       </p:sp>
@@ -19168,6 +19394,7 @@
           <a:lstStyle/>
           <a:p>
             <a:pPr algn="ctr"/>
+            <a:endParaRPr/>
           </a:p>
         </p:txBody>
       </p:sp>
@@ -19188,7 +19415,7 @@
           <a:noFill/>
         </p:spPr>
         <p:txBody>
-          <a:bodyPr wrap="square" lIns="36576" rIns="36576" tIns="18288" bIns="18288" anchor="ctr">
+          <a:bodyPr wrap="square" lIns="36576" tIns="18288" rIns="36576" bIns="18288" anchor="ctr">
             <a:spAutoFit/>
           </a:bodyPr>
           <a:lstStyle/>
@@ -19223,7 +19450,7 @@
           <a:noFill/>
         </p:spPr>
         <p:txBody>
-          <a:bodyPr wrap="square" lIns="36576" rIns="36576" tIns="18288" bIns="18288" anchor="t">
+          <a:bodyPr wrap="square" lIns="36576" tIns="18288" rIns="36576" bIns="18288" anchor="t">
             <a:spAutoFit/>
           </a:bodyPr>
           <a:lstStyle/>
@@ -19258,7 +19485,7 @@
           <a:noFill/>
         </p:spPr>
         <p:txBody>
-          <a:bodyPr wrap="square" lIns="36576" rIns="36576" tIns="18288" bIns="18288" anchor="t">
+          <a:bodyPr wrap="square" lIns="36576" tIns="18288" rIns="36576" bIns="18288" anchor="t">
             <a:spAutoFit/>
           </a:bodyPr>
           <a:lstStyle/>
@@ -19323,6 +19550,7 @@
           <a:lstStyle/>
           <a:p>
             <a:pPr algn="ctr"/>
+            <a:endParaRPr/>
           </a:p>
         </p:txBody>
       </p:sp>
@@ -19367,6 +19595,7 @@
           <a:lstStyle/>
           <a:p>
             <a:pPr algn="ctr"/>
+            <a:endParaRPr/>
           </a:p>
         </p:txBody>
       </p:sp>
@@ -19387,7 +19616,7 @@
           <a:noFill/>
         </p:spPr>
         <p:txBody>
-          <a:bodyPr wrap="square" lIns="36576" rIns="36576" tIns="18288" bIns="18288" anchor="ctr">
+          <a:bodyPr wrap="square" lIns="36576" tIns="18288" rIns="36576" bIns="18288" anchor="ctr">
             <a:spAutoFit/>
           </a:bodyPr>
           <a:lstStyle/>
@@ -19422,7 +19651,7 @@
           <a:noFill/>
         </p:spPr>
         <p:txBody>
-          <a:bodyPr wrap="square" lIns="36576" rIns="36576" tIns="18288" bIns="18288" anchor="t">
+          <a:bodyPr wrap="square" lIns="36576" tIns="18288" rIns="36576" bIns="18288" anchor="t">
             <a:spAutoFit/>
           </a:bodyPr>
           <a:lstStyle/>
@@ -19457,7 +19686,7 @@
           <a:noFill/>
         </p:spPr>
         <p:txBody>
-          <a:bodyPr wrap="square" lIns="36576" rIns="36576" tIns="18288" bIns="18288" anchor="t">
+          <a:bodyPr wrap="square" lIns="36576" tIns="18288" rIns="36576" bIns="18288" anchor="t">
             <a:spAutoFit/>
           </a:bodyPr>
           <a:lstStyle/>
@@ -19491,7 +19720,7 @@
 </file>
 
 <file path=ppt/slides/slide21.xml><?xml version="1.0" encoding="utf-8"?>
-<p:sld xmlns:a="http://schemas.openxmlformats.org/drawingml/2006/main" xmlns:p="http://schemas.openxmlformats.org/presentationml/2006/main" xmlns:r="http://schemas.openxmlformats.org/officeDocument/2006/relationships">
+<p:sld xmlns:a="http://schemas.openxmlformats.org/drawingml/2006/main" xmlns:r="http://schemas.openxmlformats.org/officeDocument/2006/relationships" xmlns:p="http://schemas.openxmlformats.org/presentationml/2006/main">
   <p:cSld>
     <p:spTree>
       <p:nvGrpSpPr>
@@ -19499,7 +19728,14 @@
         <p:cNvGrpSpPr/>
         <p:nvPr/>
       </p:nvGrpSpPr>
-      <p:grpSpPr/>
+      <p:grpSpPr>
+        <a:xfrm>
+          <a:off x="0" y="0"/>
+          <a:ext cx="0" cy="0"/>
+          <a:chOff x="0" y="0"/>
+          <a:chExt cx="0" cy="0"/>
+        </a:xfrm>
+      </p:grpSpPr>
       <p:sp>
         <p:nvSpPr>
           <p:cNvPr id="2" name="Rectangle 1"/>
@@ -19541,6 +19777,7 @@
           <a:lstStyle/>
           <a:p>
             <a:pPr algn="ctr"/>
+            <a:endParaRPr/>
           </a:p>
         </p:txBody>
       </p:sp>
@@ -19585,6 +19822,7 @@
           <a:lstStyle/>
           <a:p>
             <a:pPr algn="ctr"/>
+            <a:endParaRPr/>
           </a:p>
         </p:txBody>
       </p:sp>
@@ -19629,6 +19867,7 @@
           <a:lstStyle/>
           <a:p>
             <a:pPr algn="ctr"/>
+            <a:endParaRPr/>
           </a:p>
         </p:txBody>
       </p:sp>
@@ -19649,7 +19888,7 @@
           <a:noFill/>
         </p:spPr>
         <p:txBody>
-          <a:bodyPr wrap="square" lIns="36576" rIns="36576" tIns="18288" bIns="18288" anchor="ctr">
+          <a:bodyPr wrap="square" lIns="36576" tIns="18288" rIns="36576" bIns="18288" anchor="ctr">
             <a:spAutoFit/>
           </a:bodyPr>
           <a:lstStyle/>
@@ -19684,7 +19923,7 @@
           <a:noFill/>
         </p:spPr>
         <p:txBody>
-          <a:bodyPr wrap="square" lIns="36576" rIns="36576" tIns="18288" bIns="18288" anchor="ctr">
+          <a:bodyPr wrap="square" lIns="36576" tIns="18288" rIns="36576" bIns="18288" anchor="ctr">
             <a:spAutoFit/>
           </a:bodyPr>
           <a:lstStyle/>
@@ -19719,7 +19958,7 @@
           <a:noFill/>
         </p:spPr>
         <p:txBody>
-          <a:bodyPr wrap="square" lIns="36576" rIns="36576" tIns="18288" bIns="18288" anchor="ctr">
+          <a:bodyPr wrap="square" lIns="36576" tIns="18288" rIns="36576" bIns="18288" anchor="ctr">
             <a:spAutoFit/>
           </a:bodyPr>
           <a:lstStyle/>
@@ -19754,7 +19993,7 @@
           <a:noFill/>
         </p:spPr>
         <p:txBody>
-          <a:bodyPr wrap="square" lIns="36576" rIns="36576" tIns="18288" bIns="18288" anchor="t">
+          <a:bodyPr wrap="square" lIns="36576" tIns="18288" rIns="36576" bIns="18288" anchor="t">
             <a:spAutoFit/>
           </a:bodyPr>
           <a:lstStyle/>
@@ -19813,6 +20052,7 @@
           <a:lstStyle/>
           <a:p>
             <a:pPr algn="ctr"/>
+            <a:endParaRPr/>
           </a:p>
         </p:txBody>
       </p:sp>
@@ -19833,7 +20073,7 @@
           <a:noFill/>
         </p:spPr>
         <p:txBody>
-          <a:bodyPr wrap="square" lIns="36576" rIns="36576" tIns="18288" bIns="18288" anchor="ctr">
+          <a:bodyPr wrap="square" lIns="36576" tIns="18288" rIns="36576" bIns="18288" anchor="ctr">
             <a:spAutoFit/>
           </a:bodyPr>
           <a:lstStyle/>
@@ -19868,7 +20108,7 @@
           <a:noFill/>
         </p:spPr>
         <p:txBody>
-          <a:bodyPr wrap="square" lIns="36576" rIns="36576" tIns="18288" bIns="18288" anchor="ctr">
+          <a:bodyPr wrap="square" lIns="36576" tIns="18288" rIns="36576" bIns="18288" anchor="ctr">
             <a:spAutoFit/>
           </a:bodyPr>
           <a:lstStyle/>
@@ -19929,6 +20169,7 @@
           <a:lstStyle/>
           <a:p>
             <a:pPr algn="ctr"/>
+            <a:endParaRPr/>
           </a:p>
         </p:txBody>
       </p:sp>
@@ -19973,6 +20214,7 @@
           <a:lstStyle/>
           <a:p>
             <a:pPr algn="ctr"/>
+            <a:endParaRPr/>
           </a:p>
         </p:txBody>
       </p:sp>
@@ -19993,7 +20235,7 @@
           <a:noFill/>
         </p:spPr>
         <p:txBody>
-          <a:bodyPr wrap="square" lIns="36576" rIns="36576" tIns="18288" bIns="18288" anchor="ctr">
+          <a:bodyPr wrap="square" lIns="36576" tIns="18288" rIns="36576" bIns="18288" anchor="ctr">
             <a:spAutoFit/>
           </a:bodyPr>
           <a:lstStyle/>
@@ -20028,7 +20270,7 @@
           <a:noFill/>
         </p:spPr>
         <p:txBody>
-          <a:bodyPr wrap="square" lIns="36576" rIns="36576" tIns="18288" bIns="18288" anchor="t">
+          <a:bodyPr wrap="square" lIns="36576" tIns="18288" rIns="36576" bIns="18288" anchor="t">
             <a:spAutoFit/>
           </a:bodyPr>
           <a:lstStyle/>
@@ -20093,6 +20335,7 @@
           <a:lstStyle/>
           <a:p>
             <a:pPr algn="ctr"/>
+            <a:endParaRPr/>
           </a:p>
         </p:txBody>
       </p:sp>
@@ -20137,6 +20380,7 @@
           <a:lstStyle/>
           <a:p>
             <a:pPr algn="ctr"/>
+            <a:endParaRPr/>
           </a:p>
         </p:txBody>
       </p:sp>
@@ -20157,7 +20401,7 @@
           <a:noFill/>
         </p:spPr>
         <p:txBody>
-          <a:bodyPr wrap="square" lIns="36576" rIns="36576" tIns="18288" bIns="18288" anchor="ctr">
+          <a:bodyPr wrap="square" lIns="36576" tIns="18288" rIns="36576" bIns="18288" anchor="ctr">
             <a:spAutoFit/>
           </a:bodyPr>
           <a:lstStyle/>
@@ -20192,7 +20436,7 @@
           <a:noFill/>
         </p:spPr>
         <p:txBody>
-          <a:bodyPr wrap="square" lIns="36576" rIns="36576" tIns="18288" bIns="18288" anchor="t">
+          <a:bodyPr wrap="square" lIns="36576" tIns="18288" rIns="36576" bIns="18288" anchor="t">
             <a:spAutoFit/>
           </a:bodyPr>
           <a:lstStyle/>
@@ -20257,6 +20501,7 @@
           <a:lstStyle/>
           <a:p>
             <a:pPr algn="ctr"/>
+            <a:endParaRPr/>
           </a:p>
         </p:txBody>
       </p:sp>
@@ -20301,6 +20546,7 @@
           <a:lstStyle/>
           <a:p>
             <a:pPr algn="ctr"/>
+            <a:endParaRPr/>
           </a:p>
         </p:txBody>
       </p:sp>
@@ -20321,7 +20567,7 @@
           <a:noFill/>
         </p:spPr>
         <p:txBody>
-          <a:bodyPr wrap="square" lIns="36576" rIns="36576" tIns="18288" bIns="18288" anchor="ctr">
+          <a:bodyPr wrap="square" lIns="36576" tIns="18288" rIns="36576" bIns="18288" anchor="ctr">
             <a:spAutoFit/>
           </a:bodyPr>
           <a:lstStyle/>
@@ -20356,7 +20602,7 @@
           <a:noFill/>
         </p:spPr>
         <p:txBody>
-          <a:bodyPr wrap="square" lIns="36576" rIns="36576" tIns="18288" bIns="18288" anchor="t">
+          <a:bodyPr wrap="square" lIns="36576" tIns="18288" rIns="36576" bIns="18288" anchor="t">
             <a:spAutoFit/>
           </a:bodyPr>
           <a:lstStyle/>
@@ -20421,6 +20667,7 @@
           <a:lstStyle/>
           <a:p>
             <a:pPr algn="ctr"/>
+            <a:endParaRPr/>
           </a:p>
         </p:txBody>
       </p:sp>
@@ -20465,6 +20712,7 @@
           <a:lstStyle/>
           <a:p>
             <a:pPr algn="ctr"/>
+            <a:endParaRPr/>
           </a:p>
         </p:txBody>
       </p:sp>
@@ -20485,7 +20733,7 @@
           <a:noFill/>
         </p:spPr>
         <p:txBody>
-          <a:bodyPr wrap="square" lIns="36576" rIns="36576" tIns="18288" bIns="18288" anchor="ctr">
+          <a:bodyPr wrap="square" lIns="36576" tIns="18288" rIns="36576" bIns="18288" anchor="ctr">
             <a:spAutoFit/>
           </a:bodyPr>
           <a:lstStyle/>
@@ -20520,7 +20768,7 @@
           <a:noFill/>
         </p:spPr>
         <p:txBody>
-          <a:bodyPr wrap="square" lIns="36576" rIns="36576" tIns="18288" bIns="18288" anchor="t">
+          <a:bodyPr wrap="square" lIns="36576" tIns="18288" rIns="36576" bIns="18288" anchor="t">
             <a:spAutoFit/>
           </a:bodyPr>
           <a:lstStyle/>
@@ -20554,7 +20802,7 @@
 </file>
 
 <file path=ppt/slides/slide22.xml><?xml version="1.0" encoding="utf-8"?>
-<p:sld xmlns:a="http://schemas.openxmlformats.org/drawingml/2006/main" xmlns:p="http://schemas.openxmlformats.org/presentationml/2006/main" xmlns:r="http://schemas.openxmlformats.org/officeDocument/2006/relationships">
+<p:sld xmlns:a="http://schemas.openxmlformats.org/drawingml/2006/main" xmlns:r="http://schemas.openxmlformats.org/officeDocument/2006/relationships" xmlns:p="http://schemas.openxmlformats.org/presentationml/2006/main">
   <p:cSld>
     <p:spTree>
       <p:nvGrpSpPr>
@@ -20562,7 +20810,14 @@
         <p:cNvGrpSpPr/>
         <p:nvPr/>
       </p:nvGrpSpPr>
-      <p:grpSpPr/>
+      <p:grpSpPr>
+        <a:xfrm>
+          <a:off x="0" y="0"/>
+          <a:ext cx="0" cy="0"/>
+          <a:chOff x="0" y="0"/>
+          <a:chExt cx="0" cy="0"/>
+        </a:xfrm>
+      </p:grpSpPr>
       <p:sp>
         <p:nvSpPr>
           <p:cNvPr id="2" name="Rectangle 1"/>
@@ -20604,6 +20859,7 @@
           <a:lstStyle/>
           <a:p>
             <a:pPr algn="ctr"/>
+            <a:endParaRPr/>
           </a:p>
         </p:txBody>
       </p:sp>
@@ -20648,6 +20904,7 @@
           <a:lstStyle/>
           <a:p>
             <a:pPr algn="ctr"/>
+            <a:endParaRPr/>
           </a:p>
         </p:txBody>
       </p:sp>
@@ -20692,6 +20949,7 @@
           <a:lstStyle/>
           <a:p>
             <a:pPr algn="ctr"/>
+            <a:endParaRPr/>
           </a:p>
         </p:txBody>
       </p:sp>
@@ -20712,7 +20970,7 @@
           <a:noFill/>
         </p:spPr>
         <p:txBody>
-          <a:bodyPr wrap="square" lIns="36576" rIns="36576" tIns="18288" bIns="18288" anchor="ctr">
+          <a:bodyPr wrap="square" lIns="36576" tIns="18288" rIns="36576" bIns="18288" anchor="ctr">
             <a:spAutoFit/>
           </a:bodyPr>
           <a:lstStyle/>
@@ -20747,7 +21005,7 @@
           <a:noFill/>
         </p:spPr>
         <p:txBody>
-          <a:bodyPr wrap="square" lIns="36576" rIns="36576" tIns="18288" bIns="18288" anchor="ctr">
+          <a:bodyPr wrap="square" lIns="36576" tIns="18288" rIns="36576" bIns="18288" anchor="ctr">
             <a:spAutoFit/>
           </a:bodyPr>
           <a:lstStyle/>
@@ -20782,7 +21040,7 @@
           <a:noFill/>
         </p:spPr>
         <p:txBody>
-          <a:bodyPr wrap="square" lIns="36576" rIns="36576" tIns="18288" bIns="18288" anchor="ctr">
+          <a:bodyPr wrap="square" lIns="36576" tIns="18288" rIns="36576" bIns="18288" anchor="ctr">
             <a:spAutoFit/>
           </a:bodyPr>
           <a:lstStyle/>
@@ -20817,7 +21075,7 @@
           <a:noFill/>
         </p:spPr>
         <p:txBody>
-          <a:bodyPr wrap="square" lIns="36576" rIns="36576" tIns="18288" bIns="18288" anchor="t">
+          <a:bodyPr wrap="square" lIns="36576" tIns="18288" rIns="36576" bIns="18288" anchor="t">
             <a:spAutoFit/>
           </a:bodyPr>
           <a:lstStyle/>
@@ -20876,6 +21134,7 @@
           <a:lstStyle/>
           <a:p>
             <a:pPr algn="ctr"/>
+            <a:endParaRPr/>
           </a:p>
         </p:txBody>
       </p:sp>
@@ -20896,7 +21155,7 @@
           <a:noFill/>
         </p:spPr>
         <p:txBody>
-          <a:bodyPr wrap="square" lIns="36576" rIns="36576" tIns="18288" bIns="18288" anchor="ctr">
+          <a:bodyPr wrap="square" lIns="36576" tIns="18288" rIns="36576" bIns="18288" anchor="ctr">
             <a:spAutoFit/>
           </a:bodyPr>
           <a:lstStyle/>
@@ -20931,7 +21190,7 @@
           <a:noFill/>
         </p:spPr>
         <p:txBody>
-          <a:bodyPr wrap="square" lIns="36576" rIns="36576" tIns="18288" bIns="18288" anchor="ctr">
+          <a:bodyPr wrap="square" lIns="36576" tIns="18288" rIns="36576" bIns="18288" anchor="ctr">
             <a:spAutoFit/>
           </a:bodyPr>
           <a:lstStyle/>
@@ -20992,6 +21251,7 @@
           <a:lstStyle/>
           <a:p>
             <a:pPr algn="ctr"/>
+            <a:endParaRPr/>
           </a:p>
         </p:txBody>
       </p:sp>
@@ -21036,6 +21296,7 @@
           <a:lstStyle/>
           <a:p>
             <a:pPr algn="ctr"/>
+            <a:endParaRPr/>
           </a:p>
         </p:txBody>
       </p:sp>
@@ -21056,7 +21317,7 @@
           <a:noFill/>
         </p:spPr>
         <p:txBody>
-          <a:bodyPr wrap="square" lIns="36576" rIns="36576" tIns="18288" bIns="18288" anchor="ctr">
+          <a:bodyPr wrap="square" lIns="36576" tIns="18288" rIns="36576" bIns="18288" anchor="ctr">
             <a:spAutoFit/>
           </a:bodyPr>
           <a:lstStyle/>
@@ -21091,7 +21352,7 @@
           <a:noFill/>
         </p:spPr>
         <p:txBody>
-          <a:bodyPr wrap="square" lIns="36576" rIns="36576" tIns="18288" bIns="18288" anchor="t">
+          <a:bodyPr wrap="square" lIns="36576" tIns="18288" rIns="36576" bIns="18288" anchor="t">
             <a:spAutoFit/>
           </a:bodyPr>
           <a:lstStyle/>
@@ -21156,6 +21417,7 @@
           <a:lstStyle/>
           <a:p>
             <a:pPr algn="ctr"/>
+            <a:endParaRPr/>
           </a:p>
         </p:txBody>
       </p:sp>
@@ -21200,6 +21462,7 @@
           <a:lstStyle/>
           <a:p>
             <a:pPr algn="ctr"/>
+            <a:endParaRPr/>
           </a:p>
         </p:txBody>
       </p:sp>
@@ -21220,7 +21483,7 @@
           <a:noFill/>
         </p:spPr>
         <p:txBody>
-          <a:bodyPr wrap="square" lIns="36576" rIns="36576" tIns="18288" bIns="18288" anchor="ctr">
+          <a:bodyPr wrap="square" lIns="36576" tIns="18288" rIns="36576" bIns="18288" anchor="ctr">
             <a:spAutoFit/>
           </a:bodyPr>
           <a:lstStyle/>
@@ -21255,7 +21518,7 @@
           <a:noFill/>
         </p:spPr>
         <p:txBody>
-          <a:bodyPr wrap="square" lIns="36576" rIns="36576" tIns="18288" bIns="18288" anchor="t">
+          <a:bodyPr wrap="square" lIns="36576" tIns="18288" rIns="36576" bIns="18288" anchor="t">
             <a:spAutoFit/>
           </a:bodyPr>
           <a:lstStyle/>
@@ -21320,6 +21583,7 @@
           <a:lstStyle/>
           <a:p>
             <a:pPr algn="ctr"/>
+            <a:endParaRPr/>
           </a:p>
         </p:txBody>
       </p:sp>
@@ -21364,6 +21628,7 @@
           <a:lstStyle/>
           <a:p>
             <a:pPr algn="ctr"/>
+            <a:endParaRPr/>
           </a:p>
         </p:txBody>
       </p:sp>
@@ -21384,7 +21649,7 @@
           <a:noFill/>
         </p:spPr>
         <p:txBody>
-          <a:bodyPr wrap="square" lIns="36576" rIns="36576" tIns="18288" bIns="18288" anchor="ctr">
+          <a:bodyPr wrap="square" lIns="36576" tIns="18288" rIns="36576" bIns="18288" anchor="ctr">
             <a:spAutoFit/>
           </a:bodyPr>
           <a:lstStyle/>
@@ -21419,7 +21684,7 @@
           <a:noFill/>
         </p:spPr>
         <p:txBody>
-          <a:bodyPr wrap="square" lIns="36576" rIns="36576" tIns="18288" bIns="18288" anchor="t">
+          <a:bodyPr wrap="square" lIns="36576" tIns="18288" rIns="36576" bIns="18288" anchor="t">
             <a:spAutoFit/>
           </a:bodyPr>
           <a:lstStyle/>
@@ -21484,6 +21749,7 @@
           <a:lstStyle/>
           <a:p>
             <a:pPr algn="ctr"/>
+            <a:endParaRPr/>
           </a:p>
         </p:txBody>
       </p:sp>
@@ -21528,6 +21794,7 @@
           <a:lstStyle/>
           <a:p>
             <a:pPr algn="ctr"/>
+            <a:endParaRPr/>
           </a:p>
         </p:txBody>
       </p:sp>
@@ -21548,7 +21815,7 @@
           <a:noFill/>
         </p:spPr>
         <p:txBody>
-          <a:bodyPr wrap="square" lIns="36576" rIns="36576" tIns="18288" bIns="18288" anchor="ctr">
+          <a:bodyPr wrap="square" lIns="36576" tIns="18288" rIns="36576" bIns="18288" anchor="ctr">
             <a:spAutoFit/>
           </a:bodyPr>
           <a:lstStyle/>
@@ -21583,7 +21850,7 @@
           <a:noFill/>
         </p:spPr>
         <p:txBody>
-          <a:bodyPr wrap="square" lIns="36576" rIns="36576" tIns="18288" bIns="18288" anchor="t">
+          <a:bodyPr wrap="square" lIns="36576" tIns="18288" rIns="36576" bIns="18288" anchor="t">
             <a:spAutoFit/>
           </a:bodyPr>
           <a:lstStyle/>
@@ -21648,6 +21915,7 @@
           <a:lstStyle/>
           <a:p>
             <a:pPr algn="ctr"/>
+            <a:endParaRPr/>
           </a:p>
         </p:txBody>
       </p:sp>
@@ -21668,7 +21936,7 @@
           <a:noFill/>
         </p:spPr>
         <p:txBody>
-          <a:bodyPr wrap="square" lIns="36576" rIns="36576" tIns="18288" bIns="18288" anchor="ctr">
+          <a:bodyPr wrap="square" lIns="36576" tIns="18288" rIns="36576" bIns="18288" anchor="ctr">
             <a:spAutoFit/>
           </a:bodyPr>
           <a:lstStyle/>
@@ -21707,7 +21975,7 @@
 </file>
 
 <file path=ppt/slides/slide23.xml><?xml version="1.0" encoding="utf-8"?>
-<p:sld xmlns:a="http://schemas.openxmlformats.org/drawingml/2006/main" xmlns:p="http://schemas.openxmlformats.org/presentationml/2006/main" xmlns:r="http://schemas.openxmlformats.org/officeDocument/2006/relationships">
+<p:sld xmlns:a="http://schemas.openxmlformats.org/drawingml/2006/main" xmlns:r="http://schemas.openxmlformats.org/officeDocument/2006/relationships" xmlns:p="http://schemas.openxmlformats.org/presentationml/2006/main">
   <p:cSld>
     <p:spTree>
       <p:nvGrpSpPr>
@@ -21715,7 +21983,14 @@
         <p:cNvGrpSpPr/>
         <p:nvPr/>
       </p:nvGrpSpPr>
-      <p:grpSpPr/>
+      <p:grpSpPr>
+        <a:xfrm>
+          <a:off x="0" y="0"/>
+          <a:ext cx="0" cy="0"/>
+          <a:chOff x="0" y="0"/>
+          <a:chExt cx="0" cy="0"/>
+        </a:xfrm>
+      </p:grpSpPr>
       <p:sp>
         <p:nvSpPr>
           <p:cNvPr id="2" name="Rectangle 1"/>
@@ -21757,6 +22032,7 @@
           <a:lstStyle/>
           <a:p>
             <a:pPr algn="ctr"/>
+            <a:endParaRPr/>
           </a:p>
         </p:txBody>
       </p:sp>
@@ -21801,6 +22077,7 @@
           <a:lstStyle/>
           <a:p>
             <a:pPr algn="ctr"/>
+            <a:endParaRPr/>
           </a:p>
         </p:txBody>
       </p:sp>
@@ -21845,6 +22122,7 @@
           <a:lstStyle/>
           <a:p>
             <a:pPr algn="ctr"/>
+            <a:endParaRPr/>
           </a:p>
         </p:txBody>
       </p:sp>
@@ -21865,7 +22143,7 @@
           <a:noFill/>
         </p:spPr>
         <p:txBody>
-          <a:bodyPr wrap="square" lIns="36576" rIns="36576" tIns="18288" bIns="18288" anchor="ctr">
+          <a:bodyPr wrap="square" lIns="36576" tIns="18288" rIns="36576" bIns="18288" anchor="ctr">
             <a:spAutoFit/>
           </a:bodyPr>
           <a:lstStyle/>
@@ -21900,7 +22178,7 @@
           <a:noFill/>
         </p:spPr>
         <p:txBody>
-          <a:bodyPr wrap="square" lIns="36576" rIns="36576" tIns="18288" bIns="18288" anchor="ctr">
+          <a:bodyPr wrap="square" lIns="36576" tIns="18288" rIns="36576" bIns="18288" anchor="ctr">
             <a:spAutoFit/>
           </a:bodyPr>
           <a:lstStyle/>
@@ -21935,7 +22213,7 @@
           <a:noFill/>
         </p:spPr>
         <p:txBody>
-          <a:bodyPr wrap="square" lIns="36576" rIns="36576" tIns="18288" bIns="18288" anchor="ctr">
+          <a:bodyPr wrap="square" lIns="36576" tIns="18288" rIns="36576" bIns="18288" anchor="ctr">
             <a:spAutoFit/>
           </a:bodyPr>
           <a:lstStyle/>
@@ -21970,7 +22248,7 @@
           <a:noFill/>
         </p:spPr>
         <p:txBody>
-          <a:bodyPr wrap="square" lIns="36576" rIns="36576" tIns="18288" bIns="18288" anchor="t">
+          <a:bodyPr wrap="square" lIns="36576" tIns="18288" rIns="36576" bIns="18288" anchor="t">
             <a:spAutoFit/>
           </a:bodyPr>
           <a:lstStyle/>
@@ -22029,6 +22307,7 @@
           <a:lstStyle/>
           <a:p>
             <a:pPr algn="ctr"/>
+            <a:endParaRPr/>
           </a:p>
         </p:txBody>
       </p:sp>
@@ -22049,7 +22328,7 @@
           <a:noFill/>
         </p:spPr>
         <p:txBody>
-          <a:bodyPr wrap="square" lIns="36576" rIns="36576" tIns="18288" bIns="18288" anchor="ctr">
+          <a:bodyPr wrap="square" lIns="36576" tIns="18288" rIns="36576" bIns="18288" anchor="ctr">
             <a:spAutoFit/>
           </a:bodyPr>
           <a:lstStyle/>
@@ -22084,7 +22363,7 @@
           <a:noFill/>
         </p:spPr>
         <p:txBody>
-          <a:bodyPr wrap="square" lIns="36576" rIns="36576" tIns="18288" bIns="18288" anchor="ctr">
+          <a:bodyPr wrap="square" lIns="36576" tIns="18288" rIns="36576" bIns="18288" anchor="ctr">
             <a:spAutoFit/>
           </a:bodyPr>
           <a:lstStyle/>
@@ -22145,6 +22424,7 @@
           <a:lstStyle/>
           <a:p>
             <a:pPr algn="ctr"/>
+            <a:endParaRPr/>
           </a:p>
         </p:txBody>
       </p:sp>
@@ -22189,6 +22469,7 @@
           <a:lstStyle/>
           <a:p>
             <a:pPr algn="ctr"/>
+            <a:endParaRPr/>
           </a:p>
         </p:txBody>
       </p:sp>
@@ -22209,7 +22490,7 @@
           <a:noFill/>
         </p:spPr>
         <p:txBody>
-          <a:bodyPr wrap="square" lIns="36576" rIns="36576" tIns="18288" bIns="18288" anchor="t">
+          <a:bodyPr wrap="square" lIns="36576" tIns="18288" rIns="36576" bIns="18288" anchor="t">
             <a:spAutoFit/>
           </a:bodyPr>
           <a:lstStyle/>
@@ -22244,7 +22525,7 @@
           <a:noFill/>
         </p:spPr>
         <p:txBody>
-          <a:bodyPr wrap="square" lIns="36576" rIns="36576" tIns="18288" bIns="18288" anchor="t">
+          <a:bodyPr wrap="square" lIns="36576" tIns="18288" rIns="36576" bIns="18288" anchor="t">
             <a:spAutoFit/>
           </a:bodyPr>
           <a:lstStyle/>
@@ -22279,7 +22560,7 @@
           <a:noFill/>
         </p:spPr>
         <p:txBody>
-          <a:bodyPr wrap="square" lIns="36576" rIns="36576" tIns="18288" bIns="18288" anchor="t">
+          <a:bodyPr wrap="square" lIns="36576" tIns="18288" rIns="36576" bIns="18288" anchor="t">
             <a:spAutoFit/>
           </a:bodyPr>
           <a:lstStyle/>
@@ -22340,6 +22621,7 @@
           <a:lstStyle/>
           <a:p>
             <a:pPr algn="ctr"/>
+            <a:endParaRPr/>
           </a:p>
         </p:txBody>
       </p:sp>
@@ -22384,6 +22666,7 @@
           <a:lstStyle/>
           <a:p>
             <a:pPr algn="ctr"/>
+            <a:endParaRPr/>
           </a:p>
         </p:txBody>
       </p:sp>
@@ -22404,7 +22687,7 @@
           <a:noFill/>
         </p:spPr>
         <p:txBody>
-          <a:bodyPr wrap="square" lIns="36576" rIns="36576" tIns="18288" bIns="18288" anchor="t">
+          <a:bodyPr wrap="square" lIns="36576" tIns="18288" rIns="36576" bIns="18288" anchor="t">
             <a:spAutoFit/>
           </a:bodyPr>
           <a:lstStyle/>
@@ -22439,7 +22722,7 @@
           <a:noFill/>
         </p:spPr>
         <p:txBody>
-          <a:bodyPr wrap="square" lIns="36576" rIns="36576" tIns="18288" bIns="18288" anchor="t">
+          <a:bodyPr wrap="square" lIns="36576" tIns="18288" rIns="36576" bIns="18288" anchor="t">
             <a:spAutoFit/>
           </a:bodyPr>
           <a:lstStyle/>
@@ -22474,7 +22757,7 @@
           <a:noFill/>
         </p:spPr>
         <p:txBody>
-          <a:bodyPr wrap="square" lIns="36576" rIns="36576" tIns="18288" bIns="18288" anchor="t">
+          <a:bodyPr wrap="square" lIns="36576" tIns="18288" rIns="36576" bIns="18288" anchor="t">
             <a:spAutoFit/>
           </a:bodyPr>
           <a:lstStyle/>
@@ -22535,6 +22818,7 @@
           <a:lstStyle/>
           <a:p>
             <a:pPr algn="ctr"/>
+            <a:endParaRPr/>
           </a:p>
         </p:txBody>
       </p:sp>
@@ -22579,6 +22863,7 @@
           <a:lstStyle/>
           <a:p>
             <a:pPr algn="ctr"/>
+            <a:endParaRPr/>
           </a:p>
         </p:txBody>
       </p:sp>
@@ -22599,7 +22884,7 @@
           <a:noFill/>
         </p:spPr>
         <p:txBody>
-          <a:bodyPr wrap="square" lIns="36576" rIns="36576" tIns="18288" bIns="18288" anchor="t">
+          <a:bodyPr wrap="square" lIns="36576" tIns="18288" rIns="36576" bIns="18288" anchor="t">
             <a:spAutoFit/>
           </a:bodyPr>
           <a:lstStyle/>
@@ -22634,7 +22919,7 @@
           <a:noFill/>
         </p:spPr>
         <p:txBody>
-          <a:bodyPr wrap="square" lIns="36576" rIns="36576" tIns="18288" bIns="18288" anchor="t">
+          <a:bodyPr wrap="square" lIns="36576" tIns="18288" rIns="36576" bIns="18288" anchor="t">
             <a:spAutoFit/>
           </a:bodyPr>
           <a:lstStyle/>
@@ -22669,7 +22954,7 @@
           <a:noFill/>
         </p:spPr>
         <p:txBody>
-          <a:bodyPr wrap="square" lIns="36576" rIns="36576" tIns="18288" bIns="18288" anchor="t">
+          <a:bodyPr wrap="square" lIns="36576" tIns="18288" rIns="36576" bIns="18288" anchor="t">
             <a:spAutoFit/>
           </a:bodyPr>
           <a:lstStyle/>
@@ -22730,6 +23015,7 @@
           <a:lstStyle/>
           <a:p>
             <a:pPr algn="ctr"/>
+            <a:endParaRPr/>
           </a:p>
         </p:txBody>
       </p:sp>
@@ -22774,6 +23060,7 @@
           <a:lstStyle/>
           <a:p>
             <a:pPr algn="ctr"/>
+            <a:endParaRPr/>
           </a:p>
         </p:txBody>
       </p:sp>
@@ -22794,7 +23081,7 @@
           <a:noFill/>
         </p:spPr>
         <p:txBody>
-          <a:bodyPr wrap="square" lIns="36576" rIns="36576" tIns="18288" bIns="18288" anchor="t">
+          <a:bodyPr wrap="square" lIns="36576" tIns="18288" rIns="36576" bIns="18288" anchor="t">
             <a:spAutoFit/>
           </a:bodyPr>
           <a:lstStyle/>
@@ -22829,7 +23116,7 @@
           <a:noFill/>
         </p:spPr>
         <p:txBody>
-          <a:bodyPr wrap="square" lIns="36576" rIns="36576" tIns="18288" bIns="18288" anchor="t">
+          <a:bodyPr wrap="square" lIns="36576" tIns="18288" rIns="36576" bIns="18288" anchor="t">
             <a:spAutoFit/>
           </a:bodyPr>
           <a:lstStyle/>
@@ -22864,7 +23151,7 @@
           <a:noFill/>
         </p:spPr>
         <p:txBody>
-          <a:bodyPr wrap="square" lIns="36576" rIns="36576" tIns="18288" bIns="18288" anchor="t">
+          <a:bodyPr wrap="square" lIns="36576" tIns="18288" rIns="36576" bIns="18288" anchor="t">
             <a:spAutoFit/>
           </a:bodyPr>
           <a:lstStyle/>
@@ -22925,6 +23212,7 @@
           <a:lstStyle/>
           <a:p>
             <a:pPr algn="ctr"/>
+            <a:endParaRPr/>
           </a:p>
         </p:txBody>
       </p:sp>
@@ -22969,6 +23257,7 @@
           <a:lstStyle/>
           <a:p>
             <a:pPr algn="ctr"/>
+            <a:endParaRPr/>
           </a:p>
         </p:txBody>
       </p:sp>
@@ -22989,7 +23278,7 @@
           <a:noFill/>
         </p:spPr>
         <p:txBody>
-          <a:bodyPr wrap="square" lIns="36576" rIns="36576" tIns="18288" bIns="18288" anchor="t">
+          <a:bodyPr wrap="square" lIns="36576" tIns="18288" rIns="36576" bIns="18288" anchor="t">
             <a:spAutoFit/>
           </a:bodyPr>
           <a:lstStyle/>
@@ -23024,7 +23313,7 @@
           <a:noFill/>
         </p:spPr>
         <p:txBody>
-          <a:bodyPr wrap="square" lIns="36576" rIns="36576" tIns="18288" bIns="18288" anchor="t">
+          <a:bodyPr wrap="square" lIns="36576" tIns="18288" rIns="36576" bIns="18288" anchor="t">
             <a:spAutoFit/>
           </a:bodyPr>
           <a:lstStyle/>
@@ -23059,7 +23348,7 @@
           <a:noFill/>
         </p:spPr>
         <p:txBody>
-          <a:bodyPr wrap="square" lIns="36576" rIns="36576" tIns="18288" bIns="18288" anchor="t">
+          <a:bodyPr wrap="square" lIns="36576" tIns="18288" rIns="36576" bIns="18288" anchor="t">
             <a:spAutoFit/>
           </a:bodyPr>
           <a:lstStyle/>
@@ -23120,6 +23409,7 @@
           <a:lstStyle/>
           <a:p>
             <a:pPr algn="ctr"/>
+            <a:endParaRPr/>
           </a:p>
         </p:txBody>
       </p:sp>
@@ -23164,6 +23454,7 @@
           <a:lstStyle/>
           <a:p>
             <a:pPr algn="ctr"/>
+            <a:endParaRPr/>
           </a:p>
         </p:txBody>
       </p:sp>
@@ -23184,7 +23475,7 @@
           <a:noFill/>
         </p:spPr>
         <p:txBody>
-          <a:bodyPr wrap="square" lIns="36576" rIns="36576" tIns="18288" bIns="18288" anchor="t">
+          <a:bodyPr wrap="square" lIns="36576" tIns="18288" rIns="36576" bIns="18288" anchor="t">
             <a:spAutoFit/>
           </a:bodyPr>
           <a:lstStyle/>
@@ -23219,7 +23510,7 @@
           <a:noFill/>
         </p:spPr>
         <p:txBody>
-          <a:bodyPr wrap="square" lIns="36576" rIns="36576" tIns="18288" bIns="18288" anchor="t">
+          <a:bodyPr wrap="square" lIns="36576" tIns="18288" rIns="36576" bIns="18288" anchor="t">
             <a:spAutoFit/>
           </a:bodyPr>
           <a:lstStyle/>
@@ -23254,7 +23545,7 @@
           <a:noFill/>
         </p:spPr>
         <p:txBody>
-          <a:bodyPr wrap="square" lIns="36576" rIns="36576" tIns="18288" bIns="18288" anchor="t">
+          <a:bodyPr wrap="square" lIns="36576" tIns="18288" rIns="36576" bIns="18288" anchor="t">
             <a:spAutoFit/>
           </a:bodyPr>
           <a:lstStyle/>
@@ -23315,6 +23606,7 @@
           <a:lstStyle/>
           <a:p>
             <a:pPr algn="ctr"/>
+            <a:endParaRPr/>
           </a:p>
         </p:txBody>
       </p:sp>
@@ -23359,6 +23651,7 @@
           <a:lstStyle/>
           <a:p>
             <a:pPr algn="ctr"/>
+            <a:endParaRPr/>
           </a:p>
         </p:txBody>
       </p:sp>
@@ -23379,7 +23672,7 @@
           <a:noFill/>
         </p:spPr>
         <p:txBody>
-          <a:bodyPr wrap="square" lIns="36576" rIns="36576" tIns="18288" bIns="18288" anchor="t">
+          <a:bodyPr wrap="square" lIns="36576" tIns="18288" rIns="36576" bIns="18288" anchor="t">
             <a:spAutoFit/>
           </a:bodyPr>
           <a:lstStyle/>
@@ -23414,7 +23707,7 @@
           <a:noFill/>
         </p:spPr>
         <p:txBody>
-          <a:bodyPr wrap="square" lIns="36576" rIns="36576" tIns="18288" bIns="18288" anchor="t">
+          <a:bodyPr wrap="square" lIns="36576" tIns="18288" rIns="36576" bIns="18288" anchor="t">
             <a:spAutoFit/>
           </a:bodyPr>
           <a:lstStyle/>
@@ -23449,7 +23742,7 @@
           <a:noFill/>
         </p:spPr>
         <p:txBody>
-          <a:bodyPr wrap="square" lIns="36576" rIns="36576" tIns="18288" bIns="18288" anchor="t">
+          <a:bodyPr wrap="square" lIns="36576" tIns="18288" rIns="36576" bIns="18288" anchor="t">
             <a:spAutoFit/>
           </a:bodyPr>
           <a:lstStyle/>
@@ -23510,6 +23803,7 @@
           <a:lstStyle/>
           <a:p>
             <a:pPr algn="ctr"/>
+            <a:endParaRPr/>
           </a:p>
         </p:txBody>
       </p:sp>
@@ -23554,6 +23848,7 @@
           <a:lstStyle/>
           <a:p>
             <a:pPr algn="ctr"/>
+            <a:endParaRPr/>
           </a:p>
         </p:txBody>
       </p:sp>
@@ -23574,7 +23869,7 @@
           <a:noFill/>
         </p:spPr>
         <p:txBody>
-          <a:bodyPr wrap="square" lIns="36576" rIns="36576" tIns="18288" bIns="18288" anchor="t">
+          <a:bodyPr wrap="square" lIns="36576" tIns="18288" rIns="36576" bIns="18288" anchor="t">
             <a:spAutoFit/>
           </a:bodyPr>
           <a:lstStyle/>
@@ -23609,7 +23904,7 @@
           <a:noFill/>
         </p:spPr>
         <p:txBody>
-          <a:bodyPr wrap="square" lIns="36576" rIns="36576" tIns="18288" bIns="18288" anchor="t">
+          <a:bodyPr wrap="square" lIns="36576" tIns="18288" rIns="36576" bIns="18288" anchor="t">
             <a:spAutoFit/>
           </a:bodyPr>
           <a:lstStyle/>
@@ -23644,7 +23939,7 @@
           <a:noFill/>
         </p:spPr>
         <p:txBody>
-          <a:bodyPr wrap="square" lIns="36576" rIns="36576" tIns="18288" bIns="18288" anchor="t">
+          <a:bodyPr wrap="square" lIns="36576" tIns="18288" rIns="36576" bIns="18288" anchor="t">
             <a:spAutoFit/>
           </a:bodyPr>
           <a:lstStyle/>
@@ -23705,6 +24000,7 @@
           <a:lstStyle/>
           <a:p>
             <a:pPr algn="ctr"/>
+            <a:endParaRPr/>
           </a:p>
         </p:txBody>
       </p:sp>
@@ -23749,6 +24045,7 @@
           <a:lstStyle/>
           <a:p>
             <a:pPr algn="ctr"/>
+            <a:endParaRPr/>
           </a:p>
         </p:txBody>
       </p:sp>
@@ -23769,7 +24066,7 @@
           <a:noFill/>
         </p:spPr>
         <p:txBody>
-          <a:bodyPr wrap="square" lIns="36576" rIns="36576" tIns="18288" bIns="18288" anchor="t">
+          <a:bodyPr wrap="square" lIns="36576" tIns="18288" rIns="36576" bIns="18288" anchor="t">
             <a:spAutoFit/>
           </a:bodyPr>
           <a:lstStyle/>
@@ -23804,7 +24101,7 @@
           <a:noFill/>
         </p:spPr>
         <p:txBody>
-          <a:bodyPr wrap="square" lIns="36576" rIns="36576" tIns="18288" bIns="18288" anchor="t">
+          <a:bodyPr wrap="square" lIns="36576" tIns="18288" rIns="36576" bIns="18288" anchor="t">
             <a:spAutoFit/>
           </a:bodyPr>
           <a:lstStyle/>
@@ -23839,7 +24136,7 @@
           <a:noFill/>
         </p:spPr>
         <p:txBody>
-          <a:bodyPr wrap="square" lIns="36576" rIns="36576" tIns="18288" bIns="18288" anchor="t">
+          <a:bodyPr wrap="square" lIns="36576" tIns="18288" rIns="36576" bIns="18288" anchor="t">
             <a:spAutoFit/>
           </a:bodyPr>
           <a:lstStyle/>
@@ -23874,7 +24171,7 @@
           <a:noFill/>
         </p:spPr>
         <p:txBody>
-          <a:bodyPr wrap="square" lIns="36576" rIns="36576" tIns="18288" bIns="18288" anchor="t">
+          <a:bodyPr wrap="square" lIns="36576" tIns="18288" rIns="36576" bIns="18288" anchor="t">
             <a:spAutoFit/>
           </a:bodyPr>
           <a:lstStyle/>
@@ -23904,7 +24201,7 @@
 </file>
 
 <file path=ppt/slides/slide24.xml><?xml version="1.0" encoding="utf-8"?>
-<p:sld xmlns:a="http://schemas.openxmlformats.org/drawingml/2006/main" xmlns:p="http://schemas.openxmlformats.org/presentationml/2006/main" xmlns:r="http://schemas.openxmlformats.org/officeDocument/2006/relationships">
+<p:sld xmlns:a="http://schemas.openxmlformats.org/drawingml/2006/main" xmlns:r="http://schemas.openxmlformats.org/officeDocument/2006/relationships" xmlns:p="http://schemas.openxmlformats.org/presentationml/2006/main">
   <p:cSld>
     <p:spTree>
       <p:nvGrpSpPr>
@@ -23912,7 +24209,14 @@
         <p:cNvGrpSpPr/>
         <p:nvPr/>
       </p:nvGrpSpPr>
-      <p:grpSpPr/>
+      <p:grpSpPr>
+        <a:xfrm>
+          <a:off x="0" y="0"/>
+          <a:ext cx="0" cy="0"/>
+          <a:chOff x="0" y="0"/>
+          <a:chExt cx="0" cy="0"/>
+        </a:xfrm>
+      </p:grpSpPr>
       <p:sp>
         <p:nvSpPr>
           <p:cNvPr id="2" name="Rectangle 1"/>
@@ -23954,6 +24258,7 @@
           <a:lstStyle/>
           <a:p>
             <a:pPr algn="ctr"/>
+            <a:endParaRPr/>
           </a:p>
         </p:txBody>
       </p:sp>
@@ -23998,6 +24303,7 @@
           <a:lstStyle/>
           <a:p>
             <a:pPr algn="ctr"/>
+            <a:endParaRPr/>
           </a:p>
         </p:txBody>
       </p:sp>
@@ -24042,6 +24348,7 @@
           <a:lstStyle/>
           <a:p>
             <a:pPr algn="ctr"/>
+            <a:endParaRPr/>
           </a:p>
         </p:txBody>
       </p:sp>
@@ -24062,7 +24369,7 @@
           <a:noFill/>
         </p:spPr>
         <p:txBody>
-          <a:bodyPr wrap="square" lIns="36576" rIns="36576" tIns="18288" bIns="18288" anchor="ctr">
+          <a:bodyPr wrap="square" lIns="36576" tIns="18288" rIns="36576" bIns="18288" anchor="ctr">
             <a:spAutoFit/>
           </a:bodyPr>
           <a:lstStyle/>
@@ -24097,7 +24404,7 @@
           <a:noFill/>
         </p:spPr>
         <p:txBody>
-          <a:bodyPr wrap="square" lIns="36576" rIns="36576" tIns="18288" bIns="18288" anchor="ctr">
+          <a:bodyPr wrap="square" lIns="36576" tIns="18288" rIns="36576" bIns="18288" anchor="ctr">
             <a:spAutoFit/>
           </a:bodyPr>
           <a:lstStyle/>
@@ -24132,7 +24439,7 @@
           <a:noFill/>
         </p:spPr>
         <p:txBody>
-          <a:bodyPr wrap="square" lIns="36576" rIns="36576" tIns="18288" bIns="18288" anchor="ctr">
+          <a:bodyPr wrap="square" lIns="36576" tIns="18288" rIns="36576" bIns="18288" anchor="ctr">
             <a:spAutoFit/>
           </a:bodyPr>
           <a:lstStyle/>
@@ -24167,7 +24474,7 @@
           <a:noFill/>
         </p:spPr>
         <p:txBody>
-          <a:bodyPr wrap="square" lIns="36576" rIns="36576" tIns="18288" bIns="18288" anchor="t">
+          <a:bodyPr wrap="square" lIns="36576" tIns="18288" rIns="36576" bIns="18288" anchor="t">
             <a:spAutoFit/>
           </a:bodyPr>
           <a:lstStyle/>
@@ -24226,6 +24533,7 @@
           <a:lstStyle/>
           <a:p>
             <a:pPr algn="ctr"/>
+            <a:endParaRPr/>
           </a:p>
         </p:txBody>
       </p:sp>
@@ -24246,7 +24554,7 @@
           <a:noFill/>
         </p:spPr>
         <p:txBody>
-          <a:bodyPr wrap="square" lIns="36576" rIns="36576" tIns="18288" bIns="18288" anchor="ctr">
+          <a:bodyPr wrap="square" lIns="36576" tIns="18288" rIns="36576" bIns="18288" anchor="ctr">
             <a:spAutoFit/>
           </a:bodyPr>
           <a:lstStyle/>
@@ -24281,7 +24589,7 @@
           <a:noFill/>
         </p:spPr>
         <p:txBody>
-          <a:bodyPr wrap="square" lIns="36576" rIns="36576" tIns="18288" bIns="18288" anchor="ctr">
+          <a:bodyPr wrap="square" lIns="36576" tIns="18288" rIns="36576" bIns="18288" anchor="ctr">
             <a:spAutoFit/>
           </a:bodyPr>
           <a:lstStyle/>
@@ -24340,6 +24648,7 @@
           <a:lstStyle/>
           <a:p>
             <a:pPr algn="ctr"/>
+            <a:endParaRPr/>
           </a:p>
         </p:txBody>
       </p:sp>
@@ -24386,6 +24695,7 @@
           <a:lstStyle/>
           <a:p>
             <a:pPr algn="ctr"/>
+            <a:endParaRPr/>
           </a:p>
         </p:txBody>
       </p:sp>
@@ -24406,7 +24716,7 @@
           <a:noFill/>
         </p:spPr>
         <p:txBody>
-          <a:bodyPr wrap="square" lIns="36576" rIns="36576" tIns="18288" bIns="18288" anchor="ctr">
+          <a:bodyPr wrap="square" lIns="36576" tIns="18288" rIns="36576" bIns="18288" anchor="ctr">
             <a:spAutoFit/>
           </a:bodyPr>
           <a:lstStyle/>
@@ -24441,7 +24751,7 @@
           <a:noFill/>
         </p:spPr>
         <p:txBody>
-          <a:bodyPr wrap="square" lIns="36576" rIns="36576" tIns="18288" bIns="18288" anchor="ctr">
+          <a:bodyPr wrap="square" lIns="36576" tIns="18288" rIns="36576" bIns="18288" anchor="ctr">
             <a:spAutoFit/>
           </a:bodyPr>
           <a:lstStyle/>
@@ -24500,6 +24810,7 @@
           <a:lstStyle/>
           <a:p>
             <a:pPr algn="ctr"/>
+            <a:endParaRPr/>
           </a:p>
         </p:txBody>
       </p:sp>
@@ -24546,6 +24857,7 @@
           <a:lstStyle/>
           <a:p>
             <a:pPr algn="ctr"/>
+            <a:endParaRPr/>
           </a:p>
         </p:txBody>
       </p:sp>
@@ -24566,7 +24878,7 @@
           <a:noFill/>
         </p:spPr>
         <p:txBody>
-          <a:bodyPr wrap="square" lIns="36576" rIns="36576" tIns="18288" bIns="18288" anchor="ctr">
+          <a:bodyPr wrap="square" lIns="36576" tIns="18288" rIns="36576" bIns="18288" anchor="ctr">
             <a:spAutoFit/>
           </a:bodyPr>
           <a:lstStyle/>
@@ -24601,7 +24913,7 @@
           <a:noFill/>
         </p:spPr>
         <p:txBody>
-          <a:bodyPr wrap="square" lIns="36576" rIns="36576" tIns="18288" bIns="18288" anchor="ctr">
+          <a:bodyPr wrap="square" lIns="36576" tIns="18288" rIns="36576" bIns="18288" anchor="ctr">
             <a:spAutoFit/>
           </a:bodyPr>
           <a:lstStyle/>
@@ -24660,6 +24972,7 @@
           <a:lstStyle/>
           <a:p>
             <a:pPr algn="ctr"/>
+            <a:endParaRPr/>
           </a:p>
         </p:txBody>
       </p:sp>
@@ -24706,6 +25019,7 @@
           <a:lstStyle/>
           <a:p>
             <a:pPr algn="ctr"/>
+            <a:endParaRPr/>
           </a:p>
         </p:txBody>
       </p:sp>
@@ -24726,7 +25040,7 @@
           <a:noFill/>
         </p:spPr>
         <p:txBody>
-          <a:bodyPr wrap="square" lIns="36576" rIns="36576" tIns="18288" bIns="18288" anchor="ctr">
+          <a:bodyPr wrap="square" lIns="36576" tIns="18288" rIns="36576" bIns="18288" anchor="ctr">
             <a:spAutoFit/>
           </a:bodyPr>
           <a:lstStyle/>
@@ -24761,7 +25075,7 @@
           <a:noFill/>
         </p:spPr>
         <p:txBody>
-          <a:bodyPr wrap="square" lIns="36576" rIns="36576" tIns="18288" bIns="18288" anchor="ctr">
+          <a:bodyPr wrap="square" lIns="36576" tIns="18288" rIns="36576" bIns="18288" anchor="ctr">
             <a:spAutoFit/>
           </a:bodyPr>
           <a:lstStyle/>
@@ -24820,6 +25134,7 @@
           <a:lstStyle/>
           <a:p>
             <a:pPr algn="ctr"/>
+            <a:endParaRPr/>
           </a:p>
         </p:txBody>
       </p:sp>
@@ -24866,6 +25181,7 @@
           <a:lstStyle/>
           <a:p>
             <a:pPr algn="ctr"/>
+            <a:endParaRPr/>
           </a:p>
         </p:txBody>
       </p:sp>
@@ -24886,7 +25202,7 @@
           <a:noFill/>
         </p:spPr>
         <p:txBody>
-          <a:bodyPr wrap="square" lIns="36576" rIns="36576" tIns="18288" bIns="18288" anchor="ctr">
+          <a:bodyPr wrap="square" lIns="36576" tIns="18288" rIns="36576" bIns="18288" anchor="ctr">
             <a:spAutoFit/>
           </a:bodyPr>
           <a:lstStyle/>
@@ -24921,7 +25237,7 @@
           <a:noFill/>
         </p:spPr>
         <p:txBody>
-          <a:bodyPr wrap="square" lIns="36576" rIns="36576" tIns="18288" bIns="18288" anchor="ctr">
+          <a:bodyPr wrap="square" lIns="36576" tIns="18288" rIns="36576" bIns="18288" anchor="ctr">
             <a:spAutoFit/>
           </a:bodyPr>
           <a:lstStyle/>
@@ -24980,6 +25296,7 @@
           <a:lstStyle/>
           <a:p>
             <a:pPr algn="ctr"/>
+            <a:endParaRPr/>
           </a:p>
         </p:txBody>
       </p:sp>
@@ -25026,6 +25343,7 @@
           <a:lstStyle/>
           <a:p>
             <a:pPr algn="ctr"/>
+            <a:endParaRPr/>
           </a:p>
         </p:txBody>
       </p:sp>
@@ -25046,7 +25364,7 @@
           <a:noFill/>
         </p:spPr>
         <p:txBody>
-          <a:bodyPr wrap="square" lIns="36576" rIns="36576" tIns="18288" bIns="18288" anchor="ctr">
+          <a:bodyPr wrap="square" lIns="36576" tIns="18288" rIns="36576" bIns="18288" anchor="ctr">
             <a:spAutoFit/>
           </a:bodyPr>
           <a:lstStyle/>
@@ -25081,7 +25399,7 @@
           <a:noFill/>
         </p:spPr>
         <p:txBody>
-          <a:bodyPr wrap="square" lIns="36576" rIns="36576" tIns="18288" bIns="18288" anchor="ctr">
+          <a:bodyPr wrap="square" lIns="36576" tIns="18288" rIns="36576" bIns="18288" anchor="ctr">
             <a:spAutoFit/>
           </a:bodyPr>
           <a:lstStyle/>
@@ -25140,6 +25458,7 @@
           <a:lstStyle/>
           <a:p>
             <a:pPr algn="ctr"/>
+            <a:endParaRPr/>
           </a:p>
         </p:txBody>
       </p:sp>
@@ -25186,6 +25505,7 @@
           <a:lstStyle/>
           <a:p>
             <a:pPr algn="ctr"/>
+            <a:endParaRPr/>
           </a:p>
         </p:txBody>
       </p:sp>
@@ -25206,7 +25526,7 @@
           <a:noFill/>
         </p:spPr>
         <p:txBody>
-          <a:bodyPr wrap="square" lIns="36576" rIns="36576" tIns="18288" bIns="18288" anchor="ctr">
+          <a:bodyPr wrap="square" lIns="36576" tIns="18288" rIns="36576" bIns="18288" anchor="ctr">
             <a:spAutoFit/>
           </a:bodyPr>
           <a:lstStyle/>
@@ -25241,7 +25561,7 @@
           <a:noFill/>
         </p:spPr>
         <p:txBody>
-          <a:bodyPr wrap="square" lIns="36576" rIns="36576" tIns="18288" bIns="18288" anchor="ctr">
+          <a:bodyPr wrap="square" lIns="36576" tIns="18288" rIns="36576" bIns="18288" anchor="ctr">
             <a:spAutoFit/>
           </a:bodyPr>
           <a:lstStyle/>
@@ -25271,7 +25591,7 @@
 </file>
 
 <file path=ppt/slides/slide25.xml><?xml version="1.0" encoding="utf-8"?>
-<p:sld xmlns:a="http://schemas.openxmlformats.org/drawingml/2006/main" xmlns:p="http://schemas.openxmlformats.org/presentationml/2006/main" xmlns:r="http://schemas.openxmlformats.org/officeDocument/2006/relationships">
+<p:sld xmlns:a="http://schemas.openxmlformats.org/drawingml/2006/main" xmlns:r="http://schemas.openxmlformats.org/officeDocument/2006/relationships" xmlns:p="http://schemas.openxmlformats.org/presentationml/2006/main">
   <p:cSld>
     <p:spTree>
       <p:nvGrpSpPr>
@@ -25279,7 +25599,14 @@
         <p:cNvGrpSpPr/>
         <p:nvPr/>
       </p:nvGrpSpPr>
-      <p:grpSpPr/>
+      <p:grpSpPr>
+        <a:xfrm>
+          <a:off x="0" y="0"/>
+          <a:ext cx="0" cy="0"/>
+          <a:chOff x="0" y="0"/>
+          <a:chExt cx="0" cy="0"/>
+        </a:xfrm>
+      </p:grpSpPr>
       <p:sp>
         <p:nvSpPr>
           <p:cNvPr id="2" name="Rectangle 1"/>
@@ -25321,6 +25648,7 @@
           <a:lstStyle/>
           <a:p>
             <a:pPr algn="ctr"/>
+            <a:endParaRPr/>
           </a:p>
         </p:txBody>
       </p:sp>
@@ -25365,6 +25693,7 @@
           <a:lstStyle/>
           <a:p>
             <a:pPr algn="ctr"/>
+            <a:endParaRPr/>
           </a:p>
         </p:txBody>
       </p:sp>
@@ -25409,6 +25738,7 @@
           <a:lstStyle/>
           <a:p>
             <a:pPr algn="ctr"/>
+            <a:endParaRPr/>
           </a:p>
         </p:txBody>
       </p:sp>
@@ -25429,7 +25759,7 @@
           <a:noFill/>
         </p:spPr>
         <p:txBody>
-          <a:bodyPr wrap="square" lIns="36576" rIns="36576" tIns="18288" bIns="18288" anchor="ctr">
+          <a:bodyPr wrap="square" lIns="36576" tIns="18288" rIns="36576" bIns="18288" anchor="ctr">
             <a:spAutoFit/>
           </a:bodyPr>
           <a:lstStyle/>
@@ -25464,7 +25794,7 @@
           <a:noFill/>
         </p:spPr>
         <p:txBody>
-          <a:bodyPr wrap="square" lIns="36576" rIns="36576" tIns="18288" bIns="18288" anchor="ctr">
+          <a:bodyPr wrap="square" lIns="36576" tIns="18288" rIns="36576" bIns="18288" anchor="ctr">
             <a:spAutoFit/>
           </a:bodyPr>
           <a:lstStyle/>
@@ -25499,7 +25829,7 @@
           <a:noFill/>
         </p:spPr>
         <p:txBody>
-          <a:bodyPr wrap="square" lIns="36576" rIns="36576" tIns="18288" bIns="18288" anchor="ctr">
+          <a:bodyPr wrap="square" lIns="36576" tIns="18288" rIns="36576" bIns="18288" anchor="ctr">
             <a:spAutoFit/>
           </a:bodyPr>
           <a:lstStyle/>
@@ -25534,7 +25864,7 @@
           <a:noFill/>
         </p:spPr>
         <p:txBody>
-          <a:bodyPr wrap="square" lIns="36576" rIns="36576" tIns="18288" bIns="18288" anchor="t">
+          <a:bodyPr wrap="square" lIns="36576" tIns="18288" rIns="36576" bIns="18288" anchor="t">
             <a:spAutoFit/>
           </a:bodyPr>
           <a:lstStyle/>
@@ -25593,6 +25923,7 @@
           <a:lstStyle/>
           <a:p>
             <a:pPr algn="ctr"/>
+            <a:endParaRPr/>
           </a:p>
         </p:txBody>
       </p:sp>
@@ -25613,7 +25944,7 @@
           <a:noFill/>
         </p:spPr>
         <p:txBody>
-          <a:bodyPr wrap="square" lIns="36576" rIns="36576" tIns="18288" bIns="18288" anchor="ctr">
+          <a:bodyPr wrap="square" lIns="36576" tIns="18288" rIns="36576" bIns="18288" anchor="ctr">
             <a:spAutoFit/>
           </a:bodyPr>
           <a:lstStyle/>
@@ -25648,7 +25979,7 @@
           <a:noFill/>
         </p:spPr>
         <p:txBody>
-          <a:bodyPr wrap="square" lIns="36576" rIns="36576" tIns="18288" bIns="18288" anchor="ctr">
+          <a:bodyPr wrap="square" lIns="36576" tIns="18288" rIns="36576" bIns="18288" anchor="ctr">
             <a:spAutoFit/>
           </a:bodyPr>
           <a:lstStyle/>
@@ -25709,6 +26040,7 @@
           <a:lstStyle/>
           <a:p>
             <a:pPr algn="ctr"/>
+            <a:endParaRPr/>
           </a:p>
         </p:txBody>
       </p:sp>
@@ -25753,6 +26085,7 @@
           <a:lstStyle/>
           <a:p>
             <a:pPr algn="ctr"/>
+            <a:endParaRPr/>
           </a:p>
         </p:txBody>
       </p:sp>
@@ -25773,7 +26106,7 @@
           <a:noFill/>
         </p:spPr>
         <p:txBody>
-          <a:bodyPr wrap="square" lIns="36576" rIns="36576" tIns="18288" bIns="18288" anchor="ctr">
+          <a:bodyPr wrap="square" lIns="36576" tIns="18288" rIns="36576" bIns="18288" anchor="ctr">
             <a:spAutoFit/>
           </a:bodyPr>
           <a:lstStyle/>
@@ -25808,7 +26141,7 @@
           <a:noFill/>
         </p:spPr>
         <p:txBody>
-          <a:bodyPr wrap="square" lIns="36576" rIns="36576" tIns="18288" bIns="18288" anchor="t">
+          <a:bodyPr wrap="square" lIns="36576" tIns="18288" rIns="36576" bIns="18288" anchor="t">
             <a:spAutoFit/>
           </a:bodyPr>
           <a:lstStyle/>
@@ -25873,6 +26206,7 @@
           <a:lstStyle/>
           <a:p>
             <a:pPr algn="ctr"/>
+            <a:endParaRPr/>
           </a:p>
         </p:txBody>
       </p:sp>
@@ -25917,6 +26251,7 @@
           <a:lstStyle/>
           <a:p>
             <a:pPr algn="ctr"/>
+            <a:endParaRPr/>
           </a:p>
         </p:txBody>
       </p:sp>
@@ -25937,7 +26272,7 @@
           <a:noFill/>
         </p:spPr>
         <p:txBody>
-          <a:bodyPr wrap="square" lIns="36576" rIns="36576" tIns="18288" bIns="18288" anchor="ctr">
+          <a:bodyPr wrap="square" lIns="36576" tIns="18288" rIns="36576" bIns="18288" anchor="ctr">
             <a:spAutoFit/>
           </a:bodyPr>
           <a:lstStyle/>
@@ -25972,7 +26307,7 @@
           <a:noFill/>
         </p:spPr>
         <p:txBody>
-          <a:bodyPr wrap="square" lIns="36576" rIns="36576" tIns="18288" bIns="18288" anchor="t">
+          <a:bodyPr wrap="square" lIns="36576" tIns="18288" rIns="36576" bIns="18288" anchor="t">
             <a:spAutoFit/>
           </a:bodyPr>
           <a:lstStyle/>
@@ -26037,6 +26372,7 @@
           <a:lstStyle/>
           <a:p>
             <a:pPr algn="ctr"/>
+            <a:endParaRPr/>
           </a:p>
         </p:txBody>
       </p:sp>
@@ -26081,6 +26417,7 @@
           <a:lstStyle/>
           <a:p>
             <a:pPr algn="ctr"/>
+            <a:endParaRPr/>
           </a:p>
         </p:txBody>
       </p:sp>
@@ -26101,7 +26438,7 @@
           <a:noFill/>
         </p:spPr>
         <p:txBody>
-          <a:bodyPr wrap="square" lIns="36576" rIns="36576" tIns="18288" bIns="18288" anchor="ctr">
+          <a:bodyPr wrap="square" lIns="36576" tIns="18288" rIns="36576" bIns="18288" anchor="ctr">
             <a:spAutoFit/>
           </a:bodyPr>
           <a:lstStyle/>
@@ -26136,7 +26473,7 @@
           <a:noFill/>
         </p:spPr>
         <p:txBody>
-          <a:bodyPr wrap="square" lIns="36576" rIns="36576" tIns="18288" bIns="18288" anchor="t">
+          <a:bodyPr wrap="square" lIns="36576" tIns="18288" rIns="36576" bIns="18288" anchor="t">
             <a:spAutoFit/>
           </a:bodyPr>
           <a:lstStyle/>
@@ -26201,6 +26538,7 @@
           <a:lstStyle/>
           <a:p>
             <a:pPr algn="ctr"/>
+            <a:endParaRPr/>
           </a:p>
         </p:txBody>
       </p:sp>
@@ -26245,6 +26583,7 @@
           <a:lstStyle/>
           <a:p>
             <a:pPr algn="ctr"/>
+            <a:endParaRPr/>
           </a:p>
         </p:txBody>
       </p:sp>
@@ -26265,7 +26604,7 @@
           <a:noFill/>
         </p:spPr>
         <p:txBody>
-          <a:bodyPr wrap="square" lIns="36576" rIns="36576" tIns="18288" bIns="18288" anchor="ctr">
+          <a:bodyPr wrap="square" lIns="36576" tIns="18288" rIns="36576" bIns="18288" anchor="ctr">
             <a:spAutoFit/>
           </a:bodyPr>
           <a:lstStyle/>
@@ -26300,7 +26639,7 @@
           <a:noFill/>
         </p:spPr>
         <p:txBody>
-          <a:bodyPr wrap="square" lIns="36576" rIns="36576" tIns="18288" bIns="18288" anchor="t">
+          <a:bodyPr wrap="square" lIns="36576" tIns="18288" rIns="36576" bIns="18288" anchor="t">
             <a:spAutoFit/>
           </a:bodyPr>
           <a:lstStyle/>
@@ -26365,6 +26704,7 @@
           <a:lstStyle/>
           <a:p>
             <a:pPr algn="ctr"/>
+            <a:endParaRPr/>
           </a:p>
         </p:txBody>
       </p:sp>
@@ -26385,7 +26725,7 @@
           <a:noFill/>
         </p:spPr>
         <p:txBody>
-          <a:bodyPr wrap="square" lIns="36576" rIns="36576" tIns="18288" bIns="18288" anchor="t">
+          <a:bodyPr wrap="square" lIns="36576" tIns="18288" rIns="36576" bIns="18288" anchor="t">
             <a:spAutoFit/>
           </a:bodyPr>
           <a:lstStyle/>
@@ -26420,7 +26760,7 @@
           <a:noFill/>
         </p:spPr>
         <p:txBody>
-          <a:bodyPr wrap="square" lIns="36576" rIns="36576" tIns="18288" bIns="18288" anchor="t">
+          <a:bodyPr wrap="square" lIns="36576" tIns="18288" rIns="36576" bIns="18288" anchor="t">
             <a:spAutoFit/>
           </a:bodyPr>
           <a:lstStyle/>
@@ -26433,43 +26773,7 @@
                 </a:solidFill>
                 <a:latin typeface="Calibri"/>
               </a:rPr>
-              <a:t>ML Engineer at $194K  ·  </a:t>
-            </a:r>
-            <a:r>
-              <a:rPr sz="1100" b="1" i="0">
-                <a:solidFill>
-                  <a:srgbClr val="1B4332"/>
-                </a:solidFill>
-                <a:latin typeface="Calibri"/>
-              </a:rPr>
-              <a:t>1.91× from Entry to Exec  ·  </a:t>
-            </a:r>
-            <a:r>
-              <a:rPr sz="1100" b="1" i="0">
-                <a:solidFill>
-                  <a:srgbClr val="1B4332"/>
-                </a:solidFill>
-                <a:latin typeface="Calibri"/>
-              </a:rPr>
-              <a:t>Remote 53% → 20%  ·  </a:t>
-            </a:r>
-            <a:r>
-              <a:rPr sz="1100" b="1" i="0">
-                <a:solidFill>
-                  <a:srgbClr val="1B4332"/>
-                </a:solidFill>
-                <a:latin typeface="Calibri"/>
-              </a:rPr>
-              <a:t>US 90% of submissions  ·  </a:t>
-            </a:r>
-            <a:r>
-              <a:rPr sz="1100" b="1" i="0">
-                <a:solidFill>
-                  <a:srgbClr val="1B4332"/>
-                </a:solidFill>
-                <a:latin typeface="Calibri"/>
-              </a:rPr>
-              <a:t>55% in $100–$200K band</a:t>
+              <a:t>ML Engineer at $194K  ·  1.91× from Entry to Exec  ·  Remote 53% → 20%  ·  US 90% of submissions  ·  55% in $100–$200K band</a:t>
             </a:r>
           </a:p>
         </p:txBody>
@@ -26486,7 +26790,7 @@
 </file>
 
 <file path=ppt/slides/slide26.xml><?xml version="1.0" encoding="utf-8"?>
-<p:sld xmlns:a="http://schemas.openxmlformats.org/drawingml/2006/main" xmlns:p="http://schemas.openxmlformats.org/presentationml/2006/main" xmlns:r="http://schemas.openxmlformats.org/officeDocument/2006/relationships">
+<p:sld xmlns:a="http://schemas.openxmlformats.org/drawingml/2006/main" xmlns:r="http://schemas.openxmlformats.org/officeDocument/2006/relationships" xmlns:p="http://schemas.openxmlformats.org/presentationml/2006/main">
   <p:cSld>
     <p:spTree>
       <p:nvGrpSpPr>
@@ -26494,7 +26798,14 @@
         <p:cNvGrpSpPr/>
         <p:nvPr/>
       </p:nvGrpSpPr>
-      <p:grpSpPr/>
+      <p:grpSpPr>
+        <a:xfrm>
+          <a:off x="0" y="0"/>
+          <a:ext cx="0" cy="0"/>
+          <a:chOff x="0" y="0"/>
+          <a:chExt cx="0" cy="0"/>
+        </a:xfrm>
+      </p:grpSpPr>
       <p:sp>
         <p:nvSpPr>
           <p:cNvPr id="2" name="Rectangle 1"/>
@@ -26536,6 +26847,7 @@
           <a:lstStyle/>
           <a:p>
             <a:pPr algn="ctr"/>
+            <a:endParaRPr/>
           </a:p>
         </p:txBody>
       </p:sp>
@@ -26580,6 +26892,7 @@
           <a:lstStyle/>
           <a:p>
             <a:pPr algn="ctr"/>
+            <a:endParaRPr/>
           </a:p>
         </p:txBody>
       </p:sp>
@@ -26624,6 +26937,7 @@
           <a:lstStyle/>
           <a:p>
             <a:pPr algn="ctr"/>
+            <a:endParaRPr/>
           </a:p>
         </p:txBody>
       </p:sp>
@@ -26668,6 +26982,7 @@
           <a:lstStyle/>
           <a:p>
             <a:pPr algn="ctr"/>
+            <a:endParaRPr/>
           </a:p>
         </p:txBody>
       </p:sp>
@@ -26712,6 +27027,7 @@
           <a:lstStyle/>
           <a:p>
             <a:pPr algn="ctr"/>
+            <a:endParaRPr/>
           </a:p>
         </p:txBody>
       </p:sp>
@@ -26732,7 +27048,7 @@
           <a:noFill/>
         </p:spPr>
         <p:txBody>
-          <a:bodyPr wrap="square" lIns="36576" rIns="36576" tIns="18288" bIns="18288" anchor="t">
+          <a:bodyPr wrap="square" lIns="36576" tIns="18288" rIns="36576" bIns="18288" anchor="t">
             <a:spAutoFit/>
           </a:bodyPr>
           <a:lstStyle/>
@@ -26767,7 +27083,7 @@
           <a:noFill/>
         </p:spPr>
         <p:txBody>
-          <a:bodyPr wrap="square" lIns="36576" rIns="36576" tIns="18288" bIns="18288" anchor="t">
+          <a:bodyPr wrap="square" lIns="36576" tIns="18288" rIns="36576" bIns="18288" anchor="t">
             <a:spAutoFit/>
           </a:bodyPr>
           <a:lstStyle/>
@@ -26802,7 +27118,7 @@
           <a:noFill/>
         </p:spPr>
         <p:txBody>
-          <a:bodyPr wrap="square" lIns="36576" rIns="36576" tIns="18288" bIns="18288" anchor="t">
+          <a:bodyPr wrap="square" lIns="36576" tIns="18288" rIns="36576" bIns="18288" anchor="t">
             <a:spAutoFit/>
           </a:bodyPr>
           <a:lstStyle/>
@@ -26837,7 +27153,7 @@
           <a:noFill/>
         </p:spPr>
         <p:txBody>
-          <a:bodyPr wrap="square" lIns="36576" rIns="36576" tIns="18288" bIns="18288" anchor="t">
+          <a:bodyPr wrap="square" lIns="36576" tIns="18288" rIns="36576" bIns="18288" anchor="t">
             <a:spAutoFit/>
           </a:bodyPr>
           <a:lstStyle/>
@@ -26872,7 +27188,7 @@
           <a:noFill/>
         </p:spPr>
         <p:txBody>
-          <a:bodyPr wrap="square" lIns="36576" rIns="36576" tIns="18288" bIns="18288" anchor="t">
+          <a:bodyPr wrap="square" lIns="36576" tIns="18288" rIns="36576" bIns="18288" anchor="t">
             <a:spAutoFit/>
           </a:bodyPr>
           <a:lstStyle/>
@@ -26907,7 +27223,7 @@
           <a:noFill/>
         </p:spPr>
         <p:txBody>
-          <a:bodyPr wrap="square" lIns="36576" rIns="36576" tIns="18288" bIns="18288" anchor="t">
+          <a:bodyPr wrap="square" lIns="36576" tIns="18288" rIns="36576" bIns="18288" anchor="t">
             <a:spAutoFit/>
           </a:bodyPr>
           <a:lstStyle/>
@@ -26937,7 +27253,7 @@
 </file>
 
 <file path=ppt/slides/slide3.xml><?xml version="1.0" encoding="utf-8"?>
-<p:sld xmlns:a="http://schemas.openxmlformats.org/drawingml/2006/main" xmlns:p="http://schemas.openxmlformats.org/presentationml/2006/main" xmlns:r="http://schemas.openxmlformats.org/officeDocument/2006/relationships">
+<p:sld xmlns:a="http://schemas.openxmlformats.org/drawingml/2006/main" xmlns:r="http://schemas.openxmlformats.org/officeDocument/2006/relationships" xmlns:p="http://schemas.openxmlformats.org/presentationml/2006/main">
   <p:cSld>
     <p:spTree>
       <p:nvGrpSpPr>
@@ -26945,7 +27261,14 @@
         <p:cNvGrpSpPr/>
         <p:nvPr/>
       </p:nvGrpSpPr>
-      <p:grpSpPr/>
+      <p:grpSpPr>
+        <a:xfrm>
+          <a:off x="0" y="0"/>
+          <a:ext cx="0" cy="0"/>
+          <a:chOff x="0" y="0"/>
+          <a:chExt cx="0" cy="0"/>
+        </a:xfrm>
+      </p:grpSpPr>
       <p:sp>
         <p:nvSpPr>
           <p:cNvPr id="2" name="Rectangle 1"/>
@@ -26987,6 +27310,7 @@
           <a:lstStyle/>
           <a:p>
             <a:pPr algn="ctr"/>
+            <a:endParaRPr/>
           </a:p>
         </p:txBody>
       </p:sp>
@@ -27031,6 +27355,7 @@
           <a:lstStyle/>
           <a:p>
             <a:pPr algn="ctr"/>
+            <a:endParaRPr/>
           </a:p>
         </p:txBody>
       </p:sp>
@@ -27075,6 +27400,7 @@
           <a:lstStyle/>
           <a:p>
             <a:pPr algn="ctr"/>
+            <a:endParaRPr/>
           </a:p>
         </p:txBody>
       </p:sp>
@@ -27095,7 +27421,7 @@
           <a:noFill/>
         </p:spPr>
         <p:txBody>
-          <a:bodyPr wrap="square" lIns="36576" rIns="36576" tIns="18288" bIns="18288" anchor="ctr">
+          <a:bodyPr wrap="square" lIns="36576" tIns="18288" rIns="36576" bIns="18288" anchor="ctr">
             <a:spAutoFit/>
           </a:bodyPr>
           <a:lstStyle/>
@@ -27130,7 +27456,7 @@
           <a:noFill/>
         </p:spPr>
         <p:txBody>
-          <a:bodyPr wrap="square" lIns="36576" rIns="36576" tIns="18288" bIns="18288" anchor="ctr">
+          <a:bodyPr wrap="square" lIns="36576" tIns="18288" rIns="36576" bIns="18288" anchor="ctr">
             <a:spAutoFit/>
           </a:bodyPr>
           <a:lstStyle/>
@@ -27165,7 +27491,7 @@
           <a:noFill/>
         </p:spPr>
         <p:txBody>
-          <a:bodyPr wrap="square" lIns="36576" rIns="36576" tIns="18288" bIns="18288" anchor="ctr">
+          <a:bodyPr wrap="square" lIns="36576" tIns="18288" rIns="36576" bIns="18288" anchor="ctr">
             <a:spAutoFit/>
           </a:bodyPr>
           <a:lstStyle/>
@@ -27200,7 +27526,7 @@
           <a:noFill/>
         </p:spPr>
         <p:txBody>
-          <a:bodyPr wrap="square" lIns="36576" rIns="36576" tIns="18288" bIns="18288" anchor="t">
+          <a:bodyPr wrap="square" lIns="36576" tIns="18288" rIns="36576" bIns="18288" anchor="t">
             <a:spAutoFit/>
           </a:bodyPr>
           <a:lstStyle/>
@@ -27259,6 +27585,7 @@
           <a:lstStyle/>
           <a:p>
             <a:pPr algn="ctr"/>
+            <a:endParaRPr/>
           </a:p>
         </p:txBody>
       </p:sp>
@@ -27279,7 +27606,7 @@
           <a:noFill/>
         </p:spPr>
         <p:txBody>
-          <a:bodyPr wrap="square" lIns="36576" rIns="36576" tIns="18288" bIns="18288" anchor="ctr">
+          <a:bodyPr wrap="square" lIns="36576" tIns="18288" rIns="36576" bIns="18288" anchor="ctr">
             <a:spAutoFit/>
           </a:bodyPr>
           <a:lstStyle/>
@@ -27314,7 +27641,7 @@
           <a:noFill/>
         </p:spPr>
         <p:txBody>
-          <a:bodyPr wrap="square" lIns="36576" rIns="36576" tIns="18288" bIns="18288" anchor="ctr">
+          <a:bodyPr wrap="square" lIns="36576" tIns="18288" rIns="36576" bIns="18288" anchor="ctr">
             <a:spAutoFit/>
           </a:bodyPr>
           <a:lstStyle/>
@@ -27375,6 +27702,7 @@
           <a:lstStyle/>
           <a:p>
             <a:pPr algn="ctr"/>
+            <a:endParaRPr/>
           </a:p>
         </p:txBody>
       </p:sp>
@@ -27419,6 +27747,7 @@
           <a:lstStyle/>
           <a:p>
             <a:pPr algn="ctr"/>
+            <a:endParaRPr/>
           </a:p>
         </p:txBody>
       </p:sp>
@@ -27463,6 +27792,7 @@
           <a:lstStyle/>
           <a:p>
             <a:pPr algn="ctr"/>
+            <a:endParaRPr/>
           </a:p>
         </p:txBody>
       </p:sp>
@@ -27483,7 +27813,7 @@
           <a:noFill/>
         </p:spPr>
         <p:txBody>
-          <a:bodyPr wrap="square" lIns="36576" rIns="36576" tIns="18288" bIns="18288" anchor="ctr">
+          <a:bodyPr wrap="square" lIns="36576" tIns="18288" rIns="36576" bIns="18288" anchor="ctr">
             <a:spAutoFit/>
           </a:bodyPr>
           <a:lstStyle/>
@@ -27518,7 +27848,7 @@
           <a:noFill/>
         </p:spPr>
         <p:txBody>
-          <a:bodyPr wrap="square" lIns="36576" rIns="36576" tIns="18288" bIns="18288" anchor="t">
+          <a:bodyPr wrap="square" lIns="36576" tIns="18288" rIns="36576" bIns="18288" anchor="t">
             <a:spAutoFit/>
           </a:bodyPr>
           <a:lstStyle/>
@@ -27553,7 +27883,7 @@
           <a:noFill/>
         </p:spPr>
         <p:txBody>
-          <a:bodyPr wrap="square" lIns="36576" rIns="36576" tIns="18288" bIns="18288" anchor="t">
+          <a:bodyPr wrap="square" lIns="36576" tIns="18288" rIns="36576" bIns="18288" anchor="t">
             <a:spAutoFit/>
           </a:bodyPr>
           <a:lstStyle/>
@@ -27588,7 +27918,7 @@
           <a:noFill/>
         </p:spPr>
         <p:txBody>
-          <a:bodyPr wrap="square" lIns="36576" rIns="36576" tIns="18288" bIns="18288" anchor="t">
+          <a:bodyPr wrap="square" lIns="36576" tIns="18288" rIns="36576" bIns="18288" anchor="t">
             <a:spAutoFit/>
           </a:bodyPr>
           <a:lstStyle/>
@@ -27647,6 +27977,7 @@
           <a:lstStyle/>
           <a:p>
             <a:pPr algn="ctr"/>
+            <a:endParaRPr/>
           </a:p>
         </p:txBody>
       </p:sp>
@@ -27667,7 +27998,7 @@
           <a:noFill/>
         </p:spPr>
         <p:txBody>
-          <a:bodyPr wrap="square" lIns="36576" rIns="36576" tIns="18288" bIns="18288" anchor="t">
+          <a:bodyPr wrap="square" lIns="36576" tIns="18288" rIns="36576" bIns="18288" anchor="t">
             <a:spAutoFit/>
           </a:bodyPr>
           <a:lstStyle/>
@@ -27800,6 +28131,7 @@
           <a:lstStyle/>
           <a:p>
             <a:pPr algn="ctr"/>
+            <a:endParaRPr/>
           </a:p>
         </p:txBody>
       </p:sp>
@@ -27844,6 +28176,7 @@
           <a:lstStyle/>
           <a:p>
             <a:pPr algn="ctr"/>
+            <a:endParaRPr/>
           </a:p>
         </p:txBody>
       </p:sp>
@@ -27888,6 +28221,7 @@
           <a:lstStyle/>
           <a:p>
             <a:pPr algn="ctr"/>
+            <a:endParaRPr/>
           </a:p>
         </p:txBody>
       </p:sp>
@@ -27908,7 +28242,7 @@
           <a:noFill/>
         </p:spPr>
         <p:txBody>
-          <a:bodyPr wrap="square" lIns="36576" rIns="36576" tIns="18288" bIns="18288" anchor="ctr">
+          <a:bodyPr wrap="square" lIns="36576" tIns="18288" rIns="36576" bIns="18288" anchor="ctr">
             <a:spAutoFit/>
           </a:bodyPr>
           <a:lstStyle/>
@@ -27943,7 +28277,7 @@
           <a:noFill/>
         </p:spPr>
         <p:txBody>
-          <a:bodyPr wrap="square" lIns="36576" rIns="36576" tIns="18288" bIns="18288" anchor="t">
+          <a:bodyPr wrap="square" lIns="36576" tIns="18288" rIns="36576" bIns="18288" anchor="t">
             <a:spAutoFit/>
           </a:bodyPr>
           <a:lstStyle/>
@@ -27978,7 +28312,7 @@
           <a:noFill/>
         </p:spPr>
         <p:txBody>
-          <a:bodyPr wrap="square" lIns="36576" rIns="36576" tIns="18288" bIns="18288" anchor="t">
+          <a:bodyPr wrap="square" lIns="36576" tIns="18288" rIns="36576" bIns="18288" anchor="t">
             <a:spAutoFit/>
           </a:bodyPr>
           <a:lstStyle/>
@@ -28013,7 +28347,7 @@
           <a:noFill/>
         </p:spPr>
         <p:txBody>
-          <a:bodyPr wrap="square" lIns="36576" rIns="36576" tIns="18288" bIns="18288" anchor="t">
+          <a:bodyPr wrap="square" lIns="36576" tIns="18288" rIns="36576" bIns="18288" anchor="t">
             <a:spAutoFit/>
           </a:bodyPr>
           <a:lstStyle/>
@@ -28072,6 +28406,7 @@
           <a:lstStyle/>
           <a:p>
             <a:pPr algn="ctr"/>
+            <a:endParaRPr/>
           </a:p>
         </p:txBody>
       </p:sp>
@@ -28092,7 +28427,7 @@
           <a:noFill/>
         </p:spPr>
         <p:txBody>
-          <a:bodyPr wrap="square" lIns="36576" rIns="36576" tIns="18288" bIns="18288" anchor="t">
+          <a:bodyPr wrap="square" lIns="36576" tIns="18288" rIns="36576" bIns="18288" anchor="t">
             <a:spAutoFit/>
           </a:bodyPr>
           <a:lstStyle/>
@@ -28225,6 +28560,7 @@
           <a:lstStyle/>
           <a:p>
             <a:pPr algn="ctr"/>
+            <a:endParaRPr/>
           </a:p>
         </p:txBody>
       </p:sp>
@@ -28269,6 +28605,7 @@
           <a:lstStyle/>
           <a:p>
             <a:pPr algn="ctr"/>
+            <a:endParaRPr/>
           </a:p>
         </p:txBody>
       </p:sp>
@@ -28313,6 +28650,7 @@
           <a:lstStyle/>
           <a:p>
             <a:pPr algn="ctr"/>
+            <a:endParaRPr/>
           </a:p>
         </p:txBody>
       </p:sp>
@@ -28333,7 +28671,7 @@
           <a:noFill/>
         </p:spPr>
         <p:txBody>
-          <a:bodyPr wrap="square" lIns="36576" rIns="36576" tIns="18288" bIns="18288" anchor="ctr">
+          <a:bodyPr wrap="square" lIns="36576" tIns="18288" rIns="36576" bIns="18288" anchor="ctr">
             <a:spAutoFit/>
           </a:bodyPr>
           <a:lstStyle/>
@@ -28368,7 +28706,7 @@
           <a:noFill/>
         </p:spPr>
         <p:txBody>
-          <a:bodyPr wrap="square" lIns="36576" rIns="36576" tIns="18288" bIns="18288" anchor="t">
+          <a:bodyPr wrap="square" lIns="36576" tIns="18288" rIns="36576" bIns="18288" anchor="t">
             <a:spAutoFit/>
           </a:bodyPr>
           <a:lstStyle/>
@@ -28395,15 +28733,15 @@
         <p:spPr>
           <a:xfrm>
             <a:off x="8183880" y="3337560"/>
-            <a:ext cx="3703320" cy="274320"/>
-          </a:xfrm>
-          <a:prstGeom prst="rect">
-            <a:avLst/>
-          </a:prstGeom>
-          <a:noFill/>
-        </p:spPr>
-        <p:txBody>
-          <a:bodyPr wrap="square" lIns="36576" rIns="36576" tIns="18288" bIns="18288" anchor="t">
+            <a:ext cx="3703320" cy="206210"/>
+          </a:xfrm>
+          <a:prstGeom prst="rect">
+            <a:avLst/>
+          </a:prstGeom>
+          <a:noFill/>
+        </p:spPr>
+        <p:txBody>
+          <a:bodyPr wrap="square" lIns="36576" tIns="18288" rIns="36576" bIns="18288" anchor="t">
             <a:spAutoFit/>
           </a:bodyPr>
           <a:lstStyle/>
@@ -28416,8 +28754,23 @@
                 </a:solidFill>
                 <a:latin typeface="Calibri"/>
               </a:rPr>
-              <a:t>21i-0624</a:t>
-            </a:r>
+              <a:t>21i-062</a:t>
+            </a:r>
+            <a:r>
+              <a:rPr lang="en-US" sz="1100" b="0" i="0">
+                <a:solidFill>
+                  <a:srgbClr val="555555"/>
+                </a:solidFill>
+                <a:latin typeface="Calibri"/>
+              </a:rPr>
+              <a:t>3</a:t>
+            </a:r>
+            <a:endParaRPr sz="1100" b="0" i="0">
+              <a:solidFill>
+                <a:srgbClr val="555555"/>
+              </a:solidFill>
+              <a:latin typeface="Calibri"/>
+            </a:endParaRPr>
           </a:p>
         </p:txBody>
       </p:sp>
@@ -28438,7 +28791,7 @@
           <a:noFill/>
         </p:spPr>
         <p:txBody>
-          <a:bodyPr wrap="square" lIns="36576" rIns="36576" tIns="18288" bIns="18288" anchor="t">
+          <a:bodyPr wrap="square" lIns="36576" tIns="18288" rIns="36576" bIns="18288" anchor="t">
             <a:spAutoFit/>
           </a:bodyPr>
           <a:lstStyle/>
@@ -28497,6 +28850,7 @@
           <a:lstStyle/>
           <a:p>
             <a:pPr algn="ctr"/>
+            <a:endParaRPr/>
           </a:p>
         </p:txBody>
       </p:sp>
@@ -28517,7 +28871,7 @@
           <a:noFill/>
         </p:spPr>
         <p:txBody>
-          <a:bodyPr wrap="square" lIns="36576" rIns="36576" tIns="18288" bIns="18288" anchor="t">
+          <a:bodyPr wrap="square" lIns="36576" tIns="18288" rIns="36576" bIns="18288" anchor="t">
             <a:spAutoFit/>
           </a:bodyPr>
           <a:lstStyle/>
@@ -28619,7 +28973,7 @@
 </file>
 
 <file path=ppt/slides/slide4.xml><?xml version="1.0" encoding="utf-8"?>
-<p:sld xmlns:a="http://schemas.openxmlformats.org/drawingml/2006/main" xmlns:p="http://schemas.openxmlformats.org/presentationml/2006/main" xmlns:r="http://schemas.openxmlformats.org/officeDocument/2006/relationships">
+<p:sld xmlns:a="http://schemas.openxmlformats.org/drawingml/2006/main" xmlns:r="http://schemas.openxmlformats.org/officeDocument/2006/relationships" xmlns:p="http://schemas.openxmlformats.org/presentationml/2006/main">
   <p:cSld>
     <p:spTree>
       <p:nvGrpSpPr>
@@ -28627,7 +28981,14 @@
         <p:cNvGrpSpPr/>
         <p:nvPr/>
       </p:nvGrpSpPr>
-      <p:grpSpPr/>
+      <p:grpSpPr>
+        <a:xfrm>
+          <a:off x="0" y="0"/>
+          <a:ext cx="0" cy="0"/>
+          <a:chOff x="0" y="0"/>
+          <a:chExt cx="0" cy="0"/>
+        </a:xfrm>
+      </p:grpSpPr>
       <p:sp>
         <p:nvSpPr>
           <p:cNvPr id="2" name="Rectangle 1"/>
@@ -28669,6 +29030,7 @@
           <a:lstStyle/>
           <a:p>
             <a:pPr algn="ctr"/>
+            <a:endParaRPr/>
           </a:p>
         </p:txBody>
       </p:sp>
@@ -28713,6 +29075,7 @@
           <a:lstStyle/>
           <a:p>
             <a:pPr algn="ctr"/>
+            <a:endParaRPr/>
           </a:p>
         </p:txBody>
       </p:sp>
@@ -28757,6 +29120,7 @@
           <a:lstStyle/>
           <a:p>
             <a:pPr algn="ctr"/>
+            <a:endParaRPr/>
           </a:p>
         </p:txBody>
       </p:sp>
@@ -28777,7 +29141,7 @@
           <a:noFill/>
         </p:spPr>
         <p:txBody>
-          <a:bodyPr wrap="square" lIns="36576" rIns="36576" tIns="18288" bIns="18288" anchor="ctr">
+          <a:bodyPr wrap="square" lIns="36576" tIns="18288" rIns="36576" bIns="18288" anchor="ctr">
             <a:spAutoFit/>
           </a:bodyPr>
           <a:lstStyle/>
@@ -28812,7 +29176,7 @@
           <a:noFill/>
         </p:spPr>
         <p:txBody>
-          <a:bodyPr wrap="square" lIns="36576" rIns="36576" tIns="18288" bIns="18288" anchor="ctr">
+          <a:bodyPr wrap="square" lIns="36576" tIns="18288" rIns="36576" bIns="18288" anchor="ctr">
             <a:spAutoFit/>
           </a:bodyPr>
           <a:lstStyle/>
@@ -28847,7 +29211,7 @@
           <a:noFill/>
         </p:spPr>
         <p:txBody>
-          <a:bodyPr wrap="square" lIns="36576" rIns="36576" tIns="18288" bIns="18288" anchor="ctr">
+          <a:bodyPr wrap="square" lIns="36576" tIns="18288" rIns="36576" bIns="18288" anchor="ctr">
             <a:spAutoFit/>
           </a:bodyPr>
           <a:lstStyle/>
@@ -28882,7 +29246,7 @@
           <a:noFill/>
         </p:spPr>
         <p:txBody>
-          <a:bodyPr wrap="square" lIns="36576" rIns="36576" tIns="18288" bIns="18288" anchor="t">
+          <a:bodyPr wrap="square" lIns="36576" tIns="18288" rIns="36576" bIns="18288" anchor="t">
             <a:spAutoFit/>
           </a:bodyPr>
           <a:lstStyle/>
@@ -28941,6 +29305,7 @@
           <a:lstStyle/>
           <a:p>
             <a:pPr algn="ctr"/>
+            <a:endParaRPr/>
           </a:p>
         </p:txBody>
       </p:sp>
@@ -28961,7 +29326,7 @@
           <a:noFill/>
         </p:spPr>
         <p:txBody>
-          <a:bodyPr wrap="square" lIns="36576" rIns="36576" tIns="18288" bIns="18288" anchor="ctr">
+          <a:bodyPr wrap="square" lIns="36576" tIns="18288" rIns="36576" bIns="18288" anchor="ctr">
             <a:spAutoFit/>
           </a:bodyPr>
           <a:lstStyle/>
@@ -28996,7 +29361,7 @@
           <a:noFill/>
         </p:spPr>
         <p:txBody>
-          <a:bodyPr wrap="square" lIns="36576" rIns="36576" tIns="18288" bIns="18288" anchor="ctr">
+          <a:bodyPr wrap="square" lIns="36576" tIns="18288" rIns="36576" bIns="18288" anchor="ctr">
             <a:spAutoFit/>
           </a:bodyPr>
           <a:lstStyle/>
@@ -29031,7 +29396,7 @@
           <a:noFill/>
         </p:spPr>
         <p:txBody>
-          <a:bodyPr wrap="square" lIns="36576" rIns="36576" tIns="18288" bIns="18288" anchor="t">
+          <a:bodyPr wrap="square" lIns="36576" tIns="18288" rIns="36576" bIns="18288" anchor="t">
             <a:spAutoFit/>
           </a:bodyPr>
           <a:lstStyle/>
@@ -29066,7 +29431,7 @@
           <a:noFill/>
         </p:spPr>
         <p:txBody>
-          <a:bodyPr wrap="square" lIns="36576" rIns="36576" tIns="18288" bIns="18288" anchor="t">
+          <a:bodyPr wrap="square" lIns="36576" tIns="18288" rIns="36576" bIns="18288" anchor="t">
             <a:spAutoFit/>
           </a:bodyPr>
           <a:lstStyle/>
@@ -29105,7 +29470,7 @@
           <a:noFill/>
         </p:spPr>
         <p:txBody>
-          <a:bodyPr wrap="square" lIns="36576" rIns="36576" tIns="18288" bIns="18288" anchor="t">
+          <a:bodyPr wrap="square" lIns="36576" tIns="18288" rIns="36576" bIns="18288" anchor="t">
             <a:spAutoFit/>
           </a:bodyPr>
           <a:lstStyle/>
@@ -29140,7 +29505,7 @@
           <a:noFill/>
         </p:spPr>
         <p:txBody>
-          <a:bodyPr wrap="square" lIns="36576" rIns="36576" tIns="18288" bIns="18288" anchor="t">
+          <a:bodyPr wrap="square" lIns="36576" tIns="18288" rIns="36576" bIns="18288" anchor="t">
             <a:spAutoFit/>
           </a:bodyPr>
           <a:lstStyle/>
@@ -29193,7 +29558,7 @@
           <a:noFill/>
         </p:spPr>
         <p:txBody>
-          <a:bodyPr wrap="square" lIns="36576" rIns="36576" tIns="18288" bIns="18288" anchor="t">
+          <a:bodyPr wrap="square" lIns="36576" tIns="18288" rIns="36576" bIns="18288" anchor="t">
             <a:spAutoFit/>
           </a:bodyPr>
           <a:lstStyle/>
@@ -29246,7 +29611,7 @@
           <a:noFill/>
         </p:spPr>
         <p:txBody>
-          <a:bodyPr wrap="square" lIns="36576" rIns="36576" tIns="18288" bIns="18288" anchor="t">
+          <a:bodyPr wrap="square" lIns="36576" tIns="18288" rIns="36576" bIns="18288" anchor="t">
             <a:spAutoFit/>
           </a:bodyPr>
           <a:lstStyle/>
@@ -29299,7 +29664,7 @@
           <a:noFill/>
         </p:spPr>
         <p:txBody>
-          <a:bodyPr wrap="square" lIns="36576" rIns="36576" tIns="18288" bIns="18288" anchor="t">
+          <a:bodyPr wrap="square" lIns="36576" tIns="18288" rIns="36576" bIns="18288" anchor="t">
             <a:spAutoFit/>
           </a:bodyPr>
           <a:lstStyle/>
@@ -29378,6 +29743,7 @@
           <a:lstStyle/>
           <a:p>
             <a:pPr algn="ctr"/>
+            <a:endParaRPr/>
           </a:p>
         </p:txBody>
       </p:sp>
@@ -29398,7 +29764,7 @@
           <a:noFill/>
         </p:spPr>
         <p:txBody>
-          <a:bodyPr wrap="square" lIns="36576" rIns="36576" tIns="18288" bIns="18288" anchor="ctr">
+          <a:bodyPr wrap="square" lIns="36576" tIns="18288" rIns="36576" bIns="18288" anchor="ctr">
             <a:spAutoFit/>
           </a:bodyPr>
           <a:lstStyle/>
@@ -29433,7 +29799,7 @@
           <a:noFill/>
         </p:spPr>
         <p:txBody>
-          <a:bodyPr wrap="square" lIns="36576" rIns="36576" tIns="18288" bIns="18288" anchor="ctr">
+          <a:bodyPr wrap="square" lIns="36576" tIns="18288" rIns="36576" bIns="18288" anchor="ctr">
             <a:spAutoFit/>
           </a:bodyPr>
           <a:lstStyle/>
@@ -29494,6 +29860,7 @@
           <a:lstStyle/>
           <a:p>
             <a:pPr algn="ctr"/>
+            <a:endParaRPr/>
           </a:p>
         </p:txBody>
       </p:sp>
@@ -29514,7 +29881,7 @@
           <a:noFill/>
         </p:spPr>
         <p:txBody>
-          <a:bodyPr wrap="square" lIns="36576" rIns="36576" tIns="18288" bIns="18288" anchor="ctr">
+          <a:bodyPr wrap="square" lIns="36576" tIns="18288" rIns="36576" bIns="18288" anchor="ctr">
             <a:spAutoFit/>
           </a:bodyPr>
           <a:lstStyle/>
@@ -29549,7 +29916,7 @@
           <a:noFill/>
         </p:spPr>
         <p:txBody>
-          <a:bodyPr wrap="square" lIns="36576" rIns="36576" tIns="18288" bIns="18288" anchor="ctr">
+          <a:bodyPr wrap="square" lIns="36576" tIns="18288" rIns="36576" bIns="18288" anchor="ctr">
             <a:spAutoFit/>
           </a:bodyPr>
           <a:lstStyle/>
@@ -29610,6 +29977,7 @@
           <a:lstStyle/>
           <a:p>
             <a:pPr algn="ctr"/>
+            <a:endParaRPr/>
           </a:p>
         </p:txBody>
       </p:sp>
@@ -29630,7 +29998,7 @@
           <a:noFill/>
         </p:spPr>
         <p:txBody>
-          <a:bodyPr wrap="square" lIns="36576" rIns="36576" tIns="18288" bIns="18288" anchor="ctr">
+          <a:bodyPr wrap="square" lIns="36576" tIns="18288" rIns="36576" bIns="18288" anchor="ctr">
             <a:spAutoFit/>
           </a:bodyPr>
           <a:lstStyle/>
@@ -29665,7 +30033,7 @@
           <a:noFill/>
         </p:spPr>
         <p:txBody>
-          <a:bodyPr wrap="square" lIns="36576" rIns="36576" tIns="18288" bIns="18288" anchor="ctr">
+          <a:bodyPr wrap="square" lIns="36576" tIns="18288" rIns="36576" bIns="18288" anchor="ctr">
             <a:spAutoFit/>
           </a:bodyPr>
           <a:lstStyle/>
@@ -29726,6 +30094,7 @@
           <a:lstStyle/>
           <a:p>
             <a:pPr algn="ctr"/>
+            <a:endParaRPr/>
           </a:p>
         </p:txBody>
       </p:sp>
@@ -29746,7 +30115,7 @@
           <a:noFill/>
         </p:spPr>
         <p:txBody>
-          <a:bodyPr wrap="square" lIns="36576" rIns="36576" tIns="18288" bIns="18288" anchor="ctr">
+          <a:bodyPr wrap="square" lIns="36576" tIns="18288" rIns="36576" bIns="18288" anchor="ctr">
             <a:spAutoFit/>
           </a:bodyPr>
           <a:lstStyle/>
@@ -29781,7 +30150,7 @@
           <a:noFill/>
         </p:spPr>
         <p:txBody>
-          <a:bodyPr wrap="square" lIns="36576" rIns="36576" tIns="18288" bIns="18288" anchor="ctr">
+          <a:bodyPr wrap="square" lIns="36576" tIns="18288" rIns="36576" bIns="18288" anchor="ctr">
             <a:spAutoFit/>
           </a:bodyPr>
           <a:lstStyle/>
@@ -29842,6 +30211,7 @@
           <a:lstStyle/>
           <a:p>
             <a:pPr algn="ctr"/>
+            <a:endParaRPr/>
           </a:p>
         </p:txBody>
       </p:sp>
@@ -29862,7 +30232,7 @@
           <a:noFill/>
         </p:spPr>
         <p:txBody>
-          <a:bodyPr wrap="square" lIns="36576" rIns="36576" tIns="18288" bIns="18288" anchor="ctr">
+          <a:bodyPr wrap="square" lIns="36576" tIns="18288" rIns="36576" bIns="18288" anchor="ctr">
             <a:spAutoFit/>
           </a:bodyPr>
           <a:lstStyle/>
@@ -29897,7 +30267,7 @@
           <a:noFill/>
         </p:spPr>
         <p:txBody>
-          <a:bodyPr wrap="square" lIns="36576" rIns="36576" tIns="18288" bIns="18288" anchor="ctr">
+          <a:bodyPr wrap="square" lIns="36576" tIns="18288" rIns="36576" bIns="18288" anchor="ctr">
             <a:spAutoFit/>
           </a:bodyPr>
           <a:lstStyle/>
@@ -29958,6 +30328,7 @@
           <a:lstStyle/>
           <a:p>
             <a:pPr algn="ctr"/>
+            <a:endParaRPr/>
           </a:p>
         </p:txBody>
       </p:sp>
@@ -29978,7 +30349,7 @@
           <a:noFill/>
         </p:spPr>
         <p:txBody>
-          <a:bodyPr wrap="square" lIns="36576" rIns="36576" tIns="18288" bIns="18288" anchor="ctr">
+          <a:bodyPr wrap="square" lIns="36576" tIns="18288" rIns="36576" bIns="18288" anchor="ctr">
             <a:spAutoFit/>
           </a:bodyPr>
           <a:lstStyle/>
@@ -30013,7 +30384,7 @@
           <a:noFill/>
         </p:spPr>
         <p:txBody>
-          <a:bodyPr wrap="square" lIns="36576" rIns="36576" tIns="18288" bIns="18288" anchor="ctr">
+          <a:bodyPr wrap="square" lIns="36576" tIns="18288" rIns="36576" bIns="18288" anchor="ctr">
             <a:spAutoFit/>
           </a:bodyPr>
           <a:lstStyle/>
@@ -30043,7 +30414,7 @@
 </file>
 
 <file path=ppt/slides/slide5.xml><?xml version="1.0" encoding="utf-8"?>
-<p:sld xmlns:a="http://schemas.openxmlformats.org/drawingml/2006/main" xmlns:p="http://schemas.openxmlformats.org/presentationml/2006/main" xmlns:r="http://schemas.openxmlformats.org/officeDocument/2006/relationships">
+<p:sld xmlns:a="http://schemas.openxmlformats.org/drawingml/2006/main" xmlns:r="http://schemas.openxmlformats.org/officeDocument/2006/relationships" xmlns:p="http://schemas.openxmlformats.org/presentationml/2006/main">
   <p:cSld>
     <p:spTree>
       <p:nvGrpSpPr>
@@ -30051,7 +30422,14 @@
         <p:cNvGrpSpPr/>
         <p:nvPr/>
       </p:nvGrpSpPr>
-      <p:grpSpPr/>
+      <p:grpSpPr>
+        <a:xfrm>
+          <a:off x="0" y="0"/>
+          <a:ext cx="0" cy="0"/>
+          <a:chOff x="0" y="0"/>
+          <a:chExt cx="0" cy="0"/>
+        </a:xfrm>
+      </p:grpSpPr>
       <p:sp>
         <p:nvSpPr>
           <p:cNvPr id="2" name="Rectangle 1"/>
@@ -30093,6 +30471,7 @@
           <a:lstStyle/>
           <a:p>
             <a:pPr algn="ctr"/>
+            <a:endParaRPr/>
           </a:p>
         </p:txBody>
       </p:sp>
@@ -30137,6 +30516,7 @@
           <a:lstStyle/>
           <a:p>
             <a:pPr algn="ctr"/>
+            <a:endParaRPr/>
           </a:p>
         </p:txBody>
       </p:sp>
@@ -30181,6 +30561,7 @@
           <a:lstStyle/>
           <a:p>
             <a:pPr algn="ctr"/>
+            <a:endParaRPr/>
           </a:p>
         </p:txBody>
       </p:sp>
@@ -30201,7 +30582,7 @@
           <a:noFill/>
         </p:spPr>
         <p:txBody>
-          <a:bodyPr wrap="square" lIns="36576" rIns="36576" tIns="18288" bIns="18288" anchor="ctr">
+          <a:bodyPr wrap="square" lIns="36576" tIns="18288" rIns="36576" bIns="18288" anchor="ctr">
             <a:spAutoFit/>
           </a:bodyPr>
           <a:lstStyle/>
@@ -30236,7 +30617,7 @@
           <a:noFill/>
         </p:spPr>
         <p:txBody>
-          <a:bodyPr wrap="square" lIns="36576" rIns="36576" tIns="18288" bIns="18288" anchor="ctr">
+          <a:bodyPr wrap="square" lIns="36576" tIns="18288" rIns="36576" bIns="18288" anchor="ctr">
             <a:spAutoFit/>
           </a:bodyPr>
           <a:lstStyle/>
@@ -30271,7 +30652,7 @@
           <a:noFill/>
         </p:spPr>
         <p:txBody>
-          <a:bodyPr wrap="square" lIns="36576" rIns="36576" tIns="18288" bIns="18288" anchor="ctr">
+          <a:bodyPr wrap="square" lIns="36576" tIns="18288" rIns="36576" bIns="18288" anchor="ctr">
             <a:spAutoFit/>
           </a:bodyPr>
           <a:lstStyle/>
@@ -30306,7 +30687,7 @@
           <a:noFill/>
         </p:spPr>
         <p:txBody>
-          <a:bodyPr wrap="square" lIns="36576" rIns="36576" tIns="18288" bIns="18288" anchor="t">
+          <a:bodyPr wrap="square" lIns="36576" tIns="18288" rIns="36576" bIns="18288" anchor="t">
             <a:spAutoFit/>
           </a:bodyPr>
           <a:lstStyle/>
@@ -30365,6 +30746,7 @@
           <a:lstStyle/>
           <a:p>
             <a:pPr algn="ctr"/>
+            <a:endParaRPr/>
           </a:p>
         </p:txBody>
       </p:sp>
@@ -30385,7 +30767,7 @@
           <a:noFill/>
         </p:spPr>
         <p:txBody>
-          <a:bodyPr wrap="square" lIns="36576" rIns="36576" tIns="18288" bIns="18288" anchor="ctr">
+          <a:bodyPr wrap="square" lIns="36576" tIns="18288" rIns="36576" bIns="18288" anchor="ctr">
             <a:spAutoFit/>
           </a:bodyPr>
           <a:lstStyle/>
@@ -30420,7 +30802,7 @@
           <a:noFill/>
         </p:spPr>
         <p:txBody>
-          <a:bodyPr wrap="square" lIns="36576" rIns="36576" tIns="18288" bIns="18288" anchor="ctr">
+          <a:bodyPr wrap="square" lIns="36576" tIns="18288" rIns="36576" bIns="18288" anchor="ctr">
             <a:spAutoFit/>
           </a:bodyPr>
           <a:lstStyle/>
@@ -30479,6 +30861,7 @@
           <a:lstStyle/>
           <a:p>
             <a:pPr algn="ctr"/>
+            <a:endParaRPr/>
           </a:p>
         </p:txBody>
       </p:sp>
@@ -30525,6 +30908,7 @@
           <a:lstStyle/>
           <a:p>
             <a:pPr algn="ctr"/>
+            <a:endParaRPr/>
           </a:p>
         </p:txBody>
       </p:sp>
@@ -30545,7 +30929,7 @@
           <a:noFill/>
         </p:spPr>
         <p:txBody>
-          <a:bodyPr wrap="square" lIns="36576" rIns="36576" tIns="18288" bIns="18288" anchor="ctr">
+          <a:bodyPr wrap="square" lIns="36576" tIns="18288" rIns="36576" bIns="18288" anchor="ctr">
             <a:spAutoFit/>
           </a:bodyPr>
           <a:lstStyle/>
@@ -30580,7 +30964,7 @@
           <a:noFill/>
         </p:spPr>
         <p:txBody>
-          <a:bodyPr wrap="square" lIns="36576" rIns="36576" tIns="18288" bIns="18288" anchor="t">
+          <a:bodyPr wrap="square" lIns="36576" tIns="18288" rIns="36576" bIns="18288" anchor="t">
             <a:spAutoFit/>
           </a:bodyPr>
           <a:lstStyle/>
@@ -30615,7 +30999,7 @@
           <a:noFill/>
         </p:spPr>
         <p:txBody>
-          <a:bodyPr wrap="square" lIns="36576" rIns="36576" tIns="18288" bIns="18288" anchor="t">
+          <a:bodyPr wrap="square" lIns="36576" tIns="18288" rIns="36576" bIns="18288" anchor="t">
             <a:spAutoFit/>
           </a:bodyPr>
           <a:lstStyle/>
@@ -30674,6 +31058,7 @@
           <a:lstStyle/>
           <a:p>
             <a:pPr algn="ctr"/>
+            <a:endParaRPr/>
           </a:p>
         </p:txBody>
       </p:sp>
@@ -30720,6 +31105,7 @@
           <a:lstStyle/>
           <a:p>
             <a:pPr algn="ctr"/>
+            <a:endParaRPr/>
           </a:p>
         </p:txBody>
       </p:sp>
@@ -30740,7 +31126,7 @@
           <a:noFill/>
         </p:spPr>
         <p:txBody>
-          <a:bodyPr wrap="square" lIns="36576" rIns="36576" tIns="18288" bIns="18288" anchor="ctr">
+          <a:bodyPr wrap="square" lIns="36576" tIns="18288" rIns="36576" bIns="18288" anchor="ctr">
             <a:spAutoFit/>
           </a:bodyPr>
           <a:lstStyle/>
@@ -30775,7 +31161,7 @@
           <a:noFill/>
         </p:spPr>
         <p:txBody>
-          <a:bodyPr wrap="square" lIns="36576" rIns="36576" tIns="18288" bIns="18288" anchor="t">
+          <a:bodyPr wrap="square" lIns="36576" tIns="18288" rIns="36576" bIns="18288" anchor="t">
             <a:spAutoFit/>
           </a:bodyPr>
           <a:lstStyle/>
@@ -30810,7 +31196,7 @@
           <a:noFill/>
         </p:spPr>
         <p:txBody>
-          <a:bodyPr wrap="square" lIns="36576" rIns="36576" tIns="18288" bIns="18288" anchor="t">
+          <a:bodyPr wrap="square" lIns="36576" tIns="18288" rIns="36576" bIns="18288" anchor="t">
             <a:spAutoFit/>
           </a:bodyPr>
           <a:lstStyle/>
@@ -30869,6 +31255,7 @@
           <a:lstStyle/>
           <a:p>
             <a:pPr algn="ctr"/>
+            <a:endParaRPr/>
           </a:p>
         </p:txBody>
       </p:sp>
@@ -30915,6 +31302,7 @@
           <a:lstStyle/>
           <a:p>
             <a:pPr algn="ctr"/>
+            <a:endParaRPr/>
           </a:p>
         </p:txBody>
       </p:sp>
@@ -30935,7 +31323,7 @@
           <a:noFill/>
         </p:spPr>
         <p:txBody>
-          <a:bodyPr wrap="square" lIns="36576" rIns="36576" tIns="18288" bIns="18288" anchor="ctr">
+          <a:bodyPr wrap="square" lIns="36576" tIns="18288" rIns="36576" bIns="18288" anchor="ctr">
             <a:spAutoFit/>
           </a:bodyPr>
           <a:lstStyle/>
@@ -30970,7 +31358,7 @@
           <a:noFill/>
         </p:spPr>
         <p:txBody>
-          <a:bodyPr wrap="square" lIns="36576" rIns="36576" tIns="18288" bIns="18288" anchor="t">
+          <a:bodyPr wrap="square" lIns="36576" tIns="18288" rIns="36576" bIns="18288" anchor="t">
             <a:spAutoFit/>
           </a:bodyPr>
           <a:lstStyle/>
@@ -31005,7 +31393,7 @@
           <a:noFill/>
         </p:spPr>
         <p:txBody>
-          <a:bodyPr wrap="square" lIns="36576" rIns="36576" tIns="18288" bIns="18288" anchor="t">
+          <a:bodyPr wrap="square" lIns="36576" tIns="18288" rIns="36576" bIns="18288" anchor="t">
             <a:spAutoFit/>
           </a:bodyPr>
           <a:lstStyle/>
@@ -31064,6 +31452,7 @@
           <a:lstStyle/>
           <a:p>
             <a:pPr algn="ctr"/>
+            <a:endParaRPr/>
           </a:p>
         </p:txBody>
       </p:sp>
@@ -31110,6 +31499,7 @@
           <a:lstStyle/>
           <a:p>
             <a:pPr algn="ctr"/>
+            <a:endParaRPr/>
           </a:p>
         </p:txBody>
       </p:sp>
@@ -31130,7 +31520,7 @@
           <a:noFill/>
         </p:spPr>
         <p:txBody>
-          <a:bodyPr wrap="square" lIns="36576" rIns="36576" tIns="18288" bIns="18288" anchor="ctr">
+          <a:bodyPr wrap="square" lIns="36576" tIns="18288" rIns="36576" bIns="18288" anchor="ctr">
             <a:spAutoFit/>
           </a:bodyPr>
           <a:lstStyle/>
@@ -31165,7 +31555,7 @@
           <a:noFill/>
         </p:spPr>
         <p:txBody>
-          <a:bodyPr wrap="square" lIns="36576" rIns="36576" tIns="18288" bIns="18288" anchor="t">
+          <a:bodyPr wrap="square" lIns="36576" tIns="18288" rIns="36576" bIns="18288" anchor="t">
             <a:spAutoFit/>
           </a:bodyPr>
           <a:lstStyle/>
@@ -31200,7 +31590,7 @@
           <a:noFill/>
         </p:spPr>
         <p:txBody>
-          <a:bodyPr wrap="square" lIns="36576" rIns="36576" tIns="18288" bIns="18288" anchor="t">
+          <a:bodyPr wrap="square" lIns="36576" tIns="18288" rIns="36576" bIns="18288" anchor="t">
             <a:spAutoFit/>
           </a:bodyPr>
           <a:lstStyle/>
@@ -31259,6 +31649,7 @@
           <a:lstStyle/>
           <a:p>
             <a:pPr algn="ctr"/>
+            <a:endParaRPr/>
           </a:p>
         </p:txBody>
       </p:sp>
@@ -31305,6 +31696,7 @@
           <a:lstStyle/>
           <a:p>
             <a:pPr algn="ctr"/>
+            <a:endParaRPr/>
           </a:p>
         </p:txBody>
       </p:sp>
@@ -31325,7 +31717,7 @@
           <a:noFill/>
         </p:spPr>
         <p:txBody>
-          <a:bodyPr wrap="square" lIns="36576" rIns="36576" tIns="18288" bIns="18288" anchor="ctr">
+          <a:bodyPr wrap="square" lIns="36576" tIns="18288" rIns="36576" bIns="18288" anchor="ctr">
             <a:spAutoFit/>
           </a:bodyPr>
           <a:lstStyle/>
@@ -31360,7 +31752,7 @@
           <a:noFill/>
         </p:spPr>
         <p:txBody>
-          <a:bodyPr wrap="square" lIns="36576" rIns="36576" tIns="18288" bIns="18288" anchor="t">
+          <a:bodyPr wrap="square" lIns="36576" tIns="18288" rIns="36576" bIns="18288" anchor="t">
             <a:spAutoFit/>
           </a:bodyPr>
           <a:lstStyle/>
@@ -31395,7 +31787,7 @@
           <a:noFill/>
         </p:spPr>
         <p:txBody>
-          <a:bodyPr wrap="square" lIns="36576" rIns="36576" tIns="18288" bIns="18288" anchor="t">
+          <a:bodyPr wrap="square" lIns="36576" tIns="18288" rIns="36576" bIns="18288" anchor="t">
             <a:spAutoFit/>
           </a:bodyPr>
           <a:lstStyle/>
@@ -31425,7 +31817,7 @@
 </file>
 
 <file path=ppt/slides/slide6.xml><?xml version="1.0" encoding="utf-8"?>
-<p:sld xmlns:a="http://schemas.openxmlformats.org/drawingml/2006/main" xmlns:p="http://schemas.openxmlformats.org/presentationml/2006/main" xmlns:r="http://schemas.openxmlformats.org/officeDocument/2006/relationships">
+<p:sld xmlns:a="http://schemas.openxmlformats.org/drawingml/2006/main" xmlns:r="http://schemas.openxmlformats.org/officeDocument/2006/relationships" xmlns:p="http://schemas.openxmlformats.org/presentationml/2006/main">
   <p:cSld>
     <p:spTree>
       <p:nvGrpSpPr>
@@ -31433,7 +31825,14 @@
         <p:cNvGrpSpPr/>
         <p:nvPr/>
       </p:nvGrpSpPr>
-      <p:grpSpPr/>
+      <p:grpSpPr>
+        <a:xfrm>
+          <a:off x="0" y="0"/>
+          <a:ext cx="0" cy="0"/>
+          <a:chOff x="0" y="0"/>
+          <a:chExt cx="0" cy="0"/>
+        </a:xfrm>
+      </p:grpSpPr>
       <p:sp>
         <p:nvSpPr>
           <p:cNvPr id="2" name="Rectangle 1"/>
@@ -31475,6 +31874,7 @@
           <a:lstStyle/>
           <a:p>
             <a:pPr algn="ctr"/>
+            <a:endParaRPr/>
           </a:p>
         </p:txBody>
       </p:sp>
@@ -31519,6 +31919,7 @@
           <a:lstStyle/>
           <a:p>
             <a:pPr algn="ctr"/>
+            <a:endParaRPr/>
           </a:p>
         </p:txBody>
       </p:sp>
@@ -31563,6 +31964,7 @@
           <a:lstStyle/>
           <a:p>
             <a:pPr algn="ctr"/>
+            <a:endParaRPr/>
           </a:p>
         </p:txBody>
       </p:sp>
@@ -31583,7 +31985,7 @@
           <a:noFill/>
         </p:spPr>
         <p:txBody>
-          <a:bodyPr wrap="square" lIns="36576" rIns="36576" tIns="18288" bIns="18288" anchor="ctr">
+          <a:bodyPr wrap="square" lIns="36576" tIns="18288" rIns="36576" bIns="18288" anchor="ctr">
             <a:spAutoFit/>
           </a:bodyPr>
           <a:lstStyle/>
@@ -31618,7 +32020,7 @@
           <a:noFill/>
         </p:spPr>
         <p:txBody>
-          <a:bodyPr wrap="square" lIns="36576" rIns="36576" tIns="18288" bIns="18288" anchor="ctr">
+          <a:bodyPr wrap="square" lIns="36576" tIns="18288" rIns="36576" bIns="18288" anchor="ctr">
             <a:spAutoFit/>
           </a:bodyPr>
           <a:lstStyle/>
@@ -31653,7 +32055,7 @@
           <a:noFill/>
         </p:spPr>
         <p:txBody>
-          <a:bodyPr wrap="square" lIns="36576" rIns="36576" tIns="18288" bIns="18288" anchor="ctr">
+          <a:bodyPr wrap="square" lIns="36576" tIns="18288" rIns="36576" bIns="18288" anchor="ctr">
             <a:spAutoFit/>
           </a:bodyPr>
           <a:lstStyle/>
@@ -31688,7 +32090,7 @@
           <a:noFill/>
         </p:spPr>
         <p:txBody>
-          <a:bodyPr wrap="square" lIns="36576" rIns="36576" tIns="18288" bIns="18288" anchor="t">
+          <a:bodyPr wrap="square" lIns="36576" tIns="18288" rIns="36576" bIns="18288" anchor="t">
             <a:spAutoFit/>
           </a:bodyPr>
           <a:lstStyle/>
@@ -31747,6 +32149,7 @@
           <a:lstStyle/>
           <a:p>
             <a:pPr algn="ctr"/>
+            <a:endParaRPr/>
           </a:p>
         </p:txBody>
       </p:sp>
@@ -31767,7 +32170,7 @@
           <a:noFill/>
         </p:spPr>
         <p:txBody>
-          <a:bodyPr wrap="square" lIns="36576" rIns="36576" tIns="18288" bIns="18288" anchor="ctr">
+          <a:bodyPr wrap="square" lIns="36576" tIns="18288" rIns="36576" bIns="18288" anchor="ctr">
             <a:spAutoFit/>
           </a:bodyPr>
           <a:lstStyle/>
@@ -31802,7 +32205,7 @@
           <a:noFill/>
         </p:spPr>
         <p:txBody>
-          <a:bodyPr wrap="square" lIns="36576" rIns="36576" tIns="18288" bIns="18288" anchor="ctr">
+          <a:bodyPr wrap="square" lIns="36576" tIns="18288" rIns="36576" bIns="18288" anchor="ctr">
             <a:spAutoFit/>
           </a:bodyPr>
           <a:lstStyle/>
@@ -31837,7 +32240,7 @@
           <a:noFill/>
         </p:spPr>
         <p:txBody>
-          <a:bodyPr wrap="square" lIns="36576" rIns="36576" tIns="18288" bIns="18288" anchor="t">
+          <a:bodyPr wrap="square" lIns="36576" tIns="18288" rIns="36576" bIns="18288" anchor="t">
             <a:spAutoFit/>
           </a:bodyPr>
           <a:lstStyle/>
@@ -31872,7 +32275,7 @@
           <a:noFill/>
         </p:spPr>
         <p:txBody>
-          <a:bodyPr wrap="square" lIns="36576" rIns="36576" tIns="18288" bIns="18288" anchor="t">
+          <a:bodyPr wrap="square" lIns="36576" tIns="18288" rIns="36576" bIns="18288" anchor="t">
             <a:spAutoFit/>
           </a:bodyPr>
           <a:lstStyle/>
@@ -31911,7 +32314,7 @@
           <a:noFill/>
         </p:spPr>
         <p:txBody>
-          <a:bodyPr wrap="square" lIns="36576" rIns="36576" tIns="18288" bIns="18288" anchor="t">
+          <a:bodyPr wrap="square" lIns="36576" tIns="18288" rIns="36576" bIns="18288" anchor="t">
             <a:spAutoFit/>
           </a:bodyPr>
           <a:lstStyle/>
@@ -31972,6 +32375,7 @@
           <a:lstStyle/>
           <a:p>
             <a:pPr algn="ctr"/>
+            <a:endParaRPr/>
           </a:p>
         </p:txBody>
       </p:sp>
@@ -32016,6 +32420,7 @@
           <a:lstStyle/>
           <a:p>
             <a:pPr algn="ctr"/>
+            <a:endParaRPr/>
           </a:p>
         </p:txBody>
       </p:sp>
@@ -32036,7 +32441,7 @@
           <a:noFill/>
         </p:spPr>
         <p:txBody>
-          <a:bodyPr wrap="square" lIns="36576" rIns="36576" tIns="18288" bIns="18288" anchor="ctr">
+          <a:bodyPr wrap="square" lIns="36576" tIns="18288" rIns="36576" bIns="18288" anchor="ctr">
             <a:spAutoFit/>
           </a:bodyPr>
           <a:lstStyle/>
@@ -32071,7 +32476,7 @@
           <a:noFill/>
         </p:spPr>
         <p:txBody>
-          <a:bodyPr wrap="square" lIns="36576" rIns="36576" tIns="18288" bIns="18288" anchor="t">
+          <a:bodyPr wrap="square" lIns="36576" tIns="18288" rIns="36576" bIns="18288" anchor="t">
             <a:spAutoFit/>
           </a:bodyPr>
           <a:lstStyle/>
@@ -32132,6 +32537,7 @@
           <a:lstStyle/>
           <a:p>
             <a:pPr algn="ctr"/>
+            <a:endParaRPr/>
           </a:p>
         </p:txBody>
       </p:sp>
@@ -32176,6 +32582,7 @@
           <a:lstStyle/>
           <a:p>
             <a:pPr algn="ctr"/>
+            <a:endParaRPr/>
           </a:p>
         </p:txBody>
       </p:sp>
@@ -32196,7 +32603,7 @@
           <a:noFill/>
         </p:spPr>
         <p:txBody>
-          <a:bodyPr wrap="square" lIns="36576" rIns="36576" tIns="18288" bIns="18288" anchor="ctr">
+          <a:bodyPr wrap="square" lIns="36576" tIns="18288" rIns="36576" bIns="18288" anchor="ctr">
             <a:spAutoFit/>
           </a:bodyPr>
           <a:lstStyle/>
@@ -32231,7 +32638,7 @@
           <a:noFill/>
         </p:spPr>
         <p:txBody>
-          <a:bodyPr wrap="square" lIns="36576" rIns="36576" tIns="18288" bIns="18288" anchor="t">
+          <a:bodyPr wrap="square" lIns="36576" tIns="18288" rIns="36576" bIns="18288" anchor="t">
             <a:spAutoFit/>
           </a:bodyPr>
           <a:lstStyle/>
@@ -32266,7 +32673,7 @@
           <a:noFill/>
         </p:spPr>
         <p:txBody>
-          <a:bodyPr wrap="square" lIns="36576" rIns="36576" tIns="18288" bIns="18288" anchor="t">
+          <a:bodyPr wrap="square" lIns="36576" tIns="18288" rIns="36576" bIns="18288" anchor="t">
             <a:spAutoFit/>
           </a:bodyPr>
           <a:lstStyle/>
@@ -32301,7 +32708,7 @@
           <a:noFill/>
         </p:spPr>
         <p:txBody>
-          <a:bodyPr wrap="square" lIns="36576" rIns="36576" tIns="18288" bIns="18288" anchor="t">
+          <a:bodyPr wrap="square" lIns="36576" tIns="18288" rIns="36576" bIns="18288" anchor="t">
             <a:spAutoFit/>
           </a:bodyPr>
           <a:lstStyle/>
@@ -32362,6 +32769,7 @@
           <a:lstStyle/>
           <a:p>
             <a:pPr algn="ctr"/>
+            <a:endParaRPr/>
           </a:p>
         </p:txBody>
       </p:sp>
@@ -32406,6 +32814,7 @@
           <a:lstStyle/>
           <a:p>
             <a:pPr algn="ctr"/>
+            <a:endParaRPr/>
           </a:p>
         </p:txBody>
       </p:sp>
@@ -32426,7 +32835,7 @@
           <a:noFill/>
         </p:spPr>
         <p:txBody>
-          <a:bodyPr wrap="square" lIns="36576" rIns="36576" tIns="18288" bIns="18288" anchor="ctr">
+          <a:bodyPr wrap="square" lIns="36576" tIns="18288" rIns="36576" bIns="18288" anchor="ctr">
             <a:spAutoFit/>
           </a:bodyPr>
           <a:lstStyle/>
@@ -32461,7 +32870,7 @@
           <a:noFill/>
         </p:spPr>
         <p:txBody>
-          <a:bodyPr wrap="square" lIns="36576" rIns="36576" tIns="18288" bIns="18288" anchor="t">
+          <a:bodyPr wrap="square" lIns="36576" tIns="18288" rIns="36576" bIns="18288" anchor="t">
             <a:spAutoFit/>
           </a:bodyPr>
           <a:lstStyle/>
@@ -32496,7 +32905,7 @@
           <a:noFill/>
         </p:spPr>
         <p:txBody>
-          <a:bodyPr wrap="square" lIns="36576" rIns="36576" tIns="18288" bIns="18288" anchor="t">
+          <a:bodyPr wrap="square" lIns="36576" tIns="18288" rIns="36576" bIns="18288" anchor="t">
             <a:spAutoFit/>
           </a:bodyPr>
           <a:lstStyle/>
@@ -32531,7 +32940,7 @@
           <a:noFill/>
         </p:spPr>
         <p:txBody>
-          <a:bodyPr wrap="square" lIns="36576" rIns="36576" tIns="18288" bIns="18288" anchor="t">
+          <a:bodyPr wrap="square" lIns="36576" tIns="18288" rIns="36576" bIns="18288" anchor="t">
             <a:spAutoFit/>
           </a:bodyPr>
           <a:lstStyle/>
@@ -32592,6 +33001,7 @@
           <a:lstStyle/>
           <a:p>
             <a:pPr algn="ctr"/>
+            <a:endParaRPr/>
           </a:p>
         </p:txBody>
       </p:sp>
@@ -32636,6 +33046,7 @@
           <a:lstStyle/>
           <a:p>
             <a:pPr algn="ctr"/>
+            <a:endParaRPr/>
           </a:p>
         </p:txBody>
       </p:sp>
@@ -32656,7 +33067,7 @@
           <a:noFill/>
         </p:spPr>
         <p:txBody>
-          <a:bodyPr wrap="square" lIns="36576" rIns="36576" tIns="18288" bIns="18288" anchor="ctr">
+          <a:bodyPr wrap="square" lIns="36576" tIns="18288" rIns="36576" bIns="18288" anchor="ctr">
             <a:spAutoFit/>
           </a:bodyPr>
           <a:lstStyle/>
@@ -32691,7 +33102,7 @@
           <a:noFill/>
         </p:spPr>
         <p:txBody>
-          <a:bodyPr wrap="square" lIns="36576" rIns="36576" tIns="18288" bIns="18288" anchor="t">
+          <a:bodyPr wrap="square" lIns="36576" tIns="18288" rIns="36576" bIns="18288" anchor="t">
             <a:spAutoFit/>
           </a:bodyPr>
           <a:lstStyle/>
@@ -32726,7 +33137,7 @@
           <a:noFill/>
         </p:spPr>
         <p:txBody>
-          <a:bodyPr wrap="square" lIns="36576" rIns="36576" tIns="18288" bIns="18288" anchor="t">
+          <a:bodyPr wrap="square" lIns="36576" tIns="18288" rIns="36576" bIns="18288" anchor="t">
             <a:spAutoFit/>
           </a:bodyPr>
           <a:lstStyle/>
@@ -32761,7 +33172,7 @@
           <a:noFill/>
         </p:spPr>
         <p:txBody>
-          <a:bodyPr wrap="square" lIns="36576" rIns="36576" tIns="18288" bIns="18288" anchor="t">
+          <a:bodyPr wrap="square" lIns="36576" tIns="18288" rIns="36576" bIns="18288" anchor="t">
             <a:spAutoFit/>
           </a:bodyPr>
           <a:lstStyle/>
@@ -32796,7 +33207,7 @@
           <a:noFill/>
         </p:spPr>
         <p:txBody>
-          <a:bodyPr wrap="square" lIns="36576" rIns="36576" tIns="18288" bIns="18288" anchor="t">
+          <a:bodyPr wrap="square" lIns="36576" tIns="18288" rIns="36576" bIns="18288" anchor="t">
             <a:spAutoFit/>
           </a:bodyPr>
           <a:lstStyle/>
@@ -32855,6 +33266,7 @@
           <a:lstStyle/>
           <a:p>
             <a:pPr algn="ctr"/>
+            <a:endParaRPr/>
           </a:p>
         </p:txBody>
       </p:sp>
@@ -32875,7 +33287,7 @@
           <a:noFill/>
         </p:spPr>
         <p:txBody>
-          <a:bodyPr wrap="square" lIns="36576" rIns="36576" tIns="18288" bIns="18288" anchor="ctr">
+          <a:bodyPr wrap="square" lIns="36576" tIns="18288" rIns="36576" bIns="18288" anchor="ctr">
             <a:spAutoFit/>
           </a:bodyPr>
           <a:lstStyle/>
@@ -32910,7 +33322,7 @@
           <a:noFill/>
         </p:spPr>
         <p:txBody>
-          <a:bodyPr wrap="square" lIns="36576" rIns="36576" tIns="18288" bIns="18288" anchor="ctr">
+          <a:bodyPr wrap="square" lIns="36576" tIns="18288" rIns="36576" bIns="18288" anchor="ctr">
             <a:spAutoFit/>
           </a:bodyPr>
           <a:lstStyle/>
@@ -32969,6 +33381,7 @@
           <a:lstStyle/>
           <a:p>
             <a:pPr algn="ctr"/>
+            <a:endParaRPr/>
           </a:p>
         </p:txBody>
       </p:sp>
@@ -32989,7 +33402,7 @@
           <a:noFill/>
         </p:spPr>
         <p:txBody>
-          <a:bodyPr wrap="square" lIns="36576" rIns="36576" tIns="18288" bIns="18288" anchor="ctr">
+          <a:bodyPr wrap="square" lIns="36576" tIns="18288" rIns="36576" bIns="18288" anchor="ctr">
             <a:spAutoFit/>
           </a:bodyPr>
           <a:lstStyle/>
@@ -33024,7 +33437,7 @@
           <a:noFill/>
         </p:spPr>
         <p:txBody>
-          <a:bodyPr wrap="square" lIns="36576" rIns="36576" tIns="18288" bIns="18288" anchor="ctr">
+          <a:bodyPr wrap="square" lIns="36576" tIns="18288" rIns="36576" bIns="18288" anchor="ctr">
             <a:spAutoFit/>
           </a:bodyPr>
           <a:lstStyle/>
@@ -33083,6 +33496,7 @@
           <a:lstStyle/>
           <a:p>
             <a:pPr algn="ctr"/>
+            <a:endParaRPr/>
           </a:p>
         </p:txBody>
       </p:sp>
@@ -33103,7 +33517,7 @@
           <a:noFill/>
         </p:spPr>
         <p:txBody>
-          <a:bodyPr wrap="square" lIns="36576" rIns="36576" tIns="18288" bIns="18288" anchor="ctr">
+          <a:bodyPr wrap="square" lIns="36576" tIns="18288" rIns="36576" bIns="18288" anchor="ctr">
             <a:spAutoFit/>
           </a:bodyPr>
           <a:lstStyle/>
@@ -33138,7 +33552,7 @@
           <a:noFill/>
         </p:spPr>
         <p:txBody>
-          <a:bodyPr wrap="square" lIns="36576" rIns="36576" tIns="18288" bIns="18288" anchor="ctr">
+          <a:bodyPr wrap="square" lIns="36576" tIns="18288" rIns="36576" bIns="18288" anchor="ctr">
             <a:spAutoFit/>
           </a:bodyPr>
           <a:lstStyle/>
@@ -33197,6 +33611,7 @@
           <a:lstStyle/>
           <a:p>
             <a:pPr algn="ctr"/>
+            <a:endParaRPr/>
           </a:p>
         </p:txBody>
       </p:sp>
@@ -33217,7 +33632,7 @@
           <a:noFill/>
         </p:spPr>
         <p:txBody>
-          <a:bodyPr wrap="square" lIns="36576" rIns="36576" tIns="18288" bIns="18288" anchor="ctr">
+          <a:bodyPr wrap="square" lIns="36576" tIns="18288" rIns="36576" bIns="18288" anchor="ctr">
             <a:spAutoFit/>
           </a:bodyPr>
           <a:lstStyle/>
@@ -33252,7 +33667,7 @@
           <a:noFill/>
         </p:spPr>
         <p:txBody>
-          <a:bodyPr wrap="square" lIns="36576" rIns="36576" tIns="18288" bIns="18288" anchor="ctr">
+          <a:bodyPr wrap="square" lIns="36576" tIns="18288" rIns="36576" bIns="18288" anchor="ctr">
             <a:spAutoFit/>
           </a:bodyPr>
           <a:lstStyle/>
@@ -33311,6 +33726,7 @@
           <a:lstStyle/>
           <a:p>
             <a:pPr algn="ctr"/>
+            <a:endParaRPr/>
           </a:p>
         </p:txBody>
       </p:sp>
@@ -33331,7 +33747,7 @@
           <a:noFill/>
         </p:spPr>
         <p:txBody>
-          <a:bodyPr wrap="square" lIns="36576" rIns="36576" tIns="18288" bIns="18288" anchor="ctr">
+          <a:bodyPr wrap="square" lIns="36576" tIns="18288" rIns="36576" bIns="18288" anchor="ctr">
             <a:spAutoFit/>
           </a:bodyPr>
           <a:lstStyle/>
@@ -33366,7 +33782,7 @@
           <a:noFill/>
         </p:spPr>
         <p:txBody>
-          <a:bodyPr wrap="square" lIns="36576" rIns="36576" tIns="18288" bIns="18288" anchor="ctr">
+          <a:bodyPr wrap="square" lIns="36576" tIns="18288" rIns="36576" bIns="18288" anchor="ctr">
             <a:spAutoFit/>
           </a:bodyPr>
           <a:lstStyle/>
@@ -33425,6 +33841,7 @@
           <a:lstStyle/>
           <a:p>
             <a:pPr algn="ctr"/>
+            <a:endParaRPr/>
           </a:p>
         </p:txBody>
       </p:sp>
@@ -33445,7 +33862,7 @@
           <a:noFill/>
         </p:spPr>
         <p:txBody>
-          <a:bodyPr wrap="square" lIns="36576" rIns="36576" tIns="18288" bIns="18288" anchor="ctr">
+          <a:bodyPr wrap="square" lIns="36576" tIns="18288" rIns="36576" bIns="18288" anchor="ctr">
             <a:spAutoFit/>
           </a:bodyPr>
           <a:lstStyle/>
@@ -33480,7 +33897,7 @@
           <a:noFill/>
         </p:spPr>
         <p:txBody>
-          <a:bodyPr wrap="square" lIns="36576" rIns="36576" tIns="18288" bIns="18288" anchor="ctr">
+          <a:bodyPr wrap="square" lIns="36576" tIns="18288" rIns="36576" bIns="18288" anchor="ctr">
             <a:spAutoFit/>
           </a:bodyPr>
           <a:lstStyle/>
@@ -33539,6 +33956,7 @@
           <a:lstStyle/>
           <a:p>
             <a:pPr algn="ctr"/>
+            <a:endParaRPr/>
           </a:p>
         </p:txBody>
       </p:sp>
@@ -33559,7 +33977,7 @@
           <a:noFill/>
         </p:spPr>
         <p:txBody>
-          <a:bodyPr wrap="square" lIns="36576" rIns="36576" tIns="18288" bIns="18288" anchor="ctr">
+          <a:bodyPr wrap="square" lIns="36576" tIns="18288" rIns="36576" bIns="18288" anchor="ctr">
             <a:spAutoFit/>
           </a:bodyPr>
           <a:lstStyle/>
@@ -33594,7 +34012,7 @@
           <a:noFill/>
         </p:spPr>
         <p:txBody>
-          <a:bodyPr wrap="square" lIns="36576" rIns="36576" tIns="18288" bIns="18288" anchor="ctr">
+          <a:bodyPr wrap="square" lIns="36576" tIns="18288" rIns="36576" bIns="18288" anchor="ctr">
             <a:spAutoFit/>
           </a:bodyPr>
           <a:lstStyle/>
@@ -33653,6 +34071,7 @@
           <a:lstStyle/>
           <a:p>
             <a:pPr algn="ctr"/>
+            <a:endParaRPr/>
           </a:p>
         </p:txBody>
       </p:sp>
@@ -33673,7 +34092,7 @@
           <a:noFill/>
         </p:spPr>
         <p:txBody>
-          <a:bodyPr wrap="square" lIns="36576" rIns="36576" tIns="18288" bIns="18288" anchor="ctr">
+          <a:bodyPr wrap="square" lIns="36576" tIns="18288" rIns="36576" bIns="18288" anchor="ctr">
             <a:spAutoFit/>
           </a:bodyPr>
           <a:lstStyle/>
@@ -33708,7 +34127,7 @@
           <a:noFill/>
         </p:spPr>
         <p:txBody>
-          <a:bodyPr wrap="square" lIns="36576" rIns="36576" tIns="18288" bIns="18288" anchor="ctr">
+          <a:bodyPr wrap="square" lIns="36576" tIns="18288" rIns="36576" bIns="18288" anchor="ctr">
             <a:spAutoFit/>
           </a:bodyPr>
           <a:lstStyle/>
@@ -33767,6 +34186,7 @@
           <a:lstStyle/>
           <a:p>
             <a:pPr algn="ctr"/>
+            <a:endParaRPr/>
           </a:p>
         </p:txBody>
       </p:sp>
@@ -33787,7 +34207,7 @@
           <a:noFill/>
         </p:spPr>
         <p:txBody>
-          <a:bodyPr wrap="square" lIns="36576" rIns="36576" tIns="18288" bIns="18288" anchor="ctr">
+          <a:bodyPr wrap="square" lIns="36576" tIns="18288" rIns="36576" bIns="18288" anchor="ctr">
             <a:spAutoFit/>
           </a:bodyPr>
           <a:lstStyle/>
@@ -33822,7 +34242,7 @@
           <a:noFill/>
         </p:spPr>
         <p:txBody>
-          <a:bodyPr wrap="square" lIns="36576" rIns="36576" tIns="18288" bIns="18288" anchor="ctr">
+          <a:bodyPr wrap="square" lIns="36576" tIns="18288" rIns="36576" bIns="18288" anchor="ctr">
             <a:spAutoFit/>
           </a:bodyPr>
           <a:lstStyle/>
@@ -33881,6 +34301,7 @@
           <a:lstStyle/>
           <a:p>
             <a:pPr algn="ctr"/>
+            <a:endParaRPr/>
           </a:p>
         </p:txBody>
       </p:sp>
@@ -33901,7 +34322,7 @@
           <a:noFill/>
         </p:spPr>
         <p:txBody>
-          <a:bodyPr wrap="square" lIns="36576" rIns="36576" tIns="18288" bIns="18288" anchor="ctr">
+          <a:bodyPr wrap="square" lIns="36576" tIns="18288" rIns="36576" bIns="18288" anchor="ctr">
             <a:spAutoFit/>
           </a:bodyPr>
           <a:lstStyle/>
@@ -33936,7 +34357,7 @@
           <a:noFill/>
         </p:spPr>
         <p:txBody>
-          <a:bodyPr wrap="square" lIns="36576" rIns="36576" tIns="18288" bIns="18288" anchor="ctr">
+          <a:bodyPr wrap="square" lIns="36576" tIns="18288" rIns="36576" bIns="18288" anchor="ctr">
             <a:spAutoFit/>
           </a:bodyPr>
           <a:lstStyle/>
@@ -33966,7 +34387,7 @@
 </file>
 
 <file path=ppt/slides/slide7.xml><?xml version="1.0" encoding="utf-8"?>
-<p:sld xmlns:a="http://schemas.openxmlformats.org/drawingml/2006/main" xmlns:p="http://schemas.openxmlformats.org/presentationml/2006/main" xmlns:r="http://schemas.openxmlformats.org/officeDocument/2006/relationships">
+<p:sld xmlns:a="http://schemas.openxmlformats.org/drawingml/2006/main" xmlns:r="http://schemas.openxmlformats.org/officeDocument/2006/relationships" xmlns:p="http://schemas.openxmlformats.org/presentationml/2006/main">
   <p:cSld>
     <p:spTree>
       <p:nvGrpSpPr>
@@ -33974,7 +34395,14 @@
         <p:cNvGrpSpPr/>
         <p:nvPr/>
       </p:nvGrpSpPr>
-      <p:grpSpPr/>
+      <p:grpSpPr>
+        <a:xfrm>
+          <a:off x="0" y="0"/>
+          <a:ext cx="0" cy="0"/>
+          <a:chOff x="0" y="0"/>
+          <a:chExt cx="0" cy="0"/>
+        </a:xfrm>
+      </p:grpSpPr>
       <p:sp>
         <p:nvSpPr>
           <p:cNvPr id="2" name="Rectangle 1"/>
@@ -34016,6 +34444,7 @@
           <a:lstStyle/>
           <a:p>
             <a:pPr algn="ctr"/>
+            <a:endParaRPr/>
           </a:p>
         </p:txBody>
       </p:sp>
@@ -34060,6 +34489,7 @@
           <a:lstStyle/>
           <a:p>
             <a:pPr algn="ctr"/>
+            <a:endParaRPr/>
           </a:p>
         </p:txBody>
       </p:sp>
@@ -34104,6 +34534,7 @@
           <a:lstStyle/>
           <a:p>
             <a:pPr algn="ctr"/>
+            <a:endParaRPr/>
           </a:p>
         </p:txBody>
       </p:sp>
@@ -34124,7 +34555,7 @@
           <a:noFill/>
         </p:spPr>
         <p:txBody>
-          <a:bodyPr wrap="square" lIns="36576" rIns="36576" tIns="18288" bIns="18288" anchor="ctr">
+          <a:bodyPr wrap="square" lIns="36576" tIns="18288" rIns="36576" bIns="18288" anchor="ctr">
             <a:spAutoFit/>
           </a:bodyPr>
           <a:lstStyle/>
@@ -34159,7 +34590,7 @@
           <a:noFill/>
         </p:spPr>
         <p:txBody>
-          <a:bodyPr wrap="square" lIns="36576" rIns="36576" tIns="18288" bIns="18288" anchor="ctr">
+          <a:bodyPr wrap="square" lIns="36576" tIns="18288" rIns="36576" bIns="18288" anchor="ctr">
             <a:spAutoFit/>
           </a:bodyPr>
           <a:lstStyle/>
@@ -34194,7 +34625,7 @@
           <a:noFill/>
         </p:spPr>
         <p:txBody>
-          <a:bodyPr wrap="square" lIns="36576" rIns="36576" tIns="18288" bIns="18288" anchor="ctr">
+          <a:bodyPr wrap="square" lIns="36576" tIns="18288" rIns="36576" bIns="18288" anchor="ctr">
             <a:spAutoFit/>
           </a:bodyPr>
           <a:lstStyle/>
@@ -34229,7 +34660,7 @@
           <a:noFill/>
         </p:spPr>
         <p:txBody>
-          <a:bodyPr wrap="square" lIns="36576" rIns="36576" tIns="18288" bIns="18288" anchor="t">
+          <a:bodyPr wrap="square" lIns="36576" tIns="18288" rIns="36576" bIns="18288" anchor="t">
             <a:spAutoFit/>
           </a:bodyPr>
           <a:lstStyle/>
@@ -34288,6 +34719,7 @@
           <a:lstStyle/>
           <a:p>
             <a:pPr algn="ctr"/>
+            <a:endParaRPr/>
           </a:p>
         </p:txBody>
       </p:sp>
@@ -34308,7 +34740,7 @@
           <a:noFill/>
         </p:spPr>
         <p:txBody>
-          <a:bodyPr wrap="square" lIns="36576" rIns="36576" tIns="18288" bIns="18288" anchor="ctr">
+          <a:bodyPr wrap="square" lIns="36576" tIns="18288" rIns="36576" bIns="18288" anchor="ctr">
             <a:spAutoFit/>
           </a:bodyPr>
           <a:lstStyle/>
@@ -34343,7 +34775,7 @@
           <a:noFill/>
         </p:spPr>
         <p:txBody>
-          <a:bodyPr wrap="square" lIns="36576" rIns="36576" tIns="18288" bIns="18288" anchor="ctr">
+          <a:bodyPr wrap="square" lIns="36576" tIns="18288" rIns="36576" bIns="18288" anchor="ctr">
             <a:spAutoFit/>
           </a:bodyPr>
           <a:lstStyle/>
@@ -34402,7 +34834,7 @@
           <a:noFill/>
         </p:spPr>
         <p:txBody>
-          <a:bodyPr wrap="square" lIns="36576" rIns="36576" tIns="18288" bIns="18288" anchor="t">
+          <a:bodyPr wrap="square" lIns="36576" tIns="18288" rIns="36576" bIns="18288" anchor="t">
             <a:spAutoFit/>
           </a:bodyPr>
           <a:lstStyle/>
@@ -34461,7 +34893,7 @@
           <a:noFill/>
         </p:spPr>
         <p:txBody>
-          <a:bodyPr wrap="square" lIns="36576" rIns="36576" tIns="18288" bIns="18288" anchor="t">
+          <a:bodyPr wrap="square" lIns="36576" tIns="18288" rIns="36576" bIns="18288" anchor="t">
             <a:spAutoFit/>
           </a:bodyPr>
           <a:lstStyle/>
@@ -34520,7 +34952,7 @@
           <a:noFill/>
         </p:spPr>
         <p:txBody>
-          <a:bodyPr wrap="square" lIns="36576" rIns="36576" tIns="18288" bIns="18288" anchor="t">
+          <a:bodyPr wrap="square" lIns="36576" tIns="18288" rIns="36576" bIns="18288" anchor="t">
             <a:spAutoFit/>
           </a:bodyPr>
           <a:lstStyle/>
@@ -34579,7 +35011,7 @@
           <a:noFill/>
         </p:spPr>
         <p:txBody>
-          <a:bodyPr wrap="square" lIns="36576" rIns="36576" tIns="18288" bIns="18288" anchor="t">
+          <a:bodyPr wrap="square" lIns="36576" tIns="18288" rIns="36576" bIns="18288" anchor="t">
             <a:spAutoFit/>
           </a:bodyPr>
           <a:lstStyle/>
@@ -34614,7 +35046,7 @@
           <a:noFill/>
         </p:spPr>
         <p:txBody>
-          <a:bodyPr wrap="square" lIns="36576" rIns="36576" tIns="18288" bIns="18288" anchor="ctr">
+          <a:bodyPr wrap="square" lIns="36576" tIns="18288" rIns="36576" bIns="18288" anchor="ctr">
             <a:spAutoFit/>
           </a:bodyPr>
           <a:lstStyle/>
@@ -34658,7 +35090,7 @@
           <a:noFill/>
         </p:spPr>
         <p:txBody>
-          <a:bodyPr wrap="square" lIns="36576" rIns="36576" tIns="18288" bIns="18288" anchor="ctr">
+          <a:bodyPr wrap="square" lIns="36576" tIns="18288" rIns="36576" bIns="18288" anchor="ctr">
             <a:spAutoFit/>
           </a:bodyPr>
           <a:lstStyle/>
@@ -34702,7 +35134,7 @@
           <a:noFill/>
         </p:spPr>
         <p:txBody>
-          <a:bodyPr wrap="square" lIns="36576" rIns="36576" tIns="18288" bIns="18288" anchor="ctr">
+          <a:bodyPr wrap="square" lIns="36576" tIns="18288" rIns="36576" bIns="18288" anchor="ctr">
             <a:spAutoFit/>
           </a:bodyPr>
           <a:lstStyle/>
@@ -34746,7 +35178,7 @@
           <a:noFill/>
         </p:spPr>
         <p:txBody>
-          <a:bodyPr wrap="square" lIns="36576" rIns="36576" tIns="18288" bIns="18288" anchor="ctr">
+          <a:bodyPr wrap="square" lIns="36576" tIns="18288" rIns="36576" bIns="18288" anchor="ctr">
             <a:spAutoFit/>
           </a:bodyPr>
           <a:lstStyle/>
@@ -34790,7 +35222,7 @@
           <a:noFill/>
         </p:spPr>
         <p:txBody>
-          <a:bodyPr wrap="square" lIns="36576" rIns="36576" tIns="18288" bIns="18288" anchor="ctr">
+          <a:bodyPr wrap="square" lIns="36576" tIns="18288" rIns="36576" bIns="18288" anchor="ctr">
             <a:spAutoFit/>
           </a:bodyPr>
           <a:lstStyle/>
@@ -34834,7 +35266,7 @@
           <a:noFill/>
         </p:spPr>
         <p:txBody>
-          <a:bodyPr wrap="square" lIns="36576" rIns="36576" tIns="18288" bIns="18288" anchor="ctr">
+          <a:bodyPr wrap="square" lIns="36576" tIns="18288" rIns="36576" bIns="18288" anchor="ctr">
             <a:spAutoFit/>
           </a:bodyPr>
           <a:lstStyle/>
@@ -34904,6 +35336,7 @@
           <a:lstStyle/>
           <a:p>
             <a:pPr algn="ctr"/>
+            <a:endParaRPr/>
           </a:p>
         </p:txBody>
       </p:sp>
@@ -34924,7 +35357,7 @@
           <a:noFill/>
         </p:spPr>
         <p:txBody>
-          <a:bodyPr wrap="square" lIns="36576" rIns="36576" tIns="18288" bIns="18288" anchor="ctr">
+          <a:bodyPr wrap="square" lIns="36576" tIns="18288" rIns="36576" bIns="18288" anchor="ctr">
             <a:spAutoFit/>
           </a:bodyPr>
           <a:lstStyle/>
@@ -34981,7 +35414,7 @@
 </file>
 
 <file path=ppt/slides/slide8.xml><?xml version="1.0" encoding="utf-8"?>
-<p:sld xmlns:a="http://schemas.openxmlformats.org/drawingml/2006/main" xmlns:p="http://schemas.openxmlformats.org/presentationml/2006/main" xmlns:r="http://schemas.openxmlformats.org/officeDocument/2006/relationships">
+<p:sld xmlns:a="http://schemas.openxmlformats.org/drawingml/2006/main" xmlns:r="http://schemas.openxmlformats.org/officeDocument/2006/relationships" xmlns:p="http://schemas.openxmlformats.org/presentationml/2006/main">
   <p:cSld>
     <p:spTree>
       <p:nvGrpSpPr>
@@ -34989,7 +35422,14 @@
         <p:cNvGrpSpPr/>
         <p:nvPr/>
       </p:nvGrpSpPr>
-      <p:grpSpPr/>
+      <p:grpSpPr>
+        <a:xfrm>
+          <a:off x="0" y="0"/>
+          <a:ext cx="0" cy="0"/>
+          <a:chOff x="0" y="0"/>
+          <a:chExt cx="0" cy="0"/>
+        </a:xfrm>
+      </p:grpSpPr>
       <p:sp>
         <p:nvSpPr>
           <p:cNvPr id="2" name="Rectangle 1"/>
@@ -35031,6 +35471,7 @@
           <a:lstStyle/>
           <a:p>
             <a:pPr algn="ctr"/>
+            <a:endParaRPr/>
           </a:p>
         </p:txBody>
       </p:sp>
@@ -35075,6 +35516,7 @@
           <a:lstStyle/>
           <a:p>
             <a:pPr algn="ctr"/>
+            <a:endParaRPr/>
           </a:p>
         </p:txBody>
       </p:sp>
@@ -35119,6 +35561,7 @@
           <a:lstStyle/>
           <a:p>
             <a:pPr algn="ctr"/>
+            <a:endParaRPr/>
           </a:p>
         </p:txBody>
       </p:sp>
@@ -35139,7 +35582,7 @@
           <a:noFill/>
         </p:spPr>
         <p:txBody>
-          <a:bodyPr wrap="square" lIns="36576" rIns="36576" tIns="18288" bIns="18288" anchor="ctr">
+          <a:bodyPr wrap="square" lIns="36576" tIns="18288" rIns="36576" bIns="18288" anchor="ctr">
             <a:spAutoFit/>
           </a:bodyPr>
           <a:lstStyle/>
@@ -35174,7 +35617,7 @@
           <a:noFill/>
         </p:spPr>
         <p:txBody>
-          <a:bodyPr wrap="square" lIns="36576" rIns="36576" tIns="18288" bIns="18288" anchor="ctr">
+          <a:bodyPr wrap="square" lIns="36576" tIns="18288" rIns="36576" bIns="18288" anchor="ctr">
             <a:spAutoFit/>
           </a:bodyPr>
           <a:lstStyle/>
@@ -35209,7 +35652,7 @@
           <a:noFill/>
         </p:spPr>
         <p:txBody>
-          <a:bodyPr wrap="square" lIns="36576" rIns="36576" tIns="18288" bIns="18288" anchor="ctr">
+          <a:bodyPr wrap="square" lIns="36576" tIns="18288" rIns="36576" bIns="18288" anchor="ctr">
             <a:spAutoFit/>
           </a:bodyPr>
           <a:lstStyle/>
@@ -35244,7 +35687,7 @@
           <a:noFill/>
         </p:spPr>
         <p:txBody>
-          <a:bodyPr wrap="square" lIns="36576" rIns="36576" tIns="18288" bIns="18288" anchor="t">
+          <a:bodyPr wrap="square" lIns="36576" tIns="18288" rIns="36576" bIns="18288" anchor="t">
             <a:spAutoFit/>
           </a:bodyPr>
           <a:lstStyle/>
@@ -35303,6 +35746,7 @@
           <a:lstStyle/>
           <a:p>
             <a:pPr algn="ctr"/>
+            <a:endParaRPr/>
           </a:p>
         </p:txBody>
       </p:sp>
@@ -35323,7 +35767,7 @@
           <a:noFill/>
         </p:spPr>
         <p:txBody>
-          <a:bodyPr wrap="square" lIns="36576" rIns="36576" tIns="18288" bIns="18288" anchor="ctr">
+          <a:bodyPr wrap="square" lIns="36576" tIns="18288" rIns="36576" bIns="18288" anchor="ctr">
             <a:spAutoFit/>
           </a:bodyPr>
           <a:lstStyle/>
@@ -35358,7 +35802,7 @@
           <a:noFill/>
         </p:spPr>
         <p:txBody>
-          <a:bodyPr wrap="square" lIns="36576" rIns="36576" tIns="18288" bIns="18288" anchor="ctr">
+          <a:bodyPr wrap="square" lIns="36576" tIns="18288" rIns="36576" bIns="18288" anchor="ctr">
             <a:spAutoFit/>
           </a:bodyPr>
           <a:lstStyle/>
@@ -35419,6 +35863,7 @@
           <a:lstStyle/>
           <a:p>
             <a:pPr algn="ctr"/>
+            <a:endParaRPr/>
           </a:p>
         </p:txBody>
       </p:sp>
@@ -35463,6 +35908,7 @@
           <a:lstStyle/>
           <a:p>
             <a:pPr algn="ctr"/>
+            <a:endParaRPr/>
           </a:p>
         </p:txBody>
       </p:sp>
@@ -35483,7 +35929,7 @@
           <a:noFill/>
         </p:spPr>
         <p:txBody>
-          <a:bodyPr wrap="square" lIns="36576" rIns="36576" tIns="18288" bIns="18288" anchor="ctr">
+          <a:bodyPr wrap="square" lIns="36576" tIns="18288" rIns="36576" bIns="18288" anchor="ctr">
             <a:spAutoFit/>
           </a:bodyPr>
           <a:lstStyle/>
@@ -35518,7 +35964,7 @@
           <a:noFill/>
         </p:spPr>
         <p:txBody>
-          <a:bodyPr wrap="square" lIns="36576" rIns="36576" tIns="18288" bIns="18288" anchor="t">
+          <a:bodyPr wrap="square" lIns="36576" tIns="18288" rIns="36576" bIns="18288" anchor="t">
             <a:spAutoFit/>
           </a:bodyPr>
           <a:lstStyle/>
@@ -35553,7 +35999,7 @@
           <a:noFill/>
         </p:spPr>
         <p:txBody>
-          <a:bodyPr wrap="square" lIns="36576" rIns="36576" tIns="18288" bIns="18288" anchor="ctr">
+          <a:bodyPr wrap="square" lIns="36576" tIns="18288" rIns="36576" bIns="18288" anchor="ctr">
             <a:spAutoFit/>
           </a:bodyPr>
           <a:lstStyle/>
@@ -35616,6 +36062,7 @@
           <a:lstStyle/>
           <a:p>
             <a:pPr algn="ctr"/>
+            <a:endParaRPr/>
           </a:p>
         </p:txBody>
       </p:sp>
@@ -35636,7 +36083,7 @@
           <a:noFill/>
         </p:spPr>
         <p:txBody>
-          <a:bodyPr wrap="square" lIns="36576" rIns="36576" tIns="18288" bIns="18288" anchor="ctr">
+          <a:bodyPr wrap="square" lIns="36576" tIns="18288" rIns="36576" bIns="18288" anchor="ctr">
             <a:spAutoFit/>
           </a:bodyPr>
           <a:lstStyle/>
@@ -35695,6 +36142,7 @@
           <a:lstStyle/>
           <a:p>
             <a:pPr algn="ctr"/>
+            <a:endParaRPr/>
           </a:p>
         </p:txBody>
       </p:sp>
@@ -35741,6 +36189,7 @@
           <a:lstStyle/>
           <a:p>
             <a:pPr algn="ctr"/>
+            <a:endParaRPr/>
           </a:p>
         </p:txBody>
       </p:sp>
@@ -35785,6 +36234,7 @@
           <a:lstStyle/>
           <a:p>
             <a:pPr algn="ctr"/>
+            <a:endParaRPr/>
           </a:p>
         </p:txBody>
       </p:sp>
@@ -35805,7 +36255,7 @@
           <a:noFill/>
         </p:spPr>
         <p:txBody>
-          <a:bodyPr wrap="square" lIns="36576" rIns="36576" tIns="18288" bIns="18288" anchor="ctr">
+          <a:bodyPr wrap="square" lIns="36576" tIns="18288" rIns="36576" bIns="18288" anchor="ctr">
             <a:spAutoFit/>
           </a:bodyPr>
           <a:lstStyle/>
@@ -35840,7 +36290,7 @@
           <a:noFill/>
         </p:spPr>
         <p:txBody>
-          <a:bodyPr wrap="square" lIns="36576" rIns="36576" tIns="18288" bIns="18288" anchor="t">
+          <a:bodyPr wrap="square" lIns="36576" tIns="18288" rIns="36576" bIns="18288" anchor="t">
             <a:spAutoFit/>
           </a:bodyPr>
           <a:lstStyle/>
@@ -35875,7 +36325,7 @@
           <a:noFill/>
         </p:spPr>
         <p:txBody>
-          <a:bodyPr wrap="square" lIns="36576" rIns="36576" tIns="18288" bIns="18288" anchor="ctr">
+          <a:bodyPr wrap="square" lIns="36576" tIns="18288" rIns="36576" bIns="18288" anchor="ctr">
             <a:spAutoFit/>
           </a:bodyPr>
           <a:lstStyle/>
@@ -35938,6 +36388,7 @@
           <a:lstStyle/>
           <a:p>
             <a:pPr algn="ctr"/>
+            <a:endParaRPr/>
           </a:p>
         </p:txBody>
       </p:sp>
@@ -35958,7 +36409,7 @@
           <a:noFill/>
         </p:spPr>
         <p:txBody>
-          <a:bodyPr wrap="square" lIns="36576" rIns="36576" tIns="18288" bIns="18288" anchor="ctr">
+          <a:bodyPr wrap="square" lIns="36576" tIns="18288" rIns="36576" bIns="18288" anchor="ctr">
             <a:spAutoFit/>
           </a:bodyPr>
           <a:lstStyle/>
@@ -36017,6 +36468,7 @@
           <a:lstStyle/>
           <a:p>
             <a:pPr algn="ctr"/>
+            <a:endParaRPr/>
           </a:p>
         </p:txBody>
       </p:sp>
@@ -36063,6 +36515,7 @@
           <a:lstStyle/>
           <a:p>
             <a:pPr algn="ctr"/>
+            <a:endParaRPr/>
           </a:p>
         </p:txBody>
       </p:sp>
@@ -36107,6 +36560,7 @@
           <a:lstStyle/>
           <a:p>
             <a:pPr algn="ctr"/>
+            <a:endParaRPr/>
           </a:p>
         </p:txBody>
       </p:sp>
@@ -36127,7 +36581,7 @@
           <a:noFill/>
         </p:spPr>
         <p:txBody>
-          <a:bodyPr wrap="square" lIns="36576" rIns="36576" tIns="18288" bIns="18288" anchor="ctr">
+          <a:bodyPr wrap="square" lIns="36576" tIns="18288" rIns="36576" bIns="18288" anchor="ctr">
             <a:spAutoFit/>
           </a:bodyPr>
           <a:lstStyle/>
@@ -36162,7 +36616,7 @@
           <a:noFill/>
         </p:spPr>
         <p:txBody>
-          <a:bodyPr wrap="square" lIns="36576" rIns="36576" tIns="18288" bIns="18288" anchor="t">
+          <a:bodyPr wrap="square" lIns="36576" tIns="18288" rIns="36576" bIns="18288" anchor="t">
             <a:spAutoFit/>
           </a:bodyPr>
           <a:lstStyle/>
@@ -36197,7 +36651,7 @@
           <a:noFill/>
         </p:spPr>
         <p:txBody>
-          <a:bodyPr wrap="square" lIns="36576" rIns="36576" tIns="18288" bIns="18288" anchor="ctr">
+          <a:bodyPr wrap="square" lIns="36576" tIns="18288" rIns="36576" bIns="18288" anchor="ctr">
             <a:spAutoFit/>
           </a:bodyPr>
           <a:lstStyle/>
@@ -36260,6 +36714,7 @@
           <a:lstStyle/>
           <a:p>
             <a:pPr algn="ctr"/>
+            <a:endParaRPr/>
           </a:p>
         </p:txBody>
       </p:sp>
@@ -36280,7 +36735,7 @@
           <a:noFill/>
         </p:spPr>
         <p:txBody>
-          <a:bodyPr wrap="square" lIns="36576" rIns="36576" tIns="18288" bIns="18288" anchor="ctr">
+          <a:bodyPr wrap="square" lIns="36576" tIns="18288" rIns="36576" bIns="18288" anchor="ctr">
             <a:spAutoFit/>
           </a:bodyPr>
           <a:lstStyle/>
@@ -36339,6 +36794,7 @@
           <a:lstStyle/>
           <a:p>
             <a:pPr algn="ctr"/>
+            <a:endParaRPr/>
           </a:p>
         </p:txBody>
       </p:sp>
@@ -36385,6 +36841,7 @@
           <a:lstStyle/>
           <a:p>
             <a:pPr algn="ctr"/>
+            <a:endParaRPr/>
           </a:p>
         </p:txBody>
       </p:sp>
@@ -36429,6 +36886,7 @@
           <a:lstStyle/>
           <a:p>
             <a:pPr algn="ctr"/>
+            <a:endParaRPr/>
           </a:p>
         </p:txBody>
       </p:sp>
@@ -36449,7 +36907,7 @@
           <a:noFill/>
         </p:spPr>
         <p:txBody>
-          <a:bodyPr wrap="square" lIns="36576" rIns="36576" tIns="18288" bIns="18288" anchor="ctr">
+          <a:bodyPr wrap="square" lIns="36576" tIns="18288" rIns="36576" bIns="18288" anchor="ctr">
             <a:spAutoFit/>
           </a:bodyPr>
           <a:lstStyle/>
@@ -36484,7 +36942,7 @@
           <a:noFill/>
         </p:spPr>
         <p:txBody>
-          <a:bodyPr wrap="square" lIns="36576" rIns="36576" tIns="18288" bIns="18288" anchor="t">
+          <a:bodyPr wrap="square" lIns="36576" tIns="18288" rIns="36576" bIns="18288" anchor="t">
             <a:spAutoFit/>
           </a:bodyPr>
           <a:lstStyle/>
@@ -36519,7 +36977,7 @@
           <a:noFill/>
         </p:spPr>
         <p:txBody>
-          <a:bodyPr wrap="square" lIns="36576" rIns="36576" tIns="18288" bIns="18288" anchor="ctr">
+          <a:bodyPr wrap="square" lIns="36576" tIns="18288" rIns="36576" bIns="18288" anchor="ctr">
             <a:spAutoFit/>
           </a:bodyPr>
           <a:lstStyle/>
@@ -36582,6 +37040,7 @@
           <a:lstStyle/>
           <a:p>
             <a:pPr algn="ctr"/>
+            <a:endParaRPr/>
           </a:p>
         </p:txBody>
       </p:sp>
@@ -36602,7 +37061,7 @@
           <a:noFill/>
         </p:spPr>
         <p:txBody>
-          <a:bodyPr wrap="square" lIns="36576" rIns="36576" tIns="18288" bIns="18288" anchor="ctr">
+          <a:bodyPr wrap="square" lIns="36576" tIns="18288" rIns="36576" bIns="18288" anchor="ctr">
             <a:spAutoFit/>
           </a:bodyPr>
           <a:lstStyle/>
@@ -36661,6 +37120,7 @@
           <a:lstStyle/>
           <a:p>
             <a:pPr algn="ctr"/>
+            <a:endParaRPr/>
           </a:p>
         </p:txBody>
       </p:sp>
@@ -36707,6 +37167,7 @@
           <a:lstStyle/>
           <a:p>
             <a:pPr algn="ctr"/>
+            <a:endParaRPr/>
           </a:p>
         </p:txBody>
       </p:sp>
@@ -36751,6 +37212,7 @@
           <a:lstStyle/>
           <a:p>
             <a:pPr algn="ctr"/>
+            <a:endParaRPr/>
           </a:p>
         </p:txBody>
       </p:sp>
@@ -36771,7 +37233,7 @@
           <a:noFill/>
         </p:spPr>
         <p:txBody>
-          <a:bodyPr wrap="square" lIns="36576" rIns="36576" tIns="18288" bIns="18288" anchor="ctr">
+          <a:bodyPr wrap="square" lIns="36576" tIns="18288" rIns="36576" bIns="18288" anchor="ctr">
             <a:spAutoFit/>
           </a:bodyPr>
           <a:lstStyle/>
@@ -36806,7 +37268,7 @@
           <a:noFill/>
         </p:spPr>
         <p:txBody>
-          <a:bodyPr wrap="square" lIns="36576" rIns="36576" tIns="18288" bIns="18288" anchor="t">
+          <a:bodyPr wrap="square" lIns="36576" tIns="18288" rIns="36576" bIns="18288" anchor="t">
             <a:spAutoFit/>
           </a:bodyPr>
           <a:lstStyle/>
@@ -36841,7 +37303,7 @@
           <a:noFill/>
         </p:spPr>
         <p:txBody>
-          <a:bodyPr wrap="square" lIns="36576" rIns="36576" tIns="18288" bIns="18288" anchor="ctr">
+          <a:bodyPr wrap="square" lIns="36576" tIns="18288" rIns="36576" bIns="18288" anchor="ctr">
             <a:spAutoFit/>
           </a:bodyPr>
           <a:lstStyle/>
@@ -36904,6 +37366,7 @@
           <a:lstStyle/>
           <a:p>
             <a:pPr algn="ctr"/>
+            <a:endParaRPr/>
           </a:p>
         </p:txBody>
       </p:sp>
@@ -36924,7 +37387,7 @@
           <a:noFill/>
         </p:spPr>
         <p:txBody>
-          <a:bodyPr wrap="square" lIns="36576" rIns="36576" tIns="18288" bIns="18288" anchor="ctr">
+          <a:bodyPr wrap="square" lIns="36576" tIns="18288" rIns="36576" bIns="18288" anchor="ctr">
             <a:spAutoFit/>
           </a:bodyPr>
           <a:lstStyle/>
@@ -36985,6 +37448,7 @@
           <a:lstStyle/>
           <a:p>
             <a:pPr algn="ctr"/>
+            <a:endParaRPr/>
           </a:p>
         </p:txBody>
       </p:sp>
@@ -37005,7 +37469,7 @@
           <a:noFill/>
         </p:spPr>
         <p:txBody>
-          <a:bodyPr wrap="square" lIns="36576" rIns="36576" tIns="18288" bIns="18288" anchor="ctr">
+          <a:bodyPr wrap="square" lIns="36576" tIns="18288" rIns="36576" bIns="18288" anchor="ctr">
             <a:spAutoFit/>
           </a:bodyPr>
           <a:lstStyle/>
@@ -37040,7 +37504,7 @@
           <a:noFill/>
         </p:spPr>
         <p:txBody>
-          <a:bodyPr wrap="square" lIns="36576" rIns="36576" tIns="18288" bIns="18288" anchor="t">
+          <a:bodyPr wrap="square" lIns="36576" tIns="18288" rIns="36576" bIns="18288" anchor="t">
             <a:spAutoFit/>
           </a:bodyPr>
           <a:lstStyle/>
@@ -37101,6 +37565,7 @@
           <a:lstStyle/>
           <a:p>
             <a:pPr algn="ctr"/>
+            <a:endParaRPr/>
           </a:p>
         </p:txBody>
       </p:sp>
@@ -37121,7 +37586,7 @@
           <a:noFill/>
         </p:spPr>
         <p:txBody>
-          <a:bodyPr wrap="square" lIns="36576" rIns="36576" tIns="18288" bIns="18288" anchor="ctr">
+          <a:bodyPr wrap="square" lIns="36576" tIns="18288" rIns="36576" bIns="18288" anchor="ctr">
             <a:spAutoFit/>
           </a:bodyPr>
           <a:lstStyle/>
@@ -37156,7 +37621,7 @@
           <a:noFill/>
         </p:spPr>
         <p:txBody>
-          <a:bodyPr wrap="square" lIns="36576" rIns="36576" tIns="18288" bIns="18288" anchor="t">
+          <a:bodyPr wrap="square" lIns="36576" tIns="18288" rIns="36576" bIns="18288" anchor="t">
             <a:spAutoFit/>
           </a:bodyPr>
           <a:lstStyle/>
@@ -37217,6 +37682,7 @@
           <a:lstStyle/>
           <a:p>
             <a:pPr algn="ctr"/>
+            <a:endParaRPr/>
           </a:p>
         </p:txBody>
       </p:sp>
@@ -37237,7 +37703,7 @@
           <a:noFill/>
         </p:spPr>
         <p:txBody>
-          <a:bodyPr wrap="square" lIns="36576" rIns="36576" tIns="18288" bIns="18288" anchor="ctr">
+          <a:bodyPr wrap="square" lIns="36576" tIns="18288" rIns="36576" bIns="18288" anchor="ctr">
             <a:spAutoFit/>
           </a:bodyPr>
           <a:lstStyle/>
@@ -37272,7 +37738,7 @@
           <a:noFill/>
         </p:spPr>
         <p:txBody>
-          <a:bodyPr wrap="square" lIns="36576" rIns="36576" tIns="18288" bIns="18288" anchor="t">
+          <a:bodyPr wrap="square" lIns="36576" tIns="18288" rIns="36576" bIns="18288" anchor="t">
             <a:spAutoFit/>
           </a:bodyPr>
           <a:lstStyle/>
@@ -37333,6 +37799,7 @@
           <a:lstStyle/>
           <a:p>
             <a:pPr algn="ctr"/>
+            <a:endParaRPr/>
           </a:p>
         </p:txBody>
       </p:sp>
@@ -37353,7 +37820,7 @@
           <a:noFill/>
         </p:spPr>
         <p:txBody>
-          <a:bodyPr wrap="square" lIns="36576" rIns="36576" tIns="18288" bIns="18288" anchor="ctr">
+          <a:bodyPr wrap="square" lIns="36576" tIns="18288" rIns="36576" bIns="18288" anchor="ctr">
             <a:spAutoFit/>
           </a:bodyPr>
           <a:lstStyle/>
@@ -37388,7 +37855,7 @@
           <a:noFill/>
         </p:spPr>
         <p:txBody>
-          <a:bodyPr wrap="square" lIns="36576" rIns="36576" tIns="18288" bIns="18288" anchor="t">
+          <a:bodyPr wrap="square" lIns="36576" tIns="18288" rIns="36576" bIns="18288" anchor="t">
             <a:spAutoFit/>
           </a:bodyPr>
           <a:lstStyle/>
@@ -37449,6 +37916,7 @@
           <a:lstStyle/>
           <a:p>
             <a:pPr algn="ctr"/>
+            <a:endParaRPr/>
           </a:p>
         </p:txBody>
       </p:sp>
@@ -37469,7 +37937,7 @@
           <a:noFill/>
         </p:spPr>
         <p:txBody>
-          <a:bodyPr wrap="square" lIns="36576" rIns="36576" tIns="18288" bIns="18288" anchor="ctr">
+          <a:bodyPr wrap="square" lIns="36576" tIns="18288" rIns="36576" bIns="18288" anchor="ctr">
             <a:spAutoFit/>
           </a:bodyPr>
           <a:lstStyle/>
@@ -37504,7 +37972,7 @@
           <a:noFill/>
         </p:spPr>
         <p:txBody>
-          <a:bodyPr wrap="square" lIns="36576" rIns="36576" tIns="18288" bIns="18288" anchor="t">
+          <a:bodyPr wrap="square" lIns="36576" tIns="18288" rIns="36576" bIns="18288" anchor="t">
             <a:spAutoFit/>
           </a:bodyPr>
           <a:lstStyle/>
@@ -37539,7 +38007,7 @@
           <a:noFill/>
         </p:spPr>
         <p:txBody>
-          <a:bodyPr wrap="square" lIns="36576" rIns="36576" tIns="18288" bIns="18288" anchor="t">
+          <a:bodyPr wrap="square" lIns="36576" tIns="18288" rIns="36576" bIns="18288" anchor="t">
             <a:spAutoFit/>
           </a:bodyPr>
           <a:lstStyle/>
@@ -37569,7 +38037,7 @@
 </file>
 
 <file path=ppt/slides/slide9.xml><?xml version="1.0" encoding="utf-8"?>
-<p:sld xmlns:a="http://schemas.openxmlformats.org/drawingml/2006/main" xmlns:p="http://schemas.openxmlformats.org/presentationml/2006/main" xmlns:r="http://schemas.openxmlformats.org/officeDocument/2006/relationships">
+<p:sld xmlns:a="http://schemas.openxmlformats.org/drawingml/2006/main" xmlns:r="http://schemas.openxmlformats.org/officeDocument/2006/relationships" xmlns:p="http://schemas.openxmlformats.org/presentationml/2006/main">
   <p:cSld>
     <p:spTree>
       <p:nvGrpSpPr>
@@ -37577,7 +38045,14 @@
         <p:cNvGrpSpPr/>
         <p:nvPr/>
       </p:nvGrpSpPr>
-      <p:grpSpPr/>
+      <p:grpSpPr>
+        <a:xfrm>
+          <a:off x="0" y="0"/>
+          <a:ext cx="0" cy="0"/>
+          <a:chOff x="0" y="0"/>
+          <a:chExt cx="0" cy="0"/>
+        </a:xfrm>
+      </p:grpSpPr>
       <p:sp>
         <p:nvSpPr>
           <p:cNvPr id="2" name="Rectangle 1"/>
@@ -37619,6 +38094,7 @@
           <a:lstStyle/>
           <a:p>
             <a:pPr algn="ctr"/>
+            <a:endParaRPr/>
           </a:p>
         </p:txBody>
       </p:sp>
@@ -37663,6 +38139,7 @@
           <a:lstStyle/>
           <a:p>
             <a:pPr algn="ctr"/>
+            <a:endParaRPr/>
           </a:p>
         </p:txBody>
       </p:sp>
@@ -37707,6 +38184,7 @@
           <a:lstStyle/>
           <a:p>
             <a:pPr algn="ctr"/>
+            <a:endParaRPr/>
           </a:p>
         </p:txBody>
       </p:sp>
@@ -37727,7 +38205,7 @@
           <a:noFill/>
         </p:spPr>
         <p:txBody>
-          <a:bodyPr wrap="square" lIns="36576" rIns="36576" tIns="18288" bIns="18288" anchor="ctr">
+          <a:bodyPr wrap="square" lIns="36576" tIns="18288" rIns="36576" bIns="18288" anchor="ctr">
             <a:spAutoFit/>
           </a:bodyPr>
           <a:lstStyle/>
@@ -37762,7 +38240,7 @@
           <a:noFill/>
         </p:spPr>
         <p:txBody>
-          <a:bodyPr wrap="square" lIns="36576" rIns="36576" tIns="18288" bIns="18288" anchor="ctr">
+          <a:bodyPr wrap="square" lIns="36576" tIns="18288" rIns="36576" bIns="18288" anchor="ctr">
             <a:spAutoFit/>
           </a:bodyPr>
           <a:lstStyle/>
@@ -37797,7 +38275,7 @@
           <a:noFill/>
         </p:spPr>
         <p:txBody>
-          <a:bodyPr wrap="square" lIns="36576" rIns="36576" tIns="18288" bIns="18288" anchor="ctr">
+          <a:bodyPr wrap="square" lIns="36576" tIns="18288" rIns="36576" bIns="18288" anchor="ctr">
             <a:spAutoFit/>
           </a:bodyPr>
           <a:lstStyle/>
@@ -37832,7 +38310,7 @@
           <a:noFill/>
         </p:spPr>
         <p:txBody>
-          <a:bodyPr wrap="square" lIns="36576" rIns="36576" tIns="18288" bIns="18288" anchor="t">
+          <a:bodyPr wrap="square" lIns="36576" tIns="18288" rIns="36576" bIns="18288" anchor="t">
             <a:spAutoFit/>
           </a:bodyPr>
           <a:lstStyle/>
@@ -37891,6 +38369,7 @@
           <a:lstStyle/>
           <a:p>
             <a:pPr algn="ctr"/>
+            <a:endParaRPr/>
           </a:p>
         </p:txBody>
       </p:sp>
@@ -37911,7 +38390,7 @@
           <a:noFill/>
         </p:spPr>
         <p:txBody>
-          <a:bodyPr wrap="square" lIns="36576" rIns="36576" tIns="18288" bIns="18288" anchor="ctr">
+          <a:bodyPr wrap="square" lIns="36576" tIns="18288" rIns="36576" bIns="18288" anchor="ctr">
             <a:spAutoFit/>
           </a:bodyPr>
           <a:lstStyle/>
@@ -37946,7 +38425,7 @@
           <a:noFill/>
         </p:spPr>
         <p:txBody>
-          <a:bodyPr wrap="square" lIns="36576" rIns="36576" tIns="18288" bIns="18288" anchor="ctr">
+          <a:bodyPr wrap="square" lIns="36576" tIns="18288" rIns="36576" bIns="18288" anchor="ctr">
             <a:spAutoFit/>
           </a:bodyPr>
           <a:lstStyle/>
@@ -38005,6 +38484,7 @@
           <a:lstStyle/>
           <a:p>
             <a:pPr algn="ctr"/>
+            <a:endParaRPr/>
           </a:p>
         </p:txBody>
       </p:sp>
@@ -38025,7 +38505,7 @@
           <a:noFill/>
         </p:spPr>
         <p:txBody>
-          <a:bodyPr wrap="square" lIns="36576" rIns="36576" tIns="18288" bIns="18288" anchor="t">
+          <a:bodyPr wrap="square" lIns="36576" tIns="18288" rIns="36576" bIns="18288" anchor="t">
             <a:spAutoFit/>
           </a:bodyPr>
           <a:lstStyle/>
@@ -38060,7 +38540,7 @@
           <a:noFill/>
         </p:spPr>
         <p:txBody>
-          <a:bodyPr wrap="square" lIns="36576" rIns="36576" tIns="18288" bIns="18288" anchor="t">
+          <a:bodyPr wrap="square" lIns="36576" tIns="18288" rIns="36576" bIns="18288" anchor="t">
             <a:spAutoFit/>
           </a:bodyPr>
           <a:lstStyle/>
@@ -38095,7 +38575,7 @@
           <a:noFill/>
         </p:spPr>
         <p:txBody>
-          <a:bodyPr wrap="square" lIns="36576" rIns="36576" tIns="18288" bIns="18288" anchor="t">
+          <a:bodyPr wrap="square" lIns="36576" tIns="18288" rIns="36576" bIns="18288" anchor="t">
             <a:spAutoFit/>
           </a:bodyPr>
           <a:lstStyle/>
@@ -38134,7 +38614,7 @@
           <a:noFill/>
         </p:spPr>
         <p:txBody>
-          <a:bodyPr wrap="square" lIns="36576" rIns="36576" tIns="18288" bIns="18288" anchor="t">
+          <a:bodyPr wrap="square" lIns="36576" tIns="18288" rIns="36576" bIns="18288" anchor="t">
             <a:spAutoFit/>
           </a:bodyPr>
           <a:lstStyle/>
@@ -38169,7 +38649,7 @@
           <a:noFill/>
         </p:spPr>
         <p:txBody>
-          <a:bodyPr wrap="square" lIns="36576" rIns="36576" tIns="18288" bIns="18288" anchor="t">
+          <a:bodyPr wrap="square" lIns="36576" tIns="18288" rIns="36576" bIns="18288" anchor="t">
             <a:spAutoFit/>
           </a:bodyPr>
           <a:lstStyle/>
@@ -38232,6 +38712,7 @@
           <a:lstStyle/>
           <a:p>
             <a:pPr algn="ctr"/>
+            <a:endParaRPr/>
           </a:p>
         </p:txBody>
       </p:sp>
@@ -38252,7 +38733,7 @@
           <a:noFill/>
         </p:spPr>
         <p:txBody>
-          <a:bodyPr wrap="square" lIns="36576" rIns="36576" tIns="18288" bIns="18288" anchor="t">
+          <a:bodyPr wrap="square" lIns="36576" tIns="18288" rIns="36576" bIns="18288" anchor="t">
             <a:spAutoFit/>
           </a:bodyPr>
           <a:lstStyle/>
@@ -38313,6 +38794,7 @@
           <a:lstStyle/>
           <a:p>
             <a:pPr algn="ctr"/>
+            <a:endParaRPr/>
           </a:p>
         </p:txBody>
       </p:sp>
@@ -38333,7 +38815,7 @@
           <a:noFill/>
         </p:spPr>
         <p:txBody>
-          <a:bodyPr wrap="square" lIns="36576" rIns="36576" tIns="18288" bIns="18288" anchor="t">
+          <a:bodyPr wrap="square" lIns="36576" tIns="18288" rIns="36576" bIns="18288" anchor="t">
             <a:spAutoFit/>
           </a:bodyPr>
           <a:lstStyle/>
@@ -38368,7 +38850,7 @@
           <a:noFill/>
         </p:spPr>
         <p:txBody>
-          <a:bodyPr wrap="square" lIns="36576" rIns="36576" tIns="18288" bIns="18288" anchor="t">
+          <a:bodyPr wrap="square" lIns="36576" tIns="18288" rIns="36576" bIns="18288" anchor="t">
             <a:spAutoFit/>
           </a:bodyPr>
           <a:lstStyle/>
@@ -38403,7 +38885,7 @@
           <a:noFill/>
         </p:spPr>
         <p:txBody>
-          <a:bodyPr wrap="square" lIns="36576" rIns="36576" tIns="18288" bIns="18288" anchor="t">
+          <a:bodyPr wrap="square" lIns="36576" tIns="18288" rIns="36576" bIns="18288" anchor="t">
             <a:spAutoFit/>
           </a:bodyPr>
           <a:lstStyle/>
@@ -38438,7 +38920,7 @@
           <a:noFill/>
         </p:spPr>
         <p:txBody>
-          <a:bodyPr wrap="square" lIns="36576" rIns="36576" tIns="18288" bIns="18288" anchor="t">
+          <a:bodyPr wrap="square" lIns="36576" tIns="18288" rIns="36576" bIns="18288" anchor="t">
             <a:spAutoFit/>
           </a:bodyPr>
           <a:lstStyle/>
@@ -38499,6 +38981,7 @@
           <a:lstStyle/>
           <a:p>
             <a:pPr algn="ctr"/>
+            <a:endParaRPr/>
           </a:p>
         </p:txBody>
       </p:sp>
@@ -38519,7 +39002,7 @@
           <a:noFill/>
         </p:spPr>
         <p:txBody>
-          <a:bodyPr wrap="square" lIns="36576" rIns="36576" tIns="18288" bIns="18288" anchor="t">
+          <a:bodyPr wrap="square" lIns="36576" tIns="18288" rIns="36576" bIns="18288" anchor="t">
             <a:spAutoFit/>
           </a:bodyPr>
           <a:lstStyle/>
@@ -38554,7 +39037,7 @@
           <a:noFill/>
         </p:spPr>
         <p:txBody>
-          <a:bodyPr wrap="square" lIns="36576" rIns="36576" tIns="18288" bIns="18288" anchor="t">
+          <a:bodyPr wrap="square" lIns="36576" tIns="18288" rIns="36576" bIns="18288" anchor="t">
             <a:spAutoFit/>
           </a:bodyPr>
           <a:lstStyle/>
@@ -38589,7 +39072,7 @@
           <a:noFill/>
         </p:spPr>
         <p:txBody>
-          <a:bodyPr wrap="square" lIns="36576" rIns="36576" tIns="18288" bIns="18288" anchor="t">
+          <a:bodyPr wrap="square" lIns="36576" tIns="18288" rIns="36576" bIns="18288" anchor="t">
             <a:spAutoFit/>
           </a:bodyPr>
           <a:lstStyle/>
@@ -38624,7 +39107,7 @@
           <a:noFill/>
         </p:spPr>
         <p:txBody>
-          <a:bodyPr wrap="square" lIns="36576" rIns="36576" tIns="18288" bIns="18288" anchor="t">
+          <a:bodyPr wrap="square" lIns="36576" tIns="18288" rIns="36576" bIns="18288" anchor="t">
             <a:spAutoFit/>
           </a:bodyPr>
           <a:lstStyle/>
@@ -38685,6 +39168,7 @@
           <a:lstStyle/>
           <a:p>
             <a:pPr algn="ctr"/>
+            <a:endParaRPr/>
           </a:p>
         </p:txBody>
       </p:sp>
@@ -38705,7 +39189,7 @@
           <a:noFill/>
         </p:spPr>
         <p:txBody>
-          <a:bodyPr wrap="square" lIns="36576" rIns="36576" tIns="18288" bIns="18288" anchor="t">
+          <a:bodyPr wrap="square" lIns="36576" tIns="18288" rIns="36576" bIns="18288" anchor="t">
             <a:spAutoFit/>
           </a:bodyPr>
           <a:lstStyle/>
@@ -38740,7 +39224,7 @@
           <a:noFill/>
         </p:spPr>
         <p:txBody>
-          <a:bodyPr wrap="square" lIns="36576" rIns="36576" tIns="18288" bIns="18288" anchor="t">
+          <a:bodyPr wrap="square" lIns="36576" tIns="18288" rIns="36576" bIns="18288" anchor="t">
             <a:spAutoFit/>
           </a:bodyPr>
           <a:lstStyle/>
@@ -38775,7 +39259,7 @@
           <a:noFill/>
         </p:spPr>
         <p:txBody>
-          <a:bodyPr wrap="square" lIns="36576" rIns="36576" tIns="18288" bIns="18288" anchor="t">
+          <a:bodyPr wrap="square" lIns="36576" tIns="18288" rIns="36576" bIns="18288" anchor="t">
             <a:spAutoFit/>
           </a:bodyPr>
           <a:lstStyle/>
@@ -38810,7 +39294,7 @@
           <a:noFill/>
         </p:spPr>
         <p:txBody>
-          <a:bodyPr wrap="square" lIns="36576" rIns="36576" tIns="18288" bIns="18288" anchor="t">
+          <a:bodyPr wrap="square" lIns="36576" tIns="18288" rIns="36576" bIns="18288" anchor="t">
             <a:spAutoFit/>
           </a:bodyPr>
           <a:lstStyle/>
@@ -38871,6 +39355,7 @@
           <a:lstStyle/>
           <a:p>
             <a:pPr algn="ctr"/>
+            <a:endParaRPr/>
           </a:p>
         </p:txBody>
       </p:sp>
@@ -38891,7 +39376,7 @@
           <a:noFill/>
         </p:spPr>
         <p:txBody>
-          <a:bodyPr wrap="square" lIns="36576" rIns="36576" tIns="18288" bIns="18288" anchor="ctr">
+          <a:bodyPr wrap="square" lIns="36576" tIns="18288" rIns="36576" bIns="18288" anchor="ctr">
             <a:spAutoFit/>
           </a:bodyPr>
           <a:lstStyle/>
